--- a/projects/测试DEMO/最终文档/测试DEMO.pptx
+++ b/projects/测试DEMO/最终文档/测试DEMO.pptx
@@ -114,7 +114,7 @@
 <c:chartSpace xmlns:c="http://schemas.openxmlformats.org/drawingml/2006/chart" xmlns:a="http://schemas.openxmlformats.org/drawingml/2006/main" xmlns:r="http://schemas.openxmlformats.org/officeDocument/2006/relationships">
   <c:date1904 val="0"/>
   <c:chart>
-    <c:autoTitleDeleted val="0"/>
+    <c:autoTitleDeleted val="1"/>
     <c:plotArea>
       <c:barChart>
         <c:barDir val="bar"/>
@@ -145,7 +145,7 @@
             <c:idx val="1"/>
             <c:spPr>
               <a:solidFill>
-                <a:srgbClr val="0070C0"/>
+                <a:srgbClr val="1890FF"/>
               </a:solidFill>
             </c:spPr>
           </c:dPt>
@@ -181,7 +181,6 @@
             </c:numRef>
           </c:val>
         </c:ser>
-        <c:gapWidth val="100"/>
         <c:axId val="-2068027336"/>
         <c:axId val="-2113994440"/>
       </c:barChart>
@@ -195,6 +194,20 @@
         <c:majorTickMark val="out"/>
         <c:minorTickMark val="none"/>
         <c:tickLblPos val="nextTo"/>
+        <c:txPr>
+          <a:bodyPr/>
+          <a:lstStyle/>
+          <a:p>
+            <a:pPr>
+              <a:defRPr sz="1100">
+                <a:solidFill>
+                  <a:srgbClr val="333333"/>
+                </a:solidFill>
+                <a:latin typeface="Microsoft YaHei"/>
+              </a:defRPr>
+            </a:pPr>
+          </a:p>
+        </c:txPr>
         <c:crossAx val="-2113994440"/>
         <c:crosses val="autoZero"/>
         <c:auto val="1"/>
@@ -204,15 +217,40 @@
       </c:catAx>
       <c:valAx>
         <c:axId val="-2113994440"/>
-        <c:scaling/>
+        <c:scaling>
+          <c:max val="70.0"/>
+        </c:scaling>
         <c:delete val="0"/>
         <c:axPos val="b"/>
-        <c:majorGridlines/>
+        <c:majorGridlines>
+          <c:spPr>
+            <a:ln>
+              <a:solidFill>
+                <a:srgbClr val="E0E0E0"/>
+              </a:solidFill>
+            </a:ln>
+          </c:spPr>
+        </c:majorGridlines>
         <c:majorTickMark val="out"/>
         <c:minorTickMark val="none"/>
         <c:tickLblPos val="nextTo"/>
+        <c:txPr>
+          <a:bodyPr/>
+          <a:lstStyle/>
+          <a:p>
+            <a:pPr>
+              <a:defRPr sz="1100">
+                <a:solidFill>
+                  <a:srgbClr val="555555"/>
+                </a:solidFill>
+                <a:latin typeface="Microsoft YaHei"/>
+              </a:defRPr>
+            </a:pPr>
+          </a:p>
+        </c:txPr>
         <c:crossAx val="-2068027336"/>
         <c:crosses val="autoZero"/>
+        <c:majorUnit val="20.0"/>
       </c:valAx>
     </c:plotArea>
     <c:dispBlanksAs val="gap"/>
@@ -261,7 +299,7 @@
             <c:idx val="0"/>
             <c:spPr>
               <a:solidFill>
-                <a:srgbClr val="F38B00"/>
+                <a:srgbClr val="FF8C00"/>
               </a:solidFill>
             </c:spPr>
           </c:dPt>
@@ -269,7 +307,7 @@
             <c:idx val="1"/>
             <c:spPr>
               <a:solidFill>
-                <a:srgbClr val="787878"/>
+                <a:srgbClr val="777777"/>
               </a:solidFill>
             </c:spPr>
           </c:dPt>
@@ -303,6 +341,15 @@
             </c:numRef>
           </c:val>
         </c:ser>
+        <c:dLbls>
+          <c:showLegendKey val="0"/>
+          <c:showVal val="0"/>
+          <c:showCatName val="0"/>
+          <c:showSerName val="0"/>
+          <c:showPercent val="0"/>
+          <c:showBubbleSize val="0"/>
+          <c:showLeaderLines val="1"/>
+        </c:dLbls>
         <c:firstSliceAng val="0"/>
         <c:holeSize val="50"/>
       </c:doughnutChart>
@@ -3317,7 +3364,7 @@
         <p:spPr>
           <a:xfrm>
             <a:off x="457200" y="365760"/>
-            <a:ext cx="8229600" cy="731520"/>
+            <a:ext cx="7315200" cy="731520"/>
           </a:xfrm>
           <a:prstGeom prst="rect">
             <a:avLst/>
@@ -3332,6 +3379,9 @@
           <a:p>
             <a:pPr>
               <a:defRPr sz="2800" b="1">
+                <a:solidFill>
+                  <a:srgbClr val="333333"/>
+                </a:solidFill>
                 <a:latin typeface="Microsoft YaHei"/>
               </a:defRPr>
             </a:pPr>
@@ -3385,14 +3435,14 @@
         </p:nvSpPr>
         <p:spPr>
           <a:xfrm>
-            <a:off x="10789920" y="548640"/>
-            <a:ext cx="914400" cy="365760"/>
+            <a:off x="10789920" y="457200"/>
+            <a:ext cx="731520" cy="320040"/>
           </a:xfrm>
           <a:prstGeom prst="roundRect">
             <a:avLst/>
           </a:prstGeom>
           <a:solidFill>
-            <a:srgbClr val="E6F0FA"/>
+            <a:srgbClr val="E3F2FD"/>
           </a:solidFill>
           <a:ln>
             <a:noFill/>
@@ -3419,8 +3469,9 @@
             <a:pPr algn="ctr">
               <a:defRPr sz="1200">
                 <a:solidFill>
-                  <a:srgbClr val="0070C0"/>
-                </a:solidFill>
+                  <a:srgbClr val="4A86C8"/>
+                </a:solidFill>
+                <a:latin typeface="Microsoft YaHei"/>
               </a:defRPr>
             </a:pPr>
             <a:r>
@@ -3437,7 +3488,7 @@
         </p:nvSpPr>
         <p:spPr>
           <a:xfrm>
-            <a:off x="457200" y="1828800"/>
+            <a:off x="457200" y="1645920"/>
             <a:ext cx="2743200" cy="457200"/>
           </a:xfrm>
           <a:prstGeom prst="rect">
@@ -3452,7 +3503,10 @@
           <a:lstStyle/>
           <a:p>
             <a:pPr>
-              <a:defRPr sz="2000" b="1">
+              <a:defRPr sz="1800" b="1">
+                <a:solidFill>
+                  <a:srgbClr val="333333"/>
+                </a:solidFill>
                 <a:latin typeface="Microsoft YaHei"/>
               </a:defRPr>
             </a:pPr>
@@ -3470,7 +3524,7 @@
         </p:nvSpPr>
         <p:spPr>
           <a:xfrm>
-            <a:off x="457200" y="2"/>
+            <a:off x="457200" y="2286000"/>
             <a:ext cx="548640" cy="548640"/>
           </a:xfrm>
           <a:prstGeom prst="rect">
@@ -3484,7 +3538,7 @@
           </a:bodyPr>
           <a:lstStyle/>
           <a:p>
-            <a:pPr>
+            <a:pPr algn="ctr">
               <a:defRPr sz="2400"/>
             </a:pPr>
             <a:r>
@@ -3501,7 +3555,7 @@
         </p:nvSpPr>
         <p:spPr>
           <a:xfrm>
-            <a:off x="1097280" y="2"/>
+            <a:off x="1188720" y="2286000"/>
             <a:ext cx="4389120" cy="731520"/>
           </a:xfrm>
           <a:prstGeom prst="rect">
@@ -3516,16 +3570,16 @@
           <a:lstStyle/>
           <a:p>
             <a:r>
-              <a:rPr b="1" sz="1400">
-                <a:solidFill>
-                  <a:srgbClr val="1F4E79"/>
+              <a:rPr b="1" sz="1300">
+                <a:solidFill>
+                  <a:srgbClr val="005080"/>
                 </a:solidFill>
                 <a:latin typeface="Microsoft YaHei"/>
               </a:rPr>
               <a:t>1. 效率突破: </a:t>
             </a:r>
             <a:r>
-              <a:rPr sz="1400">
+              <a:rPr sz="1300">
                 <a:solidFill>
                   <a:srgbClr val="333333"/>
                 </a:solidFill>
@@ -3536,353 +3590,23 @@
           </a:p>
         </p:txBody>
       </p:sp>
-      <p:cxnSp>
-        <p:nvCxnSpPr>
-          <p:cNvPr id="8" name="Connector 7"/>
-          <p:cNvCxnSpPr/>
-          <p:nvPr/>
-        </p:nvCxnSpPr>
-        <p:spPr>
-          <a:xfrm>
-            <a:off x="1097280" y="3.5500000000000003"/>
-            <a:ext cx="4389120" cy="0.0"/>
-          </a:xfrm>
-          <a:prstGeom prst="line">
-            <a:avLst/>
-          </a:prstGeom>
-          <a:ln>
+      <p:sp>
+        <p:nvSpPr>
+          <p:cNvPr id="8" name="Rectangle 7"/>
+          <p:cNvSpPr/>
+          <p:nvPr/>
+        </p:nvSpPr>
+        <p:spPr>
+          <a:xfrm>
+            <a:off x="1188720" y="3108960"/>
+            <a:ext cx="4297680" cy="12700"/>
+          </a:xfrm>
+          <a:prstGeom prst="rect">
+            <a:avLst/>
+          </a:prstGeom>
+          <a:ln w="12700">
             <a:solidFill>
-              <a:srgbClr val="E0E0E0"/>
-            </a:solidFill>
-          </a:ln>
-        </p:spPr>
-        <p:style>
-          <a:lnRef idx="2">
-            <a:schemeClr val="accent1"/>
-          </a:lnRef>
-          <a:fillRef idx="0">
-            <a:schemeClr val="accent1"/>
-          </a:fillRef>
-          <a:effectRef idx="1">
-            <a:schemeClr val="accent1"/>
-          </a:effectRef>
-          <a:fontRef idx="minor">
-            <a:schemeClr val="tx1"/>
-          </a:fontRef>
-        </p:style>
-      </p:cxnSp>
-      <p:sp>
-        <p:nvSpPr>
-          <p:cNvPr id="9" name="TextBox 8"/>
-          <p:cNvSpPr txBox="1"/>
-          <p:nvPr/>
-        </p:nvSpPr>
-        <p:spPr>
-          <a:xfrm>
-            <a:off x="457200" y="3"/>
-            <a:ext cx="548640" cy="548640"/>
-          </a:xfrm>
-          <a:prstGeom prst="rect">
-            <a:avLst/>
-          </a:prstGeom>
-          <a:noFill/>
-        </p:spPr>
-        <p:txBody>
-          <a:bodyPr wrap="none">
-            <a:spAutoFit/>
-          </a:bodyPr>
-          <a:lstStyle/>
-          <a:p>
-            <a:pPr>
-              <a:defRPr sz="2400"/>
-            </a:pPr>
-            <a:r>
-              <a:t>🤖</a:t>
-            </a:r>
-          </a:p>
-        </p:txBody>
-      </p:sp>
-      <p:sp>
-        <p:nvSpPr>
-          <p:cNvPr id="10" name="TextBox 9"/>
-          <p:cNvSpPr txBox="1"/>
-          <p:nvPr/>
-        </p:nvSpPr>
-        <p:spPr>
-          <a:xfrm>
-            <a:off x="1097280" y="3"/>
-            <a:ext cx="4389120" cy="731520"/>
-          </a:xfrm>
-          <a:prstGeom prst="rect">
-            <a:avLst/>
-          </a:prstGeom>
-          <a:noFill/>
-        </p:spPr>
-        <p:txBody>
-          <a:bodyPr wrap="square">
-            <a:spAutoFit/>
-          </a:bodyPr>
-          <a:lstStyle/>
-          <a:p>
-            <a:r>
-              <a:rPr b="1" sz="1400">
-                <a:solidFill>
-                  <a:srgbClr val="1F4E79"/>
-                </a:solidFill>
-                <a:latin typeface="Microsoft YaHei"/>
-              </a:rPr>
-              <a:t>2. 工具差距: </a:t>
-            </a:r>
-            <a:r>
-              <a:rPr sz="1400">
-                <a:solidFill>
-                  <a:srgbClr val="333333"/>
-                </a:solidFill>
-                <a:latin typeface="Microsoft YaHei"/>
-              </a:rPr>
-              <a:t>GitHub Copilot 耗时与手写持平，且因 SQL 不兼容导致运行崩溃。</a:t>
-            </a:r>
-          </a:p>
-        </p:txBody>
-      </p:sp>
-      <p:cxnSp>
-        <p:nvCxnSpPr>
-          <p:cNvPr id="11" name="Connector 10"/>
-          <p:cNvCxnSpPr/>
-          <p:nvPr/>
-        </p:nvCxnSpPr>
-        <p:spPr>
-          <a:xfrm>
-            <a:off x="1097280" y="4.55"/>
-            <a:ext cx="4389120" cy="0.0"/>
-          </a:xfrm>
-          <a:prstGeom prst="line">
-            <a:avLst/>
-          </a:prstGeom>
-          <a:ln>
-            <a:solidFill>
-              <a:srgbClr val="E0E0E0"/>
-            </a:solidFill>
-          </a:ln>
-        </p:spPr>
-        <p:style>
-          <a:lnRef idx="2">
-            <a:schemeClr val="accent1"/>
-          </a:lnRef>
-          <a:fillRef idx="0">
-            <a:schemeClr val="accent1"/>
-          </a:fillRef>
-          <a:effectRef idx="1">
-            <a:schemeClr val="accent1"/>
-          </a:effectRef>
-          <a:fontRef idx="minor">
-            <a:schemeClr val="tx1"/>
-          </a:fontRef>
-        </p:style>
-      </p:cxnSp>
-      <p:sp>
-        <p:nvSpPr>
-          <p:cNvPr id="12" name="TextBox 11"/>
-          <p:cNvSpPr txBox="1"/>
-          <p:nvPr/>
-        </p:nvSpPr>
-        <p:spPr>
-          <a:xfrm>
-            <a:off x="457200" y="4"/>
-            <a:ext cx="548640" cy="548640"/>
-          </a:xfrm>
-          <a:prstGeom prst="rect">
-            <a:avLst/>
-          </a:prstGeom>
-          <a:noFill/>
-        </p:spPr>
-        <p:txBody>
-          <a:bodyPr wrap="none">
-            <a:spAutoFit/>
-          </a:bodyPr>
-          <a:lstStyle/>
-          <a:p>
-            <a:pPr>
-              <a:defRPr sz="2400"/>
-            </a:pPr>
-            <a:r>
-              <a:t>🔀</a:t>
-            </a:r>
-          </a:p>
-        </p:txBody>
-      </p:sp>
-      <p:sp>
-        <p:nvSpPr>
-          <p:cNvPr id="13" name="TextBox 12"/>
-          <p:cNvSpPr txBox="1"/>
-          <p:nvPr/>
-        </p:nvSpPr>
-        <p:spPr>
-          <a:xfrm>
-            <a:off x="1097280" y="4"/>
-            <a:ext cx="4389120" cy="731520"/>
-          </a:xfrm>
-          <a:prstGeom prst="rect">
-            <a:avLst/>
-          </a:prstGeom>
-          <a:noFill/>
-        </p:spPr>
-        <p:txBody>
-          <a:bodyPr wrap="square">
-            <a:spAutoFit/>
-          </a:bodyPr>
-          <a:lstStyle/>
-          <a:p>
-            <a:r>
-              <a:rPr b="1" sz="1400">
-                <a:solidFill>
-                  <a:srgbClr val="1F4E79"/>
-                </a:solidFill>
-                <a:latin typeface="Microsoft YaHei"/>
-              </a:rPr>
-              <a:t>3. 交互对比: </a:t>
-            </a:r>
-            <a:r>
-              <a:rPr sz="1400">
-                <a:solidFill>
-                  <a:srgbClr val="333333"/>
-                </a:solidFill>
-                <a:latin typeface="Microsoft YaHei"/>
-              </a:rPr>
-              <a:t>Claude 仅需 2 轮提示即可运行，Copilot 需 5 轮以上人工干预。</a:t>
-            </a:r>
-          </a:p>
-        </p:txBody>
-      </p:sp>
-      <p:cxnSp>
-        <p:nvCxnSpPr>
-          <p:cNvPr id="14" name="Connector 13"/>
-          <p:cNvCxnSpPr/>
-          <p:nvPr/>
-        </p:nvCxnSpPr>
-        <p:spPr>
-          <a:xfrm>
-            <a:off x="1097280" y="5.55"/>
-            <a:ext cx="4389120" cy="0.0"/>
-          </a:xfrm>
-          <a:prstGeom prst="line">
-            <a:avLst/>
-          </a:prstGeom>
-          <a:ln>
-            <a:solidFill>
-              <a:srgbClr val="E0E0E0"/>
-            </a:solidFill>
-          </a:ln>
-        </p:spPr>
-        <p:style>
-          <a:lnRef idx="2">
-            <a:schemeClr val="accent1"/>
-          </a:lnRef>
-          <a:fillRef idx="0">
-            <a:schemeClr val="accent1"/>
-          </a:fillRef>
-          <a:effectRef idx="1">
-            <a:schemeClr val="accent1"/>
-          </a:effectRef>
-          <a:fontRef idx="minor">
-            <a:schemeClr val="tx1"/>
-          </a:fontRef>
-        </p:style>
-      </p:cxnSp>
-      <p:sp>
-        <p:nvSpPr>
-          <p:cNvPr id="15" name="TextBox 14"/>
-          <p:cNvSpPr txBox="1"/>
-          <p:nvPr/>
-        </p:nvSpPr>
-        <p:spPr>
-          <a:xfrm>
-            <a:off x="457200" y="5"/>
-            <a:ext cx="548640" cy="548640"/>
-          </a:xfrm>
-          <a:prstGeom prst="rect">
-            <a:avLst/>
-          </a:prstGeom>
-          <a:noFill/>
-        </p:spPr>
-        <p:txBody>
-          <a:bodyPr wrap="none">
-            <a:spAutoFit/>
-          </a:bodyPr>
-          <a:lstStyle/>
-          <a:p>
-            <a:pPr>
-              <a:defRPr sz="2400"/>
-            </a:pPr>
-            <a:r>
-              <a:t>🔍</a:t>
-            </a:r>
-          </a:p>
-        </p:txBody>
-      </p:sp>
-      <p:sp>
-        <p:nvSpPr>
-          <p:cNvPr id="16" name="TextBox 15"/>
-          <p:cNvSpPr txBox="1"/>
-          <p:nvPr/>
-        </p:nvSpPr>
-        <p:spPr>
-          <a:xfrm>
-            <a:off x="1097280" y="5"/>
-            <a:ext cx="4389120" cy="731520"/>
-          </a:xfrm>
-          <a:prstGeom prst="rect">
-            <a:avLst/>
-          </a:prstGeom>
-          <a:noFill/>
-        </p:spPr>
-        <p:txBody>
-          <a:bodyPr wrap="square">
-            <a:spAutoFit/>
-          </a:bodyPr>
-          <a:lstStyle/>
-          <a:p>
-            <a:r>
-              <a:rPr b="1" sz="1400">
-                <a:solidFill>
-                  <a:srgbClr val="1F4E79"/>
-                </a:solidFill>
-                <a:latin typeface="Microsoft YaHei"/>
-              </a:rPr>
-              <a:t>4. 核心瓶颈: </a:t>
-            </a:r>
-            <a:r>
-              <a:rPr sz="1400">
-                <a:solidFill>
-                  <a:srgbClr val="333333"/>
-                </a:solidFill>
-                <a:latin typeface="Microsoft YaHei"/>
-              </a:rPr>
-              <a:t>[地址取数逻辑] 与 [过账状态字段] 是 AI 初始生成的共同盲区。</a:t>
-            </a:r>
-          </a:p>
-        </p:txBody>
-      </p:sp>
-      <p:sp>
-        <p:nvSpPr>
-          <p:cNvPr id="17" name="Rounded Rectangle 16"/>
-          <p:cNvSpPr/>
-          <p:nvPr/>
-        </p:nvSpPr>
-        <p:spPr>
-          <a:xfrm>
-            <a:off x="5943600" y="1645920"/>
-            <a:ext cx="5760720" cy="3840480"/>
-          </a:xfrm>
-          <a:prstGeom prst="roundRect">
-            <a:avLst/>
-          </a:prstGeom>
-          <a:solidFill>
-            <a:srgbClr val="F4F8FC"/>
-          </a:solidFill>
-          <a:ln w="19050">
-            <a:solidFill>
-              <a:srgbClr val="BDD7EE"/>
+              <a:srgbClr val="EAEAEA"/>
             </a:solidFill>
           </a:ln>
         </p:spPr>
@@ -3910,14 +3634,14 @@
       </p:sp>
       <p:sp>
         <p:nvSpPr>
-          <p:cNvPr id="18" name="TextBox 17"/>
+          <p:cNvPr id="9" name="TextBox 8"/>
           <p:cNvSpPr txBox="1"/>
           <p:nvPr/>
         </p:nvSpPr>
         <p:spPr>
           <a:xfrm>
-            <a:off x="6126480" y="1828800"/>
-            <a:ext cx="3657600" cy="457200"/>
+            <a:off x="457200" y="3337560"/>
+            <a:ext cx="548640" cy="548640"/>
           </a:xfrm>
           <a:prstGeom prst="rect">
             <a:avLst/>
@@ -3930,8 +3654,362 @@
           </a:bodyPr>
           <a:lstStyle/>
           <a:p>
+            <a:pPr algn="ctr">
+              <a:defRPr sz="2400"/>
+            </a:pPr>
+            <a:r>
+              <a:t>🤖</a:t>
+            </a:r>
+          </a:p>
+        </p:txBody>
+      </p:sp>
+      <p:sp>
+        <p:nvSpPr>
+          <p:cNvPr id="10" name="TextBox 9"/>
+          <p:cNvSpPr txBox="1"/>
+          <p:nvPr/>
+        </p:nvSpPr>
+        <p:spPr>
+          <a:xfrm>
+            <a:off x="1188720" y="3337560"/>
+            <a:ext cx="4389120" cy="731520"/>
+          </a:xfrm>
+          <a:prstGeom prst="rect">
+            <a:avLst/>
+          </a:prstGeom>
+          <a:noFill/>
+        </p:spPr>
+        <p:txBody>
+          <a:bodyPr wrap="square">
+            <a:spAutoFit/>
+          </a:bodyPr>
+          <a:lstStyle/>
+          <a:p>
+            <a:r>
+              <a:rPr b="1" sz="1300">
+                <a:solidFill>
+                  <a:srgbClr val="005080"/>
+                </a:solidFill>
+                <a:latin typeface="Microsoft YaHei"/>
+              </a:rPr>
+              <a:t>2. 工具差距: </a:t>
+            </a:r>
+            <a:r>
+              <a:rPr sz="1300">
+                <a:solidFill>
+                  <a:srgbClr val="333333"/>
+                </a:solidFill>
+                <a:latin typeface="Microsoft YaHei"/>
+              </a:rPr>
+              <a:t>GitHub Copilot 耗时与手写持平，且因 SQL 不兼容导致运行崩溃。</a:t>
+            </a:r>
+          </a:p>
+        </p:txBody>
+      </p:sp>
+      <p:sp>
+        <p:nvSpPr>
+          <p:cNvPr id="11" name="Rectangle 10"/>
+          <p:cNvSpPr/>
+          <p:nvPr/>
+        </p:nvSpPr>
+        <p:spPr>
+          <a:xfrm>
+            <a:off x="1188720" y="4160520"/>
+            <a:ext cx="4297680" cy="12700"/>
+          </a:xfrm>
+          <a:prstGeom prst="rect">
+            <a:avLst/>
+          </a:prstGeom>
+          <a:ln w="12700">
+            <a:solidFill>
+              <a:srgbClr val="EAEAEA"/>
+            </a:solidFill>
+          </a:ln>
+        </p:spPr>
+        <p:style>
+          <a:lnRef idx="1">
+            <a:schemeClr val="accent1"/>
+          </a:lnRef>
+          <a:fillRef idx="3">
+            <a:schemeClr val="accent1"/>
+          </a:fillRef>
+          <a:effectRef idx="2">
+            <a:schemeClr val="accent1"/>
+          </a:effectRef>
+          <a:fontRef idx="minor">
+            <a:schemeClr val="lt1"/>
+          </a:fontRef>
+        </p:style>
+        <p:txBody>
+          <a:bodyPr rtlCol="0" anchor="ctr"/>
+          <a:lstStyle/>
+          <a:p>
+            <a:pPr algn="ctr"/>
+          </a:p>
+        </p:txBody>
+      </p:sp>
+      <p:sp>
+        <p:nvSpPr>
+          <p:cNvPr id="12" name="TextBox 11"/>
+          <p:cNvSpPr txBox="1"/>
+          <p:nvPr/>
+        </p:nvSpPr>
+        <p:spPr>
+          <a:xfrm>
+            <a:off x="457200" y="4389120"/>
+            <a:ext cx="548640" cy="548640"/>
+          </a:xfrm>
+          <a:prstGeom prst="rect">
+            <a:avLst/>
+          </a:prstGeom>
+          <a:noFill/>
+        </p:spPr>
+        <p:txBody>
+          <a:bodyPr wrap="none">
+            <a:spAutoFit/>
+          </a:bodyPr>
+          <a:lstStyle/>
+          <a:p>
+            <a:pPr algn="ctr">
+              <a:defRPr sz="2400"/>
+            </a:pPr>
+            <a:r>
+              <a:t>🔀</a:t>
+            </a:r>
+          </a:p>
+        </p:txBody>
+      </p:sp>
+      <p:sp>
+        <p:nvSpPr>
+          <p:cNvPr id="13" name="TextBox 12"/>
+          <p:cNvSpPr txBox="1"/>
+          <p:nvPr/>
+        </p:nvSpPr>
+        <p:spPr>
+          <a:xfrm>
+            <a:off x="1188720" y="4389120"/>
+            <a:ext cx="4389120" cy="731520"/>
+          </a:xfrm>
+          <a:prstGeom prst="rect">
+            <a:avLst/>
+          </a:prstGeom>
+          <a:noFill/>
+        </p:spPr>
+        <p:txBody>
+          <a:bodyPr wrap="square">
+            <a:spAutoFit/>
+          </a:bodyPr>
+          <a:lstStyle/>
+          <a:p>
+            <a:r>
+              <a:rPr b="1" sz="1300">
+                <a:solidFill>
+                  <a:srgbClr val="005080"/>
+                </a:solidFill>
+                <a:latin typeface="Microsoft YaHei"/>
+              </a:rPr>
+              <a:t>3. 交互对比: </a:t>
+            </a:r>
+            <a:r>
+              <a:rPr sz="1300">
+                <a:solidFill>
+                  <a:srgbClr val="333333"/>
+                </a:solidFill>
+                <a:latin typeface="Microsoft YaHei"/>
+              </a:rPr>
+              <a:t>Claude 仅需 2 轮提示即可运行，Copilot 需 5 轮以上人工干预。</a:t>
+            </a:r>
+          </a:p>
+        </p:txBody>
+      </p:sp>
+      <p:sp>
+        <p:nvSpPr>
+          <p:cNvPr id="14" name="Rectangle 13"/>
+          <p:cNvSpPr/>
+          <p:nvPr/>
+        </p:nvSpPr>
+        <p:spPr>
+          <a:xfrm>
+            <a:off x="1188720" y="5212080"/>
+            <a:ext cx="4297680" cy="12700"/>
+          </a:xfrm>
+          <a:prstGeom prst="rect">
+            <a:avLst/>
+          </a:prstGeom>
+          <a:ln w="12700">
+            <a:solidFill>
+              <a:srgbClr val="EAEAEA"/>
+            </a:solidFill>
+          </a:ln>
+        </p:spPr>
+        <p:style>
+          <a:lnRef idx="1">
+            <a:schemeClr val="accent1"/>
+          </a:lnRef>
+          <a:fillRef idx="3">
+            <a:schemeClr val="accent1"/>
+          </a:fillRef>
+          <a:effectRef idx="2">
+            <a:schemeClr val="accent1"/>
+          </a:effectRef>
+          <a:fontRef idx="minor">
+            <a:schemeClr val="lt1"/>
+          </a:fontRef>
+        </p:style>
+        <p:txBody>
+          <a:bodyPr rtlCol="0" anchor="ctr"/>
+          <a:lstStyle/>
+          <a:p>
+            <a:pPr algn="ctr"/>
+          </a:p>
+        </p:txBody>
+      </p:sp>
+      <p:sp>
+        <p:nvSpPr>
+          <p:cNvPr id="15" name="TextBox 14"/>
+          <p:cNvSpPr txBox="1"/>
+          <p:nvPr/>
+        </p:nvSpPr>
+        <p:spPr>
+          <a:xfrm>
+            <a:off x="457200" y="5440679"/>
+            <a:ext cx="548640" cy="548640"/>
+          </a:xfrm>
+          <a:prstGeom prst="rect">
+            <a:avLst/>
+          </a:prstGeom>
+          <a:noFill/>
+        </p:spPr>
+        <p:txBody>
+          <a:bodyPr wrap="none">
+            <a:spAutoFit/>
+          </a:bodyPr>
+          <a:lstStyle/>
+          <a:p>
+            <a:pPr algn="ctr">
+              <a:defRPr sz="2400"/>
+            </a:pPr>
+            <a:r>
+              <a:t>🔍</a:t>
+            </a:r>
+          </a:p>
+        </p:txBody>
+      </p:sp>
+      <p:sp>
+        <p:nvSpPr>
+          <p:cNvPr id="16" name="TextBox 15"/>
+          <p:cNvSpPr txBox="1"/>
+          <p:nvPr/>
+        </p:nvSpPr>
+        <p:spPr>
+          <a:xfrm>
+            <a:off x="1188720" y="5440679"/>
+            <a:ext cx="4389120" cy="731520"/>
+          </a:xfrm>
+          <a:prstGeom prst="rect">
+            <a:avLst/>
+          </a:prstGeom>
+          <a:noFill/>
+        </p:spPr>
+        <p:txBody>
+          <a:bodyPr wrap="square">
+            <a:spAutoFit/>
+          </a:bodyPr>
+          <a:lstStyle/>
+          <a:p>
+            <a:r>
+              <a:rPr b="1" sz="1300">
+                <a:solidFill>
+                  <a:srgbClr val="005080"/>
+                </a:solidFill>
+                <a:latin typeface="Microsoft YaHei"/>
+              </a:rPr>
+              <a:t>4. 核心瓶颈: </a:t>
+            </a:r>
+            <a:r>
+              <a:rPr sz="1300">
+                <a:solidFill>
+                  <a:srgbClr val="333333"/>
+                </a:solidFill>
+                <a:latin typeface="Microsoft YaHei"/>
+              </a:rPr>
+              <a:t>[地址取数逻辑] 与 [过账状态字段] 是 AI 初始生成的共同盲区。</a:t>
+            </a:r>
+          </a:p>
+        </p:txBody>
+      </p:sp>
+      <p:sp>
+        <p:nvSpPr>
+          <p:cNvPr id="17" name="Rounded Rectangle 16"/>
+          <p:cNvSpPr/>
+          <p:nvPr/>
+        </p:nvSpPr>
+        <p:spPr>
+          <a:xfrm>
+            <a:off x="6035040" y="1645920"/>
+            <a:ext cx="5669280" cy="3657600"/>
+          </a:xfrm>
+          <a:prstGeom prst="roundRect">
+            <a:avLst/>
+          </a:prstGeom>
+          <a:solidFill>
+            <a:srgbClr val="F2F7FC"/>
+          </a:solidFill>
+          <a:ln w="12700">
+            <a:solidFill>
+              <a:srgbClr val="BDD7EE"/>
+            </a:solidFill>
+          </a:ln>
+        </p:spPr>
+        <p:style>
+          <a:lnRef idx="1">
+            <a:schemeClr val="accent1"/>
+          </a:lnRef>
+          <a:fillRef idx="3">
+            <a:schemeClr val="accent1"/>
+          </a:fillRef>
+          <a:effectRef idx="2">
+            <a:schemeClr val="accent1"/>
+          </a:effectRef>
+          <a:fontRef idx="minor">
+            <a:schemeClr val="lt1"/>
+          </a:fontRef>
+        </p:style>
+        <p:txBody>
+          <a:bodyPr rtlCol="0" anchor="ctr"/>
+          <a:lstStyle/>
+          <a:p>
+            <a:pPr algn="ctr"/>
+          </a:p>
+        </p:txBody>
+      </p:sp>
+      <p:sp>
+        <p:nvSpPr>
+          <p:cNvPr id="18" name="TextBox 17"/>
+          <p:cNvSpPr txBox="1"/>
+          <p:nvPr/>
+        </p:nvSpPr>
+        <p:spPr>
+          <a:xfrm>
+            <a:off x="6217920" y="1828800"/>
+            <a:ext cx="3657600" cy="457200"/>
+          </a:xfrm>
+          <a:prstGeom prst="rect">
+            <a:avLst/>
+          </a:prstGeom>
+          <a:noFill/>
+        </p:spPr>
+        <p:txBody>
+          <a:bodyPr wrap="none">
+            <a:spAutoFit/>
+          </a:bodyPr>
+          <a:lstStyle/>
+          <a:p>
             <a:pPr>
-              <a:defRPr sz="1600" b="1">
+              <a:defRPr sz="1400" b="1">
+                <a:solidFill>
+                  <a:srgbClr val="333333"/>
+                </a:solidFill>
                 <a:latin typeface="Microsoft YaHei"/>
               </a:defRPr>
             </a:pPr>
@@ -3950,8 +4028,8 @@
           <p:nvPr/>
         </p:nvGraphicFramePr>
         <p:xfrm>
-          <a:off x="6035040" y="2560320"/>
-          <a:ext cx="5303520" cy="2286000"/>
+          <a:off x="6217920" y="2286000"/>
+          <a:ext cx="5120640" cy="2377440"/>
         </p:xfrm>
         <a:graphic>
           <a:graphicData uri="http://schemas.openxmlformats.org/drawingml/2006/chart">
@@ -3967,7 +4045,7 @@
         </p:nvSpPr>
         <p:spPr>
           <a:xfrm>
-            <a:off x="10881360" y="3794760"/>
+            <a:off x="8412480" y="2834640"/>
             <a:ext cx="914400" cy="365760"/>
           </a:xfrm>
           <a:prstGeom prst="rect">
@@ -3982,12 +4060,15 @@
           <a:lstStyle/>
           <a:p>
             <a:pPr>
-              <a:defRPr sz="1400">
+              <a:defRPr sz="1400" b="1">
+                <a:solidFill>
+                  <a:srgbClr val="FFFFFF"/>
+                </a:solidFill>
                 <a:latin typeface="Microsoft YaHei"/>
               </a:defRPr>
             </a:pPr>
             <a:r>
-              <a:t>⚠️ 60</a:t>
+              <a:t>⚡ 30</a:t>
             </a:r>
           </a:p>
         </p:txBody>
@@ -4000,7 +4081,7 @@
         </p:nvSpPr>
         <p:spPr>
           <a:xfrm>
-            <a:off x="8778240" y="2971800"/>
+            <a:off x="10789920" y="3749039"/>
             <a:ext cx="914400" cy="365760"/>
           </a:xfrm>
           <a:prstGeom prst="rect">
@@ -4015,36 +4096,75 @@
           <a:lstStyle/>
           <a:p>
             <a:pPr>
-              <a:defRPr sz="1400">
+              <a:defRPr sz="1400" b="1">
+                <a:solidFill>
+                  <a:srgbClr val="333333"/>
+                </a:solidFill>
                 <a:latin typeface="Microsoft YaHei"/>
               </a:defRPr>
             </a:pPr>
             <a:r>
-              <a:t>⚡ 30</a:t>
-            </a:r>
-          </a:p>
-        </p:txBody>
-      </p:sp>
-      <p:sp>
-        <p:nvSpPr>
-          <p:cNvPr id="22" name="Rounded Rectangular Callout 21"/>
+              <a:t>⚠️ 60</a:t>
+            </a:r>
+          </a:p>
+        </p:txBody>
+      </p:sp>
+      <p:sp>
+        <p:nvSpPr>
+          <p:cNvPr id="22" name="TextBox 21"/>
+          <p:cNvSpPr txBox="1"/>
+          <p:nvPr/>
+        </p:nvSpPr>
+        <p:spPr>
+          <a:xfrm>
+            <a:off x="9509760" y="4114800"/>
+            <a:ext cx="2286000" cy="365760"/>
+          </a:xfrm>
+          <a:prstGeom prst="rect">
+            <a:avLst/>
+          </a:prstGeom>
+          <a:noFill/>
+        </p:spPr>
+        <p:txBody>
+          <a:bodyPr wrap="none">
+            <a:spAutoFit/>
+          </a:bodyPr>
+          <a:lstStyle/>
+          <a:p>
+            <a:pPr>
+              <a:defRPr sz="1000">
+                <a:solidFill>
+                  <a:srgbClr val="ED7D31"/>
+                </a:solidFill>
+                <a:latin typeface="Microsoft YaHei"/>
+              </a:defRPr>
+            </a:pPr>
+            <a:r>
+              <a:t>SQL 不兼容/运行崩溃</a:t>
+            </a:r>
+          </a:p>
+        </p:txBody>
+      </p:sp>
+      <p:sp>
+        <p:nvSpPr>
+          <p:cNvPr id="23" name="Rounded Rectangle 22"/>
           <p:cNvSpPr/>
           <p:nvPr/>
         </p:nvSpPr>
         <p:spPr>
           <a:xfrm>
-            <a:off x="8321040" y="2194560"/>
-            <a:ext cx="1463040" cy="548640"/>
-          </a:xfrm>
-          <a:prstGeom prst="wedgeRoundRectCallout">
+            <a:off x="8412480" y="2194560"/>
+            <a:ext cx="1463040" cy="457200"/>
+          </a:xfrm>
+          <a:prstGeom prst="roundRect">
             <a:avLst/>
           </a:prstGeom>
           <a:solidFill>
-            <a:srgbClr val="E6F0FA"/>
+            <a:srgbClr val="E1F0FF"/>
           </a:solidFill>
-          <a:ln>
+          <a:ln w="19050">
             <a:solidFill>
-              <a:srgbClr val="BDD7EE"/>
+              <a:srgbClr val="FFFFFF"/>
             </a:solidFill>
           </a:ln>
         </p:spPr>
@@ -4067,51 +4187,15 @@
           <a:lstStyle/>
           <a:p>
             <a:pPr algn="ctr">
-              <a:defRPr sz="1800" b="1">
-                <a:solidFill>
-                  <a:srgbClr val="0070C0"/>
+              <a:defRPr sz="1600" b="1">
+                <a:solidFill>
+                  <a:srgbClr val="005080"/>
                 </a:solidFill>
                 <a:latin typeface="Microsoft YaHei"/>
               </a:defRPr>
             </a:pPr>
             <a:r>
               <a:t>50% 提效</a:t>
-            </a:r>
-          </a:p>
-        </p:txBody>
-      </p:sp>
-      <p:sp>
-        <p:nvSpPr>
-          <p:cNvPr id="23" name="TextBox 22"/>
-          <p:cNvSpPr txBox="1"/>
-          <p:nvPr/>
-        </p:nvSpPr>
-        <p:spPr>
-          <a:xfrm>
-            <a:off x="9418320" y="4206240"/>
-            <a:ext cx="2286000" cy="365760"/>
-          </a:xfrm>
-          <a:prstGeom prst="rect">
-            <a:avLst/>
-          </a:prstGeom>
-          <a:noFill/>
-        </p:spPr>
-        <p:txBody>
-          <a:bodyPr wrap="none">
-            <a:spAutoFit/>
-          </a:bodyPr>
-          <a:lstStyle/>
-          <a:p>
-            <a:pPr>
-              <a:defRPr sz="1000">
-                <a:solidFill>
-                  <a:srgbClr val="ED7D31"/>
-                </a:solidFill>
-                <a:latin typeface="Microsoft YaHei"/>
-              </a:defRPr>
-            </a:pPr>
-            <a:r>
-              <a:t>SQL 不兼容/运行崩溃</a:t>
             </a:r>
           </a:p>
         </p:txBody>
@@ -4124,18 +4208,18 @@
         </p:nvSpPr>
         <p:spPr>
           <a:xfrm>
-            <a:off x="5943600" y="5669280"/>
-            <a:ext cx="5760720" cy="731520"/>
+            <a:off x="6035040" y="5486400"/>
+            <a:ext cx="5669280" cy="731520"/>
           </a:xfrm>
           <a:prstGeom prst="roundRect">
             <a:avLst/>
           </a:prstGeom>
           <a:solidFill>
-            <a:srgbClr val="F4F8FC"/>
+            <a:srgbClr val="E3F2FD"/>
           </a:solidFill>
-          <a:ln w="19050">
+          <a:ln w="12700">
             <a:solidFill>
-              <a:srgbClr val="BDD7EE"/>
+              <a:srgbClr val="90CAF9"/>
             </a:solidFill>
           </a:ln>
         </p:spPr>
@@ -4169,8 +4253,8 @@
         </p:nvSpPr>
         <p:spPr>
           <a:xfrm>
-            <a:off x="5943600" y="5806440"/>
-            <a:ext cx="5760720" cy="457200"/>
+            <a:off x="6035040" y="5577840"/>
+            <a:ext cx="5669280" cy="548640"/>
           </a:xfrm>
           <a:prstGeom prst="rect">
             <a:avLst/>
@@ -4191,12 +4275,12 @@
                 </a:solidFill>
                 <a:latin typeface="Microsoft YaHei"/>
               </a:rPr>
-              <a:t>✔️ ⚡ AI 初显 </a:t>
+              <a:t>✅ ⚡ AI 初显 </a:t>
             </a:r>
             <a:r>
               <a:rPr sz="2200" b="1">
                 <a:solidFill>
-                  <a:srgbClr val="0070C0"/>
+                  <a:srgbClr val="0066CC"/>
                 </a:solidFill>
                 <a:latin typeface="Microsoft YaHei"/>
               </a:rPr>
@@ -4219,7 +4303,7 @@
     <p:bg>
       <p:bgPr>
         <a:solidFill>
-          <a:srgbClr val="2B2B2B"/>
+          <a:srgbClr val="262626"/>
         </a:solidFill>
         <a:effectLst/>
       </p:bgPr>
@@ -4239,8 +4323,8 @@
         </p:nvSpPr>
         <p:spPr>
           <a:xfrm>
-            <a:off x="457200" y="365760"/>
-            <a:ext cx="9144000" cy="731520"/>
+            <a:off x="548640" y="365760"/>
+            <a:ext cx="9144000" cy="548640"/>
           </a:xfrm>
           <a:prstGeom prst="rect">
             <a:avLst/>
@@ -4258,7 +4342,6 @@
                 <a:solidFill>
                   <a:srgbClr val="FFFFFF"/>
                 </a:solidFill>
-                <a:latin typeface="Microsoft YaHei"/>
               </a:defRPr>
             </a:pPr>
             <a:r>
@@ -4275,8 +4358,8 @@
         </p:nvSpPr>
         <p:spPr>
           <a:xfrm>
-            <a:off x="457200" y="914400"/>
-            <a:ext cx="9144000" cy="548640"/>
+            <a:off x="548640" y="914400"/>
+            <a:ext cx="9144000" cy="457200"/>
           </a:xfrm>
           <a:prstGeom prst="rect">
             <a:avLst/>
@@ -4292,9 +4375,8 @@
             <a:pPr>
               <a:defRPr sz="2000" b="1">
                 <a:solidFill>
-                  <a:srgbClr val="FFFFFF"/>
-                </a:solidFill>
-                <a:latin typeface="Microsoft YaHei"/>
+                  <a:srgbClr val="DDDDDD"/>
+                </a:solidFill>
               </a:defRPr>
             </a:pPr>
             <a:r>
@@ -4311,7 +4393,7 @@
         </p:nvSpPr>
         <p:spPr>
           <a:xfrm>
-            <a:off x="1828800" y="1645920"/>
+            <a:off x="2286000" y="1645920"/>
             <a:ext cx="2286000" cy="365760"/>
           </a:xfrm>
           <a:prstGeom prst="rect">
@@ -4347,7 +4429,7 @@
           <p:nvPr/>
         </p:nvGraphicFramePr>
         <p:xfrm>
-          <a:off x="1828800" y="2103120"/>
+          <a:off x="2286000" y="2103120"/>
           <a:ext cx="2286000" cy="2286000"/>
         </p:xfrm>
         <a:graphic>
@@ -4364,16 +4446,16 @@
         </p:nvSpPr>
         <p:spPr>
           <a:xfrm>
-            <a:off x="2788920" y="3017520"/>
-            <a:ext cx="365760" cy="320040"/>
+            <a:off x="3246120" y="3063240"/>
+            <a:ext cx="365760" cy="365760"/>
           </a:xfrm>
           <a:prstGeom prst="triangle">
             <a:avLst/>
           </a:prstGeom>
           <a:noFill/>
-          <a:ln w="19050">
+          <a:ln w="25400">
             <a:solidFill>
-              <a:srgbClr val="F38B00"/>
+              <a:srgbClr val="FF8C00"/>
             </a:solidFill>
           </a:ln>
         </p:spPr>
@@ -4407,43 +4489,8 @@
         </p:nvSpPr>
         <p:spPr>
           <a:xfrm>
-            <a:off x="2788920" y="3063240"/>
-            <a:ext cx="365760" cy="320040"/>
-          </a:xfrm>
-          <a:prstGeom prst="rect">
-            <a:avLst/>
-          </a:prstGeom>
-          <a:noFill/>
-        </p:spPr>
-        <p:txBody>
-          <a:bodyPr wrap="none" tIns="25400">
-            <a:spAutoFit/>
-          </a:bodyPr>
-          <a:lstStyle/>
-          <a:p>
-            <a:pPr algn="ctr">
-              <a:defRPr sz="1400" b="1">
-                <a:solidFill>
-                  <a:srgbClr val="F38B00"/>
-                </a:solidFill>
-              </a:defRPr>
-            </a:pPr>
-            <a:r>
-              <a:t>?</a:t>
-            </a:r>
-          </a:p>
-        </p:txBody>
-      </p:sp>
-      <p:sp>
-        <p:nvSpPr>
-          <p:cNvPr id="8" name="TextBox 7"/>
-          <p:cNvSpPr txBox="1"/>
-          <p:nvPr/>
-        </p:nvSpPr>
-        <p:spPr>
-          <a:xfrm>
-            <a:off x="4206240" y="2286000"/>
-            <a:ext cx="1828800" cy="914400"/>
+            <a:off x="3246120" y="3154680"/>
+            <a:ext cx="365760" cy="365760"/>
           </a:xfrm>
           <a:prstGeom prst="rect">
             <a:avLst/>
@@ -4456,57 +4503,29 @@
           </a:bodyPr>
           <a:lstStyle/>
           <a:p>
-            <a:pPr>
-              <a:defRPr sz="1100">
-                <a:solidFill>
-                  <a:srgbClr val="FFFFFF"/>
+            <a:pPr algn="ctr">
+              <a:defRPr sz="1400" b="1">
+                <a:solidFill>
+                  <a:srgbClr val="FF8C00"/>
                 </a:solidFill>
               </a:defRPr>
             </a:pPr>
             <a:r>
-              <a:t>虚构字段</a:t>
-            </a:r>
-            <a:br/>
-            <a:r>
-              <a:t>(AI Hallucinations)</a:t>
-            </a:r>
-          </a:p>
-          <a:p>
-            <a:pPr>
-              <a:defRPr sz="2400" b="1">
-                <a:solidFill>
-                  <a:srgbClr val="F38B00"/>
-                </a:solidFill>
-              </a:defRPr>
-            </a:pPr>
-            <a:r>
-              <a:t>50%</a:t>
-            </a:r>
-          </a:p>
-          <a:p>
-            <a:pPr>
-              <a:defRPr sz="1000">
-                <a:solidFill>
-                  <a:srgbClr val="AAAAAA"/>
-                </a:solidFill>
-              </a:defRPr>
-            </a:pPr>
-            <a:r>
-              <a:t>9处核心字段</a:t>
-            </a:r>
-          </a:p>
-        </p:txBody>
-      </p:sp>
-      <p:sp>
-        <p:nvSpPr>
-          <p:cNvPr id="9" name="TextBox 8"/>
+              <a:t>?</a:t>
+            </a:r>
+          </a:p>
+        </p:txBody>
+      </p:sp>
+      <p:sp>
+        <p:nvSpPr>
+          <p:cNvPr id="8" name="TextBox 7"/>
           <p:cNvSpPr txBox="1"/>
           <p:nvPr/>
         </p:nvSpPr>
         <p:spPr>
           <a:xfrm>
-            <a:off x="182880" y="2834640"/>
-            <a:ext cx="1645920" cy="914400"/>
+            <a:off x="457200" y="2834640"/>
+            <a:ext cx="1645920" cy="731520"/>
           </a:xfrm>
           <a:prstGeom prst="rect">
             <a:avLst/>
@@ -4520,9 +4539,9 @@
           <a:lstStyle/>
           <a:p>
             <a:pPr algn="r">
-              <a:defRPr sz="1100">
-                <a:solidFill>
-                  <a:srgbClr val="FFFFFF"/>
+              <a:defRPr sz="1200">
+                <a:solidFill>
+                  <a:srgbClr val="DDDDDD"/>
                 </a:solidFill>
               </a:defRPr>
             </a:pPr>
@@ -4548,18 +4567,18 @@
           </a:p>
         </p:txBody>
       </p:sp>
-      <p:cxnSp>
-        <p:nvCxnSpPr>
-          <p:cNvPr id="10" name="Connector 9"/>
-          <p:cNvCxnSpPr/>
-          <p:nvPr/>
-        </p:nvCxnSpPr>
-        <p:spPr>
-          <a:xfrm>
-            <a:off x="1645920" y="3108960"/>
-            <a:ext cx="274320" cy="0"/>
-          </a:xfrm>
-          <a:prstGeom prst="line">
+      <p:sp>
+        <p:nvSpPr>
+          <p:cNvPr id="9" name="Rectangle 8"/>
+          <p:cNvSpPr/>
+          <p:nvPr/>
+        </p:nvSpPr>
+        <p:spPr>
+          <a:xfrm>
+            <a:off x="2194560" y="3246120"/>
+            <a:ext cx="182880" cy="12700"/>
+          </a:xfrm>
+          <a:prstGeom prst="rect">
             <a:avLst/>
           </a:prstGeom>
           <a:ln>
@@ -4569,79 +4588,6 @@
           </a:ln>
         </p:spPr>
         <p:style>
-          <a:lnRef idx="2">
-            <a:schemeClr val="accent1"/>
-          </a:lnRef>
-          <a:fillRef idx="0">
-            <a:schemeClr val="accent1"/>
-          </a:fillRef>
-          <a:effectRef idx="1">
-            <a:schemeClr val="accent1"/>
-          </a:effectRef>
-          <a:fontRef idx="minor">
-            <a:schemeClr val="tx1"/>
-          </a:fontRef>
-        </p:style>
-      </p:cxnSp>
-      <p:cxnSp>
-        <p:nvCxnSpPr>
-          <p:cNvPr id="11" name="Connector 10"/>
-          <p:cNvCxnSpPr/>
-          <p:nvPr/>
-        </p:nvCxnSpPr>
-        <p:spPr>
-          <a:xfrm>
-            <a:off x="4023360" y="3108960"/>
-            <a:ext cx="274320" cy="0"/>
-          </a:xfrm>
-          <a:prstGeom prst="line">
-            <a:avLst/>
-          </a:prstGeom>
-          <a:ln>
-            <a:solidFill>
-              <a:srgbClr val="F38B00"/>
-            </a:solidFill>
-          </a:ln>
-        </p:spPr>
-        <p:style>
-          <a:lnRef idx="2">
-            <a:schemeClr val="accent1"/>
-          </a:lnRef>
-          <a:fillRef idx="0">
-            <a:schemeClr val="accent1"/>
-          </a:fillRef>
-          <a:effectRef idx="1">
-            <a:schemeClr val="accent1"/>
-          </a:effectRef>
-          <a:fontRef idx="minor">
-            <a:schemeClr val="tx1"/>
-          </a:fontRef>
-        </p:style>
-      </p:cxnSp>
-      <p:sp>
-        <p:nvSpPr>
-          <p:cNvPr id="12" name="Rounded Rectangle 11"/>
-          <p:cNvSpPr/>
-          <p:nvPr/>
-        </p:nvSpPr>
-        <p:spPr>
-          <a:xfrm>
-            <a:off x="457200" y="4754880"/>
-            <a:ext cx="5029200" cy="1828800"/>
-          </a:xfrm>
-          <a:prstGeom prst="roundRect">
-            <a:avLst/>
-          </a:prstGeom>
-          <a:solidFill>
-            <a:srgbClr val="383838"/>
-          </a:solidFill>
-          <a:ln w="12700">
-            <a:solidFill>
-              <a:srgbClr val="F38B00"/>
-            </a:solidFill>
-          </a:ln>
-        </p:spPr>
-        <p:style>
           <a:lnRef idx="1">
             <a:schemeClr val="accent1"/>
           </a:lnRef>
@@ -4665,14 +4611,14 @@
       </p:sp>
       <p:sp>
         <p:nvSpPr>
-          <p:cNvPr id="13" name="TextBox 12"/>
+          <p:cNvPr id="10" name="TextBox 9"/>
           <p:cNvSpPr txBox="1"/>
           <p:nvPr/>
         </p:nvSpPr>
         <p:spPr>
           <a:xfrm>
-            <a:off x="457200" y="4800600"/>
-            <a:ext cx="5029200" cy="274320"/>
+            <a:off x="4754880" y="2377440"/>
+            <a:ext cx="1828800" cy="1097280"/>
           </a:xfrm>
           <a:prstGeom prst="rect">
             <a:avLst/>
@@ -4685,39 +4631,64 @@
           </a:bodyPr>
           <a:lstStyle/>
           <a:p>
-            <a:pPr algn="ctr">
-              <a:defRPr sz="1300" b="1">
-                <a:solidFill>
-                  <a:srgbClr val="FFFFFF"/>
+            <a:pPr>
+              <a:defRPr sz="1200">
+                <a:solidFill>
+                  <a:srgbClr val="DDDDDD"/>
                 </a:solidFill>
               </a:defRPr>
             </a:pPr>
             <a:r>
-              <a:t>AI 虚构字段 vs SAP 实际字段</a:t>
-            </a:r>
-          </a:p>
-        </p:txBody>
-      </p:sp>
-      <p:sp>
-        <p:nvSpPr>
-          <p:cNvPr id="14" name="Rounded Rectangle 13"/>
+              <a:t>虚构字段</a:t>
+            </a:r>
+            <a:br/>
+            <a:r>
+              <a:t>(AI Hallucinations)</a:t>
+            </a:r>
+          </a:p>
+          <a:p>
+            <a:pPr>
+              <a:defRPr sz="2800" b="1">
+                <a:solidFill>
+                  <a:srgbClr val="FF8C00"/>
+                </a:solidFill>
+              </a:defRPr>
+            </a:pPr>
+            <a:r>
+              <a:t>50%</a:t>
+            </a:r>
+          </a:p>
+          <a:p>
+            <a:pPr>
+              <a:defRPr sz="1000">
+                <a:solidFill>
+                  <a:srgbClr val="AAAAAA"/>
+                </a:solidFill>
+              </a:defRPr>
+            </a:pPr>
+            <a:r>
+              <a:t>9处核心字段</a:t>
+            </a:r>
+          </a:p>
+        </p:txBody>
+      </p:sp>
+      <p:sp>
+        <p:nvSpPr>
+          <p:cNvPr id="11" name="Rectangle 10"/>
           <p:cNvSpPr/>
           <p:nvPr/>
         </p:nvSpPr>
         <p:spPr>
           <a:xfrm>
-            <a:off x="640080" y="5120640"/>
-            <a:ext cx="2194560" cy="228600"/>
-          </a:xfrm>
-          <a:prstGeom prst="roundRect">
-            <a:avLst/>
-          </a:prstGeom>
-          <a:solidFill>
-            <a:srgbClr val="503C28"/>
-          </a:solidFill>
+            <a:off x="4480560" y="3246120"/>
+            <a:ext cx="182880" cy="12700"/>
+          </a:xfrm>
+          <a:prstGeom prst="rect">
+            <a:avLst/>
+          </a:prstGeom>
           <a:ln>
             <a:solidFill>
-              <a:srgbClr val="F38B00"/>
+              <a:srgbClr val="FF8C00"/>
             </a:solidFill>
           </a:ln>
         </p:spPr>
@@ -4739,39 +4710,30 @@
           <a:bodyPr rtlCol="0" anchor="ctr"/>
           <a:lstStyle/>
           <a:p>
-            <a:pPr algn="ctr">
-              <a:defRPr sz="1100" b="1">
-                <a:solidFill>
-                  <a:srgbClr val="F38B00"/>
-                </a:solidFill>
-              </a:defRPr>
-            </a:pPr>
-            <a:r>
-              <a:t>AI 虚构</a:t>
-            </a:r>
-          </a:p>
-        </p:txBody>
-      </p:sp>
-      <p:sp>
-        <p:nvSpPr>
-          <p:cNvPr id="15" name="Rounded Rectangle 14"/>
+            <a:pPr algn="ctr"/>
+          </a:p>
+        </p:txBody>
+      </p:sp>
+      <p:sp>
+        <p:nvSpPr>
+          <p:cNvPr id="12" name="Rounded Rectangle 11"/>
           <p:cNvSpPr/>
           <p:nvPr/>
         </p:nvSpPr>
         <p:spPr>
           <a:xfrm>
-            <a:off x="3108960" y="5120640"/>
-            <a:ext cx="2194560" cy="228600"/>
+            <a:off x="548640" y="4572000"/>
+            <a:ext cx="5486400" cy="2011680"/>
           </a:xfrm>
           <a:prstGeom prst="roundRect">
             <a:avLst/>
           </a:prstGeom>
           <a:solidFill>
-            <a:srgbClr val="505050"/>
+            <a:srgbClr val="333333"/>
           </a:solidFill>
-          <a:ln>
+          <a:ln w="19050">
             <a:solidFill>
-              <a:srgbClr val="787878"/>
+              <a:srgbClr val="FF8C00"/>
             </a:solidFill>
           </a:ln>
         </p:spPr>
@@ -4793,41 +4755,66 @@
           <a:bodyPr rtlCol="0" anchor="ctr"/>
           <a:lstStyle/>
           <a:p>
+            <a:pPr algn="ctr"/>
+          </a:p>
+        </p:txBody>
+      </p:sp>
+      <p:sp>
+        <p:nvSpPr>
+          <p:cNvPr id="13" name="TextBox 12"/>
+          <p:cNvSpPr txBox="1"/>
+          <p:nvPr/>
+        </p:nvSpPr>
+        <p:spPr>
+          <a:xfrm>
+            <a:off x="548640" y="4663440"/>
+            <a:ext cx="5486400" cy="365760"/>
+          </a:xfrm>
+          <a:prstGeom prst="rect">
+            <a:avLst/>
+          </a:prstGeom>
+          <a:noFill/>
+        </p:spPr>
+        <p:txBody>
+          <a:bodyPr wrap="none">
+            <a:spAutoFit/>
+          </a:bodyPr>
+          <a:lstStyle/>
+          <a:p>
             <a:pPr algn="ctr">
-              <a:defRPr sz="1100" b="1">
+              <a:defRPr sz="1400" b="1">
                 <a:solidFill>
                   <a:srgbClr val="FFFFFF"/>
                 </a:solidFill>
               </a:defRPr>
             </a:pPr>
             <a:r>
-              <a:t>SAP 实际</a:t>
-            </a:r>
-          </a:p>
-        </p:txBody>
-      </p:sp>
-      <p:sp>
-        <p:nvSpPr>
-          <p:cNvPr id="16" name="Rounded Rectangle 15"/>
+              <a:t>AI 虚构字段 vs SAP 实际字段</a:t>
+            </a:r>
+          </a:p>
+        </p:txBody>
+      </p:sp>
+      <p:sp>
+        <p:nvSpPr>
+          <p:cNvPr id="14" name="Rounded Rectangle 13"/>
           <p:cNvSpPr/>
           <p:nvPr/>
         </p:nvSpPr>
         <p:spPr>
           <a:xfrm>
-            <a:off x="640080" y="5394960"/>
-            <a:ext cx="2194560" cy="201168"/>
+            <a:off x="685800" y="5029200"/>
+            <a:ext cx="2560320" cy="274320"/>
           </a:xfrm>
           <a:prstGeom prst="roundRect">
             <a:avLst/>
           </a:prstGeom>
           <a:solidFill>
-            <a:srgbClr val="414141"/>
+            <a:srgbClr val="553311"/>
           </a:solidFill>
           <a:ln>
             <a:solidFill>
-              <a:srgbClr val="F38B00"/>
+              <a:srgbClr val="FF8C00"/>
             </a:solidFill>
-            <a:prstDash val="dash"/>
           </a:ln>
         </p:spPr>
         <p:style>
@@ -4848,74 +4835,39 @@
           <a:bodyPr rtlCol="0" anchor="ctr"/>
           <a:lstStyle/>
           <a:p>
-            <a:pPr algn="l">
-              <a:defRPr sz="1000">
-                <a:solidFill>
-                  <a:srgbClr val="F38B00"/>
+            <a:pPr algn="ctr">
+              <a:defRPr sz="1200" b="1">
+                <a:solidFill>
+                  <a:srgbClr val="FFFFFF"/>
                 </a:solidFill>
               </a:defRPr>
             </a:pPr>
             <a:r>
-              <a:t>  Z_QUOTA_QTY</a:t>
-            </a:r>
-          </a:p>
-        </p:txBody>
-      </p:sp>
-      <p:sp>
-        <p:nvSpPr>
-          <p:cNvPr id="17" name="TextBox 16"/>
-          <p:cNvSpPr txBox="1"/>
-          <p:nvPr/>
-        </p:nvSpPr>
-        <p:spPr>
-          <a:xfrm>
-            <a:off x="2560320" y="5376672"/>
-            <a:ext cx="274320" cy="201168"/>
-          </a:xfrm>
-          <a:prstGeom prst="rect">
-            <a:avLst/>
-          </a:prstGeom>
-          <a:noFill/>
-        </p:spPr>
-        <p:txBody>
-          <a:bodyPr wrap="none">
-            <a:spAutoFit/>
-          </a:bodyPr>
-          <a:lstStyle/>
-          <a:p>
-            <a:pPr algn="r">
-              <a:defRPr sz="1000">
-                <a:solidFill>
-                  <a:srgbClr val="F38B00"/>
-                </a:solidFill>
-              </a:defRPr>
-            </a:pPr>
-            <a:r>
-              <a:t>⚠</a:t>
-            </a:r>
-          </a:p>
-        </p:txBody>
-      </p:sp>
-      <p:sp>
-        <p:nvSpPr>
-          <p:cNvPr id="18" name="Rounded Rectangle 17"/>
+              <a:t>AI 虚构</a:t>
+            </a:r>
+          </a:p>
+        </p:txBody>
+      </p:sp>
+      <p:sp>
+        <p:nvSpPr>
+          <p:cNvPr id="15" name="Rounded Rectangle 14"/>
           <p:cNvSpPr/>
           <p:nvPr/>
         </p:nvSpPr>
         <p:spPr>
           <a:xfrm>
-            <a:off x="3108960" y="5394960"/>
-            <a:ext cx="2194560" cy="201168"/>
+            <a:off x="3337560" y="5029200"/>
+            <a:ext cx="2560320" cy="274320"/>
           </a:xfrm>
           <a:prstGeom prst="roundRect">
             <a:avLst/>
           </a:prstGeom>
           <a:solidFill>
-            <a:srgbClr val="414141"/>
+            <a:srgbClr val="555555"/>
           </a:solidFill>
           <a:ln>
             <a:solidFill>
-              <a:srgbClr val="787878"/>
+              <a:srgbClr val="888888"/>
             </a:solidFill>
           </a:ln>
         </p:spPr>
@@ -4937,76 +4889,39 @@
           <a:bodyPr rtlCol="0" anchor="ctr"/>
           <a:lstStyle/>
           <a:p>
-            <a:pPr algn="l">
-              <a:defRPr sz="1000">
+            <a:pPr algn="ctr">
+              <a:defRPr sz="1200" b="1">
                 <a:solidFill>
                   <a:srgbClr val="FFFFFF"/>
                 </a:solidFill>
               </a:defRPr>
             </a:pPr>
             <a:r>
-              <a:t>  MENG</a:t>
-            </a:r>
-          </a:p>
-        </p:txBody>
-      </p:sp>
-      <p:sp>
-        <p:nvSpPr>
-          <p:cNvPr id="19" name="TextBox 18"/>
-          <p:cNvSpPr txBox="1"/>
-          <p:nvPr/>
-        </p:nvSpPr>
-        <p:spPr>
-          <a:xfrm>
-            <a:off x="5029200" y="5376672"/>
-            <a:ext cx="274320" cy="201168"/>
-          </a:xfrm>
-          <a:prstGeom prst="rect">
+              <a:t>SAP 实际</a:t>
+            </a:r>
+          </a:p>
+        </p:txBody>
+      </p:sp>
+      <p:sp>
+        <p:nvSpPr>
+          <p:cNvPr id="16" name="Rounded Rectangle 15"/>
+          <p:cNvSpPr/>
+          <p:nvPr/>
+        </p:nvSpPr>
+        <p:spPr>
+          <a:xfrm>
+            <a:off x="685800" y="5349240"/>
+            <a:ext cx="2560320" cy="201168"/>
+          </a:xfrm>
+          <a:prstGeom prst="roundRect">
             <a:avLst/>
           </a:prstGeom>
           <a:noFill/>
-        </p:spPr>
-        <p:txBody>
-          <a:bodyPr wrap="none">
-            <a:spAutoFit/>
-          </a:bodyPr>
-          <a:lstStyle/>
-          <a:p>
-            <a:pPr algn="r">
-              <a:defRPr sz="1000">
-                <a:solidFill>
-                  <a:srgbClr val="AAAAAA"/>
-                </a:solidFill>
-              </a:defRPr>
-            </a:pPr>
-            <a:r>
-              <a:t>✔</a:t>
-            </a:r>
-          </a:p>
-        </p:txBody>
-      </p:sp>
-      <p:sp>
-        <p:nvSpPr>
-          <p:cNvPr id="20" name="Rounded Rectangle 19"/>
-          <p:cNvSpPr/>
-          <p:nvPr/>
-        </p:nvSpPr>
-        <p:spPr>
-          <a:xfrm>
-            <a:off x="640080" y="5632704"/>
-            <a:ext cx="2194560" cy="201168"/>
-          </a:xfrm>
-          <a:prstGeom prst="roundRect">
-            <a:avLst/>
-          </a:prstGeom>
-          <a:solidFill>
-            <a:srgbClr val="414141"/>
-          </a:solidFill>
           <a:ln>
             <a:solidFill>
-              <a:srgbClr val="F38B00"/>
+              <a:srgbClr val="FF8C00"/>
             </a:solidFill>
-            <a:prstDash val="dash"/>
+            <a:prstDash val="sysDash"/>
           </a:ln>
         </p:spPr>
         <p:style>
@@ -5027,75 +4942,38 @@
           <a:bodyPr rtlCol="0" anchor="ctr"/>
           <a:lstStyle/>
           <a:p>
-            <a:pPr algn="l">
-              <a:defRPr sz="1000">
-                <a:solidFill>
-                  <a:srgbClr val="F38B00"/>
+            <a:pPr algn="ctr">
+              <a:defRPr sz="1100">
+                <a:solidFill>
+                  <a:srgbClr val="FFFFFF"/>
                 </a:solidFill>
               </a:defRPr>
             </a:pPr>
             <a:r>
-              <a:t>  Z_SOURCE_VEND</a:t>
-            </a:r>
-          </a:p>
-        </p:txBody>
-      </p:sp>
-      <p:sp>
-        <p:nvSpPr>
-          <p:cNvPr id="21" name="TextBox 20"/>
-          <p:cNvSpPr txBox="1"/>
-          <p:nvPr/>
-        </p:nvSpPr>
-        <p:spPr>
-          <a:xfrm>
-            <a:off x="2560320" y="5614416"/>
-            <a:ext cx="274320" cy="201168"/>
-          </a:xfrm>
-          <a:prstGeom prst="rect">
-            <a:avLst/>
-          </a:prstGeom>
-          <a:noFill/>
-        </p:spPr>
-        <p:txBody>
-          <a:bodyPr wrap="none">
-            <a:spAutoFit/>
-          </a:bodyPr>
-          <a:lstStyle/>
-          <a:p>
-            <a:pPr algn="r">
-              <a:defRPr sz="1000">
-                <a:solidFill>
-                  <a:srgbClr val="F38B00"/>
-                </a:solidFill>
-              </a:defRPr>
-            </a:pPr>
-            <a:r>
-              <a:t>⚠</a:t>
-            </a:r>
-          </a:p>
-        </p:txBody>
-      </p:sp>
-      <p:sp>
-        <p:nvSpPr>
-          <p:cNvPr id="22" name="Rounded Rectangle 21"/>
+              <a:t>  Z_QUOTA_QTY</a:t>
+            </a:r>
+          </a:p>
+        </p:txBody>
+      </p:sp>
+      <p:sp>
+        <p:nvSpPr>
+          <p:cNvPr id="17" name="Isosceles Triangle 16"/>
           <p:cNvSpPr/>
           <p:nvPr/>
         </p:nvSpPr>
         <p:spPr>
           <a:xfrm>
-            <a:off x="3108960" y="5632704"/>
-            <a:ext cx="2194560" cy="201168"/>
-          </a:xfrm>
-          <a:prstGeom prst="roundRect">
+            <a:off x="3017520" y="5376672"/>
+            <a:ext cx="137160" cy="137160"/>
+          </a:xfrm>
+          <a:prstGeom prst="triangle">
             <a:avLst/>
           </a:prstGeom>
           <a:solidFill>
-            <a:srgbClr val="414141"/>
+            <a:srgbClr val="FF8C00"/>
           </a:solidFill>
           <a:ln>
-            <a:solidFill>
-              <a:srgbClr val="787878"/>
-            </a:solidFill>
+            <a:noFill/>
           </a:ln>
         </p:spPr>
         <p:style>
@@ -5116,76 +4994,29 @@
           <a:bodyPr rtlCol="0" anchor="ctr"/>
           <a:lstStyle/>
           <a:p>
-            <a:pPr algn="l">
-              <a:defRPr sz="1000">
-                <a:solidFill>
-                  <a:srgbClr val="FFFFFF"/>
-                </a:solidFill>
-              </a:defRPr>
-            </a:pPr>
-            <a:r>
-              <a:t>  LIFNR</a:t>
-            </a:r>
-          </a:p>
-        </p:txBody>
-      </p:sp>
-      <p:sp>
-        <p:nvSpPr>
-          <p:cNvPr id="23" name="TextBox 22"/>
-          <p:cNvSpPr txBox="1"/>
-          <p:nvPr/>
-        </p:nvSpPr>
-        <p:spPr>
-          <a:xfrm>
-            <a:off x="5029200" y="5614416"/>
-            <a:ext cx="274320" cy="201168"/>
-          </a:xfrm>
-          <a:prstGeom prst="rect">
+            <a:pPr algn="ctr"/>
+          </a:p>
+        </p:txBody>
+      </p:sp>
+      <p:sp>
+        <p:nvSpPr>
+          <p:cNvPr id="18" name="Rounded Rectangle 17"/>
+          <p:cNvSpPr/>
+          <p:nvPr/>
+        </p:nvSpPr>
+        <p:spPr>
+          <a:xfrm>
+            <a:off x="3337560" y="5349240"/>
+            <a:ext cx="2560320" cy="201168"/>
+          </a:xfrm>
+          <a:prstGeom prst="roundRect">
             <a:avLst/>
           </a:prstGeom>
           <a:noFill/>
-        </p:spPr>
-        <p:txBody>
-          <a:bodyPr wrap="none">
-            <a:spAutoFit/>
-          </a:bodyPr>
-          <a:lstStyle/>
-          <a:p>
-            <a:pPr algn="r">
-              <a:defRPr sz="1000">
-                <a:solidFill>
-                  <a:srgbClr val="AAAAAA"/>
-                </a:solidFill>
-              </a:defRPr>
-            </a:pPr>
-            <a:r>
-              <a:t>✔</a:t>
-            </a:r>
-          </a:p>
-        </p:txBody>
-      </p:sp>
-      <p:sp>
-        <p:nvSpPr>
-          <p:cNvPr id="24" name="Rounded Rectangle 23"/>
-          <p:cNvSpPr/>
-          <p:nvPr/>
-        </p:nvSpPr>
-        <p:spPr>
-          <a:xfrm>
-            <a:off x="640080" y="5870448"/>
-            <a:ext cx="2194560" cy="201168"/>
-          </a:xfrm>
-          <a:prstGeom prst="roundRect">
-            <a:avLst/>
-          </a:prstGeom>
-          <a:solidFill>
-            <a:srgbClr val="414141"/>
-          </a:solidFill>
           <a:ln>
             <a:solidFill>
-              <a:srgbClr val="F38B00"/>
+              <a:srgbClr val="888888"/>
             </a:solidFill>
-            <a:prstDash val="dash"/>
           </a:ln>
         </p:spPr>
         <p:style>
@@ -5206,75 +5037,38 @@
           <a:bodyPr rtlCol="0" anchor="ctr"/>
           <a:lstStyle/>
           <a:p>
-            <a:pPr algn="l">
-              <a:defRPr sz="1000">
-                <a:solidFill>
-                  <a:srgbClr val="F38B00"/>
+            <a:pPr algn="ctr">
+              <a:defRPr sz="1100">
+                <a:solidFill>
+                  <a:srgbClr val="FFFFFF"/>
                 </a:solidFill>
               </a:defRPr>
             </a:pPr>
             <a:r>
-              <a:t>  Z_QUOTA_UNIT</a:t>
-            </a:r>
-          </a:p>
-        </p:txBody>
-      </p:sp>
-      <p:sp>
-        <p:nvSpPr>
-          <p:cNvPr id="25" name="TextBox 24"/>
-          <p:cNvSpPr txBox="1"/>
-          <p:nvPr/>
-        </p:nvSpPr>
-        <p:spPr>
-          <a:xfrm>
-            <a:off x="2560320" y="5852160"/>
-            <a:ext cx="274320" cy="201168"/>
-          </a:xfrm>
-          <a:prstGeom prst="rect">
-            <a:avLst/>
-          </a:prstGeom>
-          <a:noFill/>
-        </p:spPr>
-        <p:txBody>
-          <a:bodyPr wrap="none">
-            <a:spAutoFit/>
-          </a:bodyPr>
-          <a:lstStyle/>
-          <a:p>
-            <a:pPr algn="r">
-              <a:defRPr sz="1000">
-                <a:solidFill>
-                  <a:srgbClr val="F38B00"/>
-                </a:solidFill>
-              </a:defRPr>
-            </a:pPr>
-            <a:r>
-              <a:t>⚠</a:t>
-            </a:r>
-          </a:p>
-        </p:txBody>
-      </p:sp>
-      <p:sp>
-        <p:nvSpPr>
-          <p:cNvPr id="26" name="Rounded Rectangle 25"/>
+              <a:t>  MENG</a:t>
+            </a:r>
+          </a:p>
+        </p:txBody>
+      </p:sp>
+      <p:sp>
+        <p:nvSpPr>
+          <p:cNvPr id="19" name="Oval 18"/>
           <p:cNvSpPr/>
           <p:nvPr/>
         </p:nvSpPr>
         <p:spPr>
           <a:xfrm>
-            <a:off x="3108960" y="5870448"/>
-            <a:ext cx="2194560" cy="201168"/>
-          </a:xfrm>
-          <a:prstGeom prst="roundRect">
+            <a:off x="5669280" y="5376672"/>
+            <a:ext cx="137160" cy="137160"/>
+          </a:xfrm>
+          <a:prstGeom prst="ellipse">
             <a:avLst/>
           </a:prstGeom>
           <a:solidFill>
-            <a:srgbClr val="414141"/>
+            <a:srgbClr val="888888"/>
           </a:solidFill>
           <a:ln>
-            <a:solidFill>
-              <a:srgbClr val="787878"/>
-            </a:solidFill>
+            <a:noFill/>
           </a:ln>
         </p:spPr>
         <p:style>
@@ -5295,76 +5089,30 @@
           <a:bodyPr rtlCol="0" anchor="ctr"/>
           <a:lstStyle/>
           <a:p>
-            <a:pPr algn="l">
-              <a:defRPr sz="1000">
-                <a:solidFill>
-                  <a:srgbClr val="FFFFFF"/>
-                </a:solidFill>
-              </a:defRPr>
-            </a:pPr>
-            <a:r>
-              <a:t>  MEINS</a:t>
-            </a:r>
-          </a:p>
-        </p:txBody>
-      </p:sp>
-      <p:sp>
-        <p:nvSpPr>
-          <p:cNvPr id="27" name="TextBox 26"/>
-          <p:cNvSpPr txBox="1"/>
-          <p:nvPr/>
-        </p:nvSpPr>
-        <p:spPr>
-          <a:xfrm>
-            <a:off x="5029200" y="5852160"/>
-            <a:ext cx="274320" cy="201168"/>
-          </a:xfrm>
-          <a:prstGeom prst="rect">
+            <a:pPr algn="ctr"/>
+          </a:p>
+        </p:txBody>
+      </p:sp>
+      <p:sp>
+        <p:nvSpPr>
+          <p:cNvPr id="20" name="Rounded Rectangle 19"/>
+          <p:cNvSpPr/>
+          <p:nvPr/>
+        </p:nvSpPr>
+        <p:spPr>
+          <a:xfrm>
+            <a:off x="685800" y="5596128"/>
+            <a:ext cx="2560320" cy="201168"/>
+          </a:xfrm>
+          <a:prstGeom prst="roundRect">
             <a:avLst/>
           </a:prstGeom>
           <a:noFill/>
-        </p:spPr>
-        <p:txBody>
-          <a:bodyPr wrap="none">
-            <a:spAutoFit/>
-          </a:bodyPr>
-          <a:lstStyle/>
-          <a:p>
-            <a:pPr algn="r">
-              <a:defRPr sz="1000">
-                <a:solidFill>
-                  <a:srgbClr val="AAAAAA"/>
-                </a:solidFill>
-              </a:defRPr>
-            </a:pPr>
-            <a:r>
-              <a:t>✔</a:t>
-            </a:r>
-          </a:p>
-        </p:txBody>
-      </p:sp>
-      <p:sp>
-        <p:nvSpPr>
-          <p:cNvPr id="28" name="Rounded Rectangle 27"/>
-          <p:cNvSpPr/>
-          <p:nvPr/>
-        </p:nvSpPr>
-        <p:spPr>
-          <a:xfrm>
-            <a:off x="640080" y="6108192"/>
-            <a:ext cx="2194560" cy="201168"/>
-          </a:xfrm>
-          <a:prstGeom prst="roundRect">
-            <a:avLst/>
-          </a:prstGeom>
-          <a:solidFill>
-            <a:srgbClr val="414141"/>
-          </a:solidFill>
           <a:ln>
             <a:solidFill>
-              <a:srgbClr val="F38B00"/>
+              <a:srgbClr val="FF8C00"/>
             </a:solidFill>
-            <a:prstDash val="dash"/>
+            <a:prstDash val="sysDash"/>
           </a:ln>
         </p:spPr>
         <p:style>
@@ -5385,75 +5133,38 @@
           <a:bodyPr rtlCol="0" anchor="ctr"/>
           <a:lstStyle/>
           <a:p>
-            <a:pPr algn="l">
-              <a:defRPr sz="1000">
-                <a:solidFill>
-                  <a:srgbClr val="F38B00"/>
+            <a:pPr algn="ctr">
+              <a:defRPr sz="1100">
+                <a:solidFill>
+                  <a:srgbClr val="FFFFFF"/>
                 </a:solidFill>
               </a:defRPr>
             </a:pPr>
             <a:r>
-              <a:t>  Z_VALID_TO</a:t>
-            </a:r>
-          </a:p>
-        </p:txBody>
-      </p:sp>
-      <p:sp>
-        <p:nvSpPr>
-          <p:cNvPr id="29" name="TextBox 28"/>
-          <p:cNvSpPr txBox="1"/>
-          <p:nvPr/>
-        </p:nvSpPr>
-        <p:spPr>
-          <a:xfrm>
-            <a:off x="2560320" y="6089904"/>
-            <a:ext cx="274320" cy="201168"/>
-          </a:xfrm>
-          <a:prstGeom prst="rect">
-            <a:avLst/>
-          </a:prstGeom>
-          <a:noFill/>
-        </p:spPr>
-        <p:txBody>
-          <a:bodyPr wrap="none">
-            <a:spAutoFit/>
-          </a:bodyPr>
-          <a:lstStyle/>
-          <a:p>
-            <a:pPr algn="r">
-              <a:defRPr sz="1000">
-                <a:solidFill>
-                  <a:srgbClr val="F38B00"/>
-                </a:solidFill>
-              </a:defRPr>
-            </a:pPr>
-            <a:r>
-              <a:t>⚠</a:t>
-            </a:r>
-          </a:p>
-        </p:txBody>
-      </p:sp>
-      <p:sp>
-        <p:nvSpPr>
-          <p:cNvPr id="30" name="Rounded Rectangle 29"/>
+              <a:t>  Z_SOURCE_VEND</a:t>
+            </a:r>
+          </a:p>
+        </p:txBody>
+      </p:sp>
+      <p:sp>
+        <p:nvSpPr>
+          <p:cNvPr id="21" name="Isosceles Triangle 20"/>
           <p:cNvSpPr/>
           <p:nvPr/>
         </p:nvSpPr>
         <p:spPr>
           <a:xfrm>
-            <a:off x="3108960" y="6108192"/>
-            <a:ext cx="2194560" cy="201168"/>
-          </a:xfrm>
-          <a:prstGeom prst="roundRect">
+            <a:off x="3017520" y="5623560"/>
+            <a:ext cx="137160" cy="137160"/>
+          </a:xfrm>
+          <a:prstGeom prst="triangle">
             <a:avLst/>
           </a:prstGeom>
           <a:solidFill>
-            <a:srgbClr val="414141"/>
+            <a:srgbClr val="FF8C00"/>
           </a:solidFill>
           <a:ln>
-            <a:solidFill>
-              <a:srgbClr val="787878"/>
-            </a:solidFill>
+            <a:noFill/>
           </a:ln>
         </p:spPr>
         <p:style>
@@ -5474,76 +5185,29 @@
           <a:bodyPr rtlCol="0" anchor="ctr"/>
           <a:lstStyle/>
           <a:p>
-            <a:pPr algn="l">
-              <a:defRPr sz="1000">
-                <a:solidFill>
-                  <a:srgbClr val="FFFFFF"/>
-                </a:solidFill>
-              </a:defRPr>
-            </a:pPr>
-            <a:r>
-              <a:t>  DATBI</a:t>
-            </a:r>
-          </a:p>
-        </p:txBody>
-      </p:sp>
-      <p:sp>
-        <p:nvSpPr>
-          <p:cNvPr id="31" name="TextBox 30"/>
-          <p:cNvSpPr txBox="1"/>
-          <p:nvPr/>
-        </p:nvSpPr>
-        <p:spPr>
-          <a:xfrm>
-            <a:off x="5029200" y="6089904"/>
-            <a:ext cx="274320" cy="201168"/>
-          </a:xfrm>
-          <a:prstGeom prst="rect">
+            <a:pPr algn="ctr"/>
+          </a:p>
+        </p:txBody>
+      </p:sp>
+      <p:sp>
+        <p:nvSpPr>
+          <p:cNvPr id="22" name="Rounded Rectangle 21"/>
+          <p:cNvSpPr/>
+          <p:nvPr/>
+        </p:nvSpPr>
+        <p:spPr>
+          <a:xfrm>
+            <a:off x="3337560" y="5596128"/>
+            <a:ext cx="2560320" cy="201168"/>
+          </a:xfrm>
+          <a:prstGeom prst="roundRect">
             <a:avLst/>
           </a:prstGeom>
           <a:noFill/>
-        </p:spPr>
-        <p:txBody>
-          <a:bodyPr wrap="none">
-            <a:spAutoFit/>
-          </a:bodyPr>
-          <a:lstStyle/>
-          <a:p>
-            <a:pPr algn="r">
-              <a:defRPr sz="1000">
-                <a:solidFill>
-                  <a:srgbClr val="AAAAAA"/>
-                </a:solidFill>
-              </a:defRPr>
-            </a:pPr>
-            <a:r>
-              <a:t>✔</a:t>
-            </a:r>
-          </a:p>
-        </p:txBody>
-      </p:sp>
-      <p:sp>
-        <p:nvSpPr>
-          <p:cNvPr id="32" name="Rounded Rectangle 31"/>
-          <p:cNvSpPr/>
-          <p:nvPr/>
-        </p:nvSpPr>
-        <p:spPr>
-          <a:xfrm>
-            <a:off x="640080" y="6345936"/>
-            <a:ext cx="2194560" cy="201168"/>
-          </a:xfrm>
-          <a:prstGeom prst="roundRect">
-            <a:avLst/>
-          </a:prstGeom>
-          <a:solidFill>
-            <a:srgbClr val="414141"/>
-          </a:solidFill>
           <a:ln>
             <a:solidFill>
-              <a:srgbClr val="F38B00"/>
+              <a:srgbClr val="888888"/>
             </a:solidFill>
-            <a:prstDash val="dash"/>
           </a:ln>
         </p:spPr>
         <p:style>
@@ -5564,75 +5228,38 @@
           <a:bodyPr rtlCol="0" anchor="ctr"/>
           <a:lstStyle/>
           <a:p>
-            <a:pPr algn="l">
-              <a:defRPr sz="1000">
-                <a:solidFill>
-                  <a:srgbClr val="F38B00"/>
+            <a:pPr algn="ctr">
+              <a:defRPr sz="1100">
+                <a:solidFill>
+                  <a:srgbClr val="FFFFFF"/>
                 </a:solidFill>
               </a:defRPr>
             </a:pPr>
             <a:r>
-              <a:t>  Z_QUOTA_TYPE</a:t>
-            </a:r>
-          </a:p>
-        </p:txBody>
-      </p:sp>
-      <p:sp>
-        <p:nvSpPr>
-          <p:cNvPr id="33" name="TextBox 32"/>
-          <p:cNvSpPr txBox="1"/>
-          <p:nvPr/>
-        </p:nvSpPr>
-        <p:spPr>
-          <a:xfrm>
-            <a:off x="2560320" y="6327648"/>
-            <a:ext cx="274320" cy="201168"/>
-          </a:xfrm>
-          <a:prstGeom prst="rect">
-            <a:avLst/>
-          </a:prstGeom>
-          <a:noFill/>
-        </p:spPr>
-        <p:txBody>
-          <a:bodyPr wrap="none">
-            <a:spAutoFit/>
-          </a:bodyPr>
-          <a:lstStyle/>
-          <a:p>
-            <a:pPr algn="r">
-              <a:defRPr sz="1000">
-                <a:solidFill>
-                  <a:srgbClr val="F38B00"/>
-                </a:solidFill>
-              </a:defRPr>
-            </a:pPr>
-            <a:r>
-              <a:t>⚠</a:t>
-            </a:r>
-          </a:p>
-        </p:txBody>
-      </p:sp>
-      <p:sp>
-        <p:nvSpPr>
-          <p:cNvPr id="34" name="Rounded Rectangle 33"/>
+              <a:t>  LIFNR</a:t>
+            </a:r>
+          </a:p>
+        </p:txBody>
+      </p:sp>
+      <p:sp>
+        <p:nvSpPr>
+          <p:cNvPr id="23" name="Oval 22"/>
           <p:cNvSpPr/>
           <p:nvPr/>
         </p:nvSpPr>
         <p:spPr>
           <a:xfrm>
-            <a:off x="3108960" y="6345936"/>
-            <a:ext cx="2194560" cy="201168"/>
-          </a:xfrm>
-          <a:prstGeom prst="roundRect">
+            <a:off x="5669280" y="5623560"/>
+            <a:ext cx="137160" cy="137160"/>
+          </a:xfrm>
+          <a:prstGeom prst="ellipse">
             <a:avLst/>
           </a:prstGeom>
           <a:solidFill>
-            <a:srgbClr val="414141"/>
+            <a:srgbClr val="888888"/>
           </a:solidFill>
           <a:ln>
-            <a:solidFill>
-              <a:srgbClr val="787878"/>
-            </a:solidFill>
+            <a:noFill/>
           </a:ln>
         </p:spPr>
         <p:style>
@@ -5653,75 +5280,30 @@
           <a:bodyPr rtlCol="0" anchor="ctr"/>
           <a:lstStyle/>
           <a:p>
-            <a:pPr algn="l">
-              <a:defRPr sz="1000">
-                <a:solidFill>
-                  <a:srgbClr val="FFFFFF"/>
-                </a:solidFill>
-              </a:defRPr>
-            </a:pPr>
-            <a:r>
-              <a:t>  QUNUM</a:t>
-            </a:r>
-          </a:p>
-        </p:txBody>
-      </p:sp>
-      <p:sp>
-        <p:nvSpPr>
-          <p:cNvPr id="35" name="TextBox 34"/>
-          <p:cNvSpPr txBox="1"/>
-          <p:nvPr/>
-        </p:nvSpPr>
-        <p:spPr>
-          <a:xfrm>
-            <a:off x="5029200" y="6327648"/>
-            <a:ext cx="274320" cy="201168"/>
-          </a:xfrm>
-          <a:prstGeom prst="rect">
+            <a:pPr algn="ctr"/>
+          </a:p>
+        </p:txBody>
+      </p:sp>
+      <p:sp>
+        <p:nvSpPr>
+          <p:cNvPr id="24" name="Rounded Rectangle 23"/>
+          <p:cNvSpPr/>
+          <p:nvPr/>
+        </p:nvSpPr>
+        <p:spPr>
+          <a:xfrm>
+            <a:off x="685800" y="5843016"/>
+            <a:ext cx="2560320" cy="201168"/>
+          </a:xfrm>
+          <a:prstGeom prst="roundRect">
             <a:avLst/>
           </a:prstGeom>
           <a:noFill/>
-        </p:spPr>
-        <p:txBody>
-          <a:bodyPr wrap="none">
-            <a:spAutoFit/>
-          </a:bodyPr>
-          <a:lstStyle/>
-          <a:p>
-            <a:pPr algn="r">
-              <a:defRPr sz="1000">
-                <a:solidFill>
-                  <a:srgbClr val="AAAAAA"/>
-                </a:solidFill>
-              </a:defRPr>
-            </a:pPr>
-            <a:r>
-              <a:t>✔</a:t>
-            </a:r>
-          </a:p>
-        </p:txBody>
-      </p:sp>
-      <p:sp>
-        <p:nvSpPr>
-          <p:cNvPr id="36" name="Rounded Rectangle 35"/>
-          <p:cNvSpPr/>
-          <p:nvPr/>
-        </p:nvSpPr>
-        <p:spPr>
-          <a:xfrm>
-            <a:off x="5943600" y="1645920"/>
-            <a:ext cx="5669280" cy="1005840"/>
-          </a:xfrm>
-          <a:prstGeom prst="roundRect">
-            <a:avLst/>
-          </a:prstGeom>
-          <a:solidFill>
-            <a:srgbClr val="383838"/>
-          </a:solidFill>
           <a:ln>
             <a:solidFill>
-              <a:srgbClr val="505050"/>
+              <a:srgbClr val="FF8C00"/>
             </a:solidFill>
+            <a:prstDash val="sysDash"/>
           </a:ln>
         </p:spPr>
         <p:style>
@@ -5742,136 +5324,38 @@
           <a:bodyPr rtlCol="0" anchor="ctr"/>
           <a:lstStyle/>
           <a:p>
-            <a:pPr algn="ctr"/>
-          </a:p>
-        </p:txBody>
-      </p:sp>
-      <p:sp>
-        <p:nvSpPr>
-          <p:cNvPr id="37" name="TextBox 36"/>
-          <p:cNvSpPr txBox="1"/>
-          <p:nvPr/>
-        </p:nvSpPr>
-        <p:spPr>
-          <a:xfrm>
-            <a:off x="6035040" y="1783080"/>
-            <a:ext cx="731520" cy="731520"/>
-          </a:xfrm>
-          <a:prstGeom prst="rect">
-            <a:avLst/>
-          </a:prstGeom>
-          <a:noFill/>
-        </p:spPr>
-        <p:txBody>
-          <a:bodyPr wrap="none">
-            <a:spAutoFit/>
-          </a:bodyPr>
-          <a:lstStyle/>
-          <a:p>
             <a:pPr algn="ctr">
-              <a:defRPr sz="2800">
-                <a:solidFill>
-                  <a:srgbClr val="F38B00"/>
+              <a:defRPr sz="1100">
+                <a:solidFill>
+                  <a:srgbClr val="FFFFFF"/>
                 </a:solidFill>
               </a:defRPr>
             </a:pPr>
             <a:r>
-              <a:t>🤖</a:t>
-            </a:r>
-          </a:p>
-        </p:txBody>
-      </p:sp>
-      <p:sp>
-        <p:nvSpPr>
-          <p:cNvPr id="38" name="TextBox 37"/>
-          <p:cNvSpPr txBox="1"/>
-          <p:nvPr/>
-        </p:nvSpPr>
-        <p:spPr>
-          <a:xfrm>
-            <a:off x="6858000" y="1737360"/>
-            <a:ext cx="4663440" cy="274320"/>
-          </a:xfrm>
-          <a:prstGeom prst="rect">
-            <a:avLst/>
-          </a:prstGeom>
-          <a:noFill/>
-        </p:spPr>
-        <p:txBody>
-          <a:bodyPr wrap="none">
-            <a:spAutoFit/>
-          </a:bodyPr>
-          <a:lstStyle/>
-          <a:p>
-            <a:pPr>
-              <a:defRPr sz="1400" b="1">
-                <a:solidFill>
-                  <a:srgbClr val="FFFFFF"/>
-                </a:solidFill>
-              </a:defRPr>
-            </a:pPr>
-            <a:r>
-              <a:t>概念误导</a:t>
-            </a:r>
-          </a:p>
-        </p:txBody>
-      </p:sp>
-      <p:sp>
-        <p:nvSpPr>
-          <p:cNvPr id="39" name="TextBox 38"/>
-          <p:cNvSpPr txBox="1"/>
-          <p:nvPr/>
-        </p:nvSpPr>
-        <p:spPr>
-          <a:xfrm>
-            <a:off x="6858000" y="2011680"/>
-            <a:ext cx="4572000" cy="548640"/>
-          </a:xfrm>
-          <a:prstGeom prst="rect">
-            <a:avLst/>
-          </a:prstGeom>
-          <a:noFill/>
-        </p:spPr>
-        <p:txBody>
-          <a:bodyPr wrap="square">
-            <a:spAutoFit/>
-          </a:bodyPr>
-          <a:lstStyle/>
-          <a:p>
-            <a:pPr>
-              <a:defRPr sz="1100">
-                <a:solidFill>
-                  <a:srgbClr val="FFFFFF"/>
-                </a:solidFill>
-              </a:defRPr>
-            </a:pPr>
-            <a:r>
-              <a:t>Copilot 完全混淆“配额”与“货源”业务模型，代码完全不可用。</a:t>
-            </a:r>
-          </a:p>
-        </p:txBody>
-      </p:sp>
-      <p:sp>
-        <p:nvSpPr>
-          <p:cNvPr id="40" name="Rounded Rectangle 39"/>
+              <a:t>  Z_QUOTA_UNIT</a:t>
+            </a:r>
+          </a:p>
+        </p:txBody>
+      </p:sp>
+      <p:sp>
+        <p:nvSpPr>
+          <p:cNvPr id="25" name="Isosceles Triangle 24"/>
           <p:cNvSpPr/>
           <p:nvPr/>
         </p:nvSpPr>
         <p:spPr>
           <a:xfrm>
-            <a:off x="5943600" y="2834640"/>
-            <a:ext cx="5669280" cy="1005840"/>
-          </a:xfrm>
-          <a:prstGeom prst="roundRect">
+            <a:off x="3017520" y="5870448"/>
+            <a:ext cx="137160" cy="137160"/>
+          </a:xfrm>
+          <a:prstGeom prst="triangle">
             <a:avLst/>
           </a:prstGeom>
           <a:solidFill>
-            <a:srgbClr val="383838"/>
+            <a:srgbClr val="FF8C00"/>
           </a:solidFill>
           <a:ln>
-            <a:solidFill>
-              <a:srgbClr val="505050"/>
-            </a:solidFill>
+            <a:noFill/>
           </a:ln>
         </p:spPr>
         <p:style>
@@ -5898,178 +5382,22 @@
       </p:sp>
       <p:sp>
         <p:nvSpPr>
-          <p:cNvPr id="41" name="TextBox 40"/>
-          <p:cNvSpPr txBox="1"/>
-          <p:nvPr/>
-        </p:nvSpPr>
-        <p:spPr>
-          <a:xfrm>
-            <a:off x="6035040" y="2971800"/>
-            <a:ext cx="731520" cy="731520"/>
-          </a:xfrm>
-          <a:prstGeom prst="rect">
+          <p:cNvPr id="26" name="Rounded Rectangle 25"/>
+          <p:cNvSpPr/>
+          <p:nvPr/>
+        </p:nvSpPr>
+        <p:spPr>
+          <a:xfrm>
+            <a:off x="3337560" y="5843016"/>
+            <a:ext cx="2560320" cy="201168"/>
+          </a:xfrm>
+          <a:prstGeom prst="roundRect">
             <a:avLst/>
           </a:prstGeom>
           <a:noFill/>
-        </p:spPr>
-        <p:txBody>
-          <a:bodyPr wrap="none">
-            <a:spAutoFit/>
-          </a:bodyPr>
-          <a:lstStyle/>
-          <a:p>
-            <a:pPr algn="ctr">
-              <a:defRPr sz="2800">
-                <a:solidFill>
-                  <a:srgbClr val="F38B00"/>
-                </a:solidFill>
-              </a:defRPr>
-            </a:pPr>
-            <a:r>
-              <a:t>🌩️</a:t>
-            </a:r>
-          </a:p>
-        </p:txBody>
-      </p:sp>
-      <p:sp>
-        <p:nvSpPr>
-          <p:cNvPr id="42" name="TextBox 41"/>
-          <p:cNvSpPr txBox="1"/>
-          <p:nvPr/>
-        </p:nvSpPr>
-        <p:spPr>
-          <a:xfrm>
-            <a:off x="6858000" y="2926080"/>
-            <a:ext cx="4663440" cy="274320"/>
-          </a:xfrm>
-          <a:prstGeom prst="rect">
-            <a:avLst/>
-          </a:prstGeom>
-          <a:noFill/>
-        </p:spPr>
-        <p:txBody>
-          <a:bodyPr wrap="none">
-            <a:spAutoFit/>
-          </a:bodyPr>
-          <a:lstStyle/>
-          <a:p>
-            <a:pPr>
-              <a:defRPr sz="1400" b="1">
-                <a:solidFill>
-                  <a:srgbClr val="FFFFFF"/>
-                </a:solidFill>
-              </a:defRPr>
-            </a:pPr>
-            <a:r>
-              <a:t>严重幻觉</a:t>
-            </a:r>
-          </a:p>
-        </p:txBody>
-      </p:sp>
-      <p:sp>
-        <p:nvSpPr>
-          <p:cNvPr id="43" name="TextBox 42"/>
-          <p:cNvSpPr txBox="1"/>
-          <p:nvPr/>
-        </p:nvSpPr>
-        <p:spPr>
-          <a:xfrm>
-            <a:off x="6858000" y="3200400"/>
-            <a:ext cx="4572000" cy="548640"/>
-          </a:xfrm>
-          <a:prstGeom prst="rect">
-            <a:avLst/>
-          </a:prstGeom>
-          <a:noFill/>
-        </p:spPr>
-        <p:txBody>
-          <a:bodyPr wrap="square">
-            <a:spAutoFit/>
-          </a:bodyPr>
-          <a:lstStyle/>
-          <a:p>
-            <a:pPr>
-              <a:defRPr sz="1100"/>
-            </a:pPr>
-            <a:r>
-              <a:rPr>
-                <a:solidFill>
-                  <a:srgbClr val="FFFFFF"/>
-                </a:solidFill>
-              </a:rPr>
-              <a:t>Claude 虚构 </a:t>
-            </a:r>
-            <a:r>
-              <a:rPr b="1">
-                <a:solidFill>
-                  <a:srgbClr val="F38B00"/>
-                </a:solidFill>
-              </a:rPr>
-              <a:t>9</a:t>
-            </a:r>
-            <a:r>
-              <a:rPr>
-                <a:solidFill>
-                  <a:srgbClr val="FFFFFF"/>
-                </a:solidFill>
-              </a:rPr>
-              <a:t> 处核心字段（占比 </a:t>
-            </a:r>
-            <a:r>
-              <a:rPr b="1">
-                <a:solidFill>
-                  <a:srgbClr val="F38B00"/>
-                </a:solidFill>
-              </a:rPr>
-              <a:t>50%</a:t>
-            </a:r>
-            <a:r>
-              <a:rPr>
-                <a:solidFill>
-                  <a:srgbClr val="FFFFFF"/>
-                </a:solidFill>
-              </a:rPr>
-              <a:t>），引发 </a:t>
-            </a:r>
-            <a:r>
-              <a:rPr b="1">
-                <a:solidFill>
-                  <a:srgbClr val="F38B00"/>
-                </a:solidFill>
-              </a:rPr>
-              <a:t>21</a:t>
-            </a:r>
-            <a:r>
-              <a:rPr>
-                <a:solidFill>
-                  <a:srgbClr val="FFFFFF"/>
-                </a:solidFill>
-              </a:rPr>
-              <a:t> 个连锁语法错误。</a:t>
-            </a:r>
-          </a:p>
-        </p:txBody>
-      </p:sp>
-      <p:sp>
-        <p:nvSpPr>
-          <p:cNvPr id="44" name="Rounded Rectangle 43"/>
-          <p:cNvSpPr/>
-          <p:nvPr/>
-        </p:nvSpPr>
-        <p:spPr>
-          <a:xfrm>
-            <a:off x="5943600" y="4023360"/>
-            <a:ext cx="5669280" cy="1005840"/>
-          </a:xfrm>
-          <a:prstGeom prst="roundRect">
-            <a:avLst/>
-          </a:prstGeom>
-          <a:solidFill>
-            <a:srgbClr val="383838"/>
-          </a:solidFill>
           <a:ln>
             <a:solidFill>
-              <a:srgbClr val="505050"/>
+              <a:srgbClr val="888888"/>
             </a:solidFill>
           </a:ln>
         </p:spPr>
@@ -6091,136 +5419,38 @@
           <a:bodyPr rtlCol="0" anchor="ctr"/>
           <a:lstStyle/>
           <a:p>
-            <a:pPr algn="ctr"/>
-          </a:p>
-        </p:txBody>
-      </p:sp>
-      <p:sp>
-        <p:nvSpPr>
-          <p:cNvPr id="45" name="TextBox 44"/>
-          <p:cNvSpPr txBox="1"/>
-          <p:nvPr/>
-        </p:nvSpPr>
-        <p:spPr>
-          <a:xfrm>
-            <a:off x="6035040" y="4160520"/>
-            <a:ext cx="731520" cy="731520"/>
-          </a:xfrm>
-          <a:prstGeom prst="rect">
-            <a:avLst/>
-          </a:prstGeom>
-          <a:noFill/>
-        </p:spPr>
-        <p:txBody>
-          <a:bodyPr wrap="none">
-            <a:spAutoFit/>
-          </a:bodyPr>
-          <a:lstStyle/>
-          <a:p>
             <a:pPr algn="ctr">
-              <a:defRPr sz="2800">
-                <a:solidFill>
-                  <a:srgbClr val="F38B00"/>
+              <a:defRPr sz="1100">
+                <a:solidFill>
+                  <a:srgbClr val="FFFFFF"/>
                 </a:solidFill>
               </a:defRPr>
             </a:pPr>
             <a:r>
-              <a:t>🔒</a:t>
-            </a:r>
-          </a:p>
-        </p:txBody>
-      </p:sp>
-      <p:sp>
-        <p:nvSpPr>
-          <p:cNvPr id="46" name="TextBox 45"/>
-          <p:cNvSpPr txBox="1"/>
-          <p:nvPr/>
-        </p:nvSpPr>
-        <p:spPr>
-          <a:xfrm>
-            <a:off x="6858000" y="4114800"/>
-            <a:ext cx="4663440" cy="274320"/>
-          </a:xfrm>
-          <a:prstGeom prst="rect">
-            <a:avLst/>
-          </a:prstGeom>
-          <a:noFill/>
-        </p:spPr>
-        <p:txBody>
-          <a:bodyPr wrap="none">
-            <a:spAutoFit/>
-          </a:bodyPr>
-          <a:lstStyle/>
-          <a:p>
-            <a:pPr>
-              <a:defRPr sz="1400" b="1">
-                <a:solidFill>
-                  <a:srgbClr val="FFFFFF"/>
-                </a:solidFill>
-              </a:defRPr>
-            </a:pPr>
-            <a:r>
-              <a:t>接口违规</a:t>
-            </a:r>
-          </a:p>
-        </p:txBody>
-      </p:sp>
-      <p:sp>
-        <p:nvSpPr>
-          <p:cNvPr id="47" name="TextBox 46"/>
-          <p:cNvSpPr txBox="1"/>
-          <p:nvPr/>
-        </p:nvSpPr>
-        <p:spPr>
-          <a:xfrm>
-            <a:off x="6858000" y="4389120"/>
-            <a:ext cx="4572000" cy="548640"/>
-          </a:xfrm>
-          <a:prstGeom prst="rect">
-            <a:avLst/>
-          </a:prstGeom>
-          <a:noFill/>
-        </p:spPr>
-        <p:txBody>
-          <a:bodyPr wrap="square">
-            <a:spAutoFit/>
-          </a:bodyPr>
-          <a:lstStyle/>
-          <a:p>
-            <a:pPr>
-              <a:defRPr sz="1100">
-                <a:solidFill>
-                  <a:srgbClr val="FFFFFF"/>
-                </a:solidFill>
-              </a:defRPr>
-            </a:pPr>
-            <a:r>
-              <a:t>AI 无法识别 SAP FM 接口必须使用 DDIC 类型的强制规则。</a:t>
-            </a:r>
-          </a:p>
-        </p:txBody>
-      </p:sp>
-      <p:sp>
-        <p:nvSpPr>
-          <p:cNvPr id="48" name="Rounded Rectangle 47"/>
+              <a:t>  MEINS</a:t>
+            </a:r>
+          </a:p>
+        </p:txBody>
+      </p:sp>
+      <p:sp>
+        <p:nvSpPr>
+          <p:cNvPr id="27" name="Oval 26"/>
           <p:cNvSpPr/>
           <p:nvPr/>
         </p:nvSpPr>
         <p:spPr>
           <a:xfrm>
-            <a:off x="5943600" y="5212080"/>
-            <a:ext cx="5669280" cy="1005840"/>
-          </a:xfrm>
-          <a:prstGeom prst="roundRect">
+            <a:off x="5669280" y="5870448"/>
+            <a:ext cx="137160" cy="137160"/>
+          </a:xfrm>
+          <a:prstGeom prst="ellipse">
             <a:avLst/>
           </a:prstGeom>
           <a:solidFill>
-            <a:srgbClr val="383838"/>
+            <a:srgbClr val="888888"/>
           </a:solidFill>
           <a:ln>
-            <a:solidFill>
-              <a:srgbClr val="505050"/>
-            </a:solidFill>
+            <a:noFill/>
           </a:ln>
         </p:spPr>
         <p:style>
@@ -6247,14 +5477,484 @@
       </p:sp>
       <p:sp>
         <p:nvSpPr>
-          <p:cNvPr id="49" name="TextBox 48"/>
+          <p:cNvPr id="28" name="Rounded Rectangle 27"/>
+          <p:cNvSpPr/>
+          <p:nvPr/>
+        </p:nvSpPr>
+        <p:spPr>
+          <a:xfrm>
+            <a:off x="685800" y="6089904"/>
+            <a:ext cx="2560320" cy="201168"/>
+          </a:xfrm>
+          <a:prstGeom prst="roundRect">
+            <a:avLst/>
+          </a:prstGeom>
+          <a:noFill/>
+          <a:ln>
+            <a:solidFill>
+              <a:srgbClr val="FF8C00"/>
+            </a:solidFill>
+            <a:prstDash val="sysDash"/>
+          </a:ln>
+        </p:spPr>
+        <p:style>
+          <a:lnRef idx="1">
+            <a:schemeClr val="accent1"/>
+          </a:lnRef>
+          <a:fillRef idx="3">
+            <a:schemeClr val="accent1"/>
+          </a:fillRef>
+          <a:effectRef idx="2">
+            <a:schemeClr val="accent1"/>
+          </a:effectRef>
+          <a:fontRef idx="minor">
+            <a:schemeClr val="lt1"/>
+          </a:fontRef>
+        </p:style>
+        <p:txBody>
+          <a:bodyPr rtlCol="0" anchor="ctr"/>
+          <a:lstStyle/>
+          <a:p>
+            <a:pPr algn="ctr">
+              <a:defRPr sz="1100">
+                <a:solidFill>
+                  <a:srgbClr val="FFFFFF"/>
+                </a:solidFill>
+              </a:defRPr>
+            </a:pPr>
+            <a:r>
+              <a:t>  Z_VALID_TO</a:t>
+            </a:r>
+          </a:p>
+        </p:txBody>
+      </p:sp>
+      <p:sp>
+        <p:nvSpPr>
+          <p:cNvPr id="29" name="Isosceles Triangle 28"/>
+          <p:cNvSpPr/>
+          <p:nvPr/>
+        </p:nvSpPr>
+        <p:spPr>
+          <a:xfrm>
+            <a:off x="3017520" y="6117336"/>
+            <a:ext cx="137160" cy="137160"/>
+          </a:xfrm>
+          <a:prstGeom prst="triangle">
+            <a:avLst/>
+          </a:prstGeom>
+          <a:solidFill>
+            <a:srgbClr val="FF8C00"/>
+          </a:solidFill>
+          <a:ln>
+            <a:noFill/>
+          </a:ln>
+        </p:spPr>
+        <p:style>
+          <a:lnRef idx="1">
+            <a:schemeClr val="accent1"/>
+          </a:lnRef>
+          <a:fillRef idx="3">
+            <a:schemeClr val="accent1"/>
+          </a:fillRef>
+          <a:effectRef idx="2">
+            <a:schemeClr val="accent1"/>
+          </a:effectRef>
+          <a:fontRef idx="minor">
+            <a:schemeClr val="lt1"/>
+          </a:fontRef>
+        </p:style>
+        <p:txBody>
+          <a:bodyPr rtlCol="0" anchor="ctr"/>
+          <a:lstStyle/>
+          <a:p>
+            <a:pPr algn="ctr"/>
+          </a:p>
+        </p:txBody>
+      </p:sp>
+      <p:sp>
+        <p:nvSpPr>
+          <p:cNvPr id="30" name="Rounded Rectangle 29"/>
+          <p:cNvSpPr/>
+          <p:nvPr/>
+        </p:nvSpPr>
+        <p:spPr>
+          <a:xfrm>
+            <a:off x="3337560" y="6089904"/>
+            <a:ext cx="2560320" cy="201168"/>
+          </a:xfrm>
+          <a:prstGeom prst="roundRect">
+            <a:avLst/>
+          </a:prstGeom>
+          <a:noFill/>
+          <a:ln>
+            <a:solidFill>
+              <a:srgbClr val="888888"/>
+            </a:solidFill>
+          </a:ln>
+        </p:spPr>
+        <p:style>
+          <a:lnRef idx="1">
+            <a:schemeClr val="accent1"/>
+          </a:lnRef>
+          <a:fillRef idx="3">
+            <a:schemeClr val="accent1"/>
+          </a:fillRef>
+          <a:effectRef idx="2">
+            <a:schemeClr val="accent1"/>
+          </a:effectRef>
+          <a:fontRef idx="minor">
+            <a:schemeClr val="lt1"/>
+          </a:fontRef>
+        </p:style>
+        <p:txBody>
+          <a:bodyPr rtlCol="0" anchor="ctr"/>
+          <a:lstStyle/>
+          <a:p>
+            <a:pPr algn="ctr">
+              <a:defRPr sz="1100">
+                <a:solidFill>
+                  <a:srgbClr val="FFFFFF"/>
+                </a:solidFill>
+              </a:defRPr>
+            </a:pPr>
+            <a:r>
+              <a:t>  DATBI</a:t>
+            </a:r>
+          </a:p>
+        </p:txBody>
+      </p:sp>
+      <p:sp>
+        <p:nvSpPr>
+          <p:cNvPr id="31" name="Oval 30"/>
+          <p:cNvSpPr/>
+          <p:nvPr/>
+        </p:nvSpPr>
+        <p:spPr>
+          <a:xfrm>
+            <a:off x="5669280" y="6117336"/>
+            <a:ext cx="137160" cy="137160"/>
+          </a:xfrm>
+          <a:prstGeom prst="ellipse">
+            <a:avLst/>
+          </a:prstGeom>
+          <a:solidFill>
+            <a:srgbClr val="888888"/>
+          </a:solidFill>
+          <a:ln>
+            <a:noFill/>
+          </a:ln>
+        </p:spPr>
+        <p:style>
+          <a:lnRef idx="1">
+            <a:schemeClr val="accent1"/>
+          </a:lnRef>
+          <a:fillRef idx="3">
+            <a:schemeClr val="accent1"/>
+          </a:fillRef>
+          <a:effectRef idx="2">
+            <a:schemeClr val="accent1"/>
+          </a:effectRef>
+          <a:fontRef idx="minor">
+            <a:schemeClr val="lt1"/>
+          </a:fontRef>
+        </p:style>
+        <p:txBody>
+          <a:bodyPr rtlCol="0" anchor="ctr"/>
+          <a:lstStyle/>
+          <a:p>
+            <a:pPr algn="ctr"/>
+          </a:p>
+        </p:txBody>
+      </p:sp>
+      <p:sp>
+        <p:nvSpPr>
+          <p:cNvPr id="32" name="Rounded Rectangle 31"/>
+          <p:cNvSpPr/>
+          <p:nvPr/>
+        </p:nvSpPr>
+        <p:spPr>
+          <a:xfrm>
+            <a:off x="685800" y="6336792"/>
+            <a:ext cx="2560320" cy="201168"/>
+          </a:xfrm>
+          <a:prstGeom prst="roundRect">
+            <a:avLst/>
+          </a:prstGeom>
+          <a:noFill/>
+          <a:ln>
+            <a:solidFill>
+              <a:srgbClr val="FF8C00"/>
+            </a:solidFill>
+            <a:prstDash val="sysDash"/>
+          </a:ln>
+        </p:spPr>
+        <p:style>
+          <a:lnRef idx="1">
+            <a:schemeClr val="accent1"/>
+          </a:lnRef>
+          <a:fillRef idx="3">
+            <a:schemeClr val="accent1"/>
+          </a:fillRef>
+          <a:effectRef idx="2">
+            <a:schemeClr val="accent1"/>
+          </a:effectRef>
+          <a:fontRef idx="minor">
+            <a:schemeClr val="lt1"/>
+          </a:fontRef>
+        </p:style>
+        <p:txBody>
+          <a:bodyPr rtlCol="0" anchor="ctr"/>
+          <a:lstStyle/>
+          <a:p>
+            <a:pPr algn="ctr">
+              <a:defRPr sz="1100">
+                <a:solidFill>
+                  <a:srgbClr val="FFFFFF"/>
+                </a:solidFill>
+              </a:defRPr>
+            </a:pPr>
+            <a:r>
+              <a:t>  Z_QUOTA_TYPE</a:t>
+            </a:r>
+          </a:p>
+        </p:txBody>
+      </p:sp>
+      <p:sp>
+        <p:nvSpPr>
+          <p:cNvPr id="33" name="Isosceles Triangle 32"/>
+          <p:cNvSpPr/>
+          <p:nvPr/>
+        </p:nvSpPr>
+        <p:spPr>
+          <a:xfrm>
+            <a:off x="3017520" y="6364224"/>
+            <a:ext cx="137160" cy="137160"/>
+          </a:xfrm>
+          <a:prstGeom prst="triangle">
+            <a:avLst/>
+          </a:prstGeom>
+          <a:solidFill>
+            <a:srgbClr val="FF8C00"/>
+          </a:solidFill>
+          <a:ln>
+            <a:noFill/>
+          </a:ln>
+        </p:spPr>
+        <p:style>
+          <a:lnRef idx="1">
+            <a:schemeClr val="accent1"/>
+          </a:lnRef>
+          <a:fillRef idx="3">
+            <a:schemeClr val="accent1"/>
+          </a:fillRef>
+          <a:effectRef idx="2">
+            <a:schemeClr val="accent1"/>
+          </a:effectRef>
+          <a:fontRef idx="minor">
+            <a:schemeClr val="lt1"/>
+          </a:fontRef>
+        </p:style>
+        <p:txBody>
+          <a:bodyPr rtlCol="0" anchor="ctr"/>
+          <a:lstStyle/>
+          <a:p>
+            <a:pPr algn="ctr"/>
+          </a:p>
+        </p:txBody>
+      </p:sp>
+      <p:sp>
+        <p:nvSpPr>
+          <p:cNvPr id="34" name="Rounded Rectangle 33"/>
+          <p:cNvSpPr/>
+          <p:nvPr/>
+        </p:nvSpPr>
+        <p:spPr>
+          <a:xfrm>
+            <a:off x="3337560" y="6336792"/>
+            <a:ext cx="2560320" cy="201168"/>
+          </a:xfrm>
+          <a:prstGeom prst="roundRect">
+            <a:avLst/>
+          </a:prstGeom>
+          <a:noFill/>
+          <a:ln>
+            <a:solidFill>
+              <a:srgbClr val="888888"/>
+            </a:solidFill>
+          </a:ln>
+        </p:spPr>
+        <p:style>
+          <a:lnRef idx="1">
+            <a:schemeClr val="accent1"/>
+          </a:lnRef>
+          <a:fillRef idx="3">
+            <a:schemeClr val="accent1"/>
+          </a:fillRef>
+          <a:effectRef idx="2">
+            <a:schemeClr val="accent1"/>
+          </a:effectRef>
+          <a:fontRef idx="minor">
+            <a:schemeClr val="lt1"/>
+          </a:fontRef>
+        </p:style>
+        <p:txBody>
+          <a:bodyPr rtlCol="0" anchor="ctr"/>
+          <a:lstStyle/>
+          <a:p>
+            <a:pPr algn="ctr">
+              <a:defRPr sz="1100">
+                <a:solidFill>
+                  <a:srgbClr val="FFFFFF"/>
+                </a:solidFill>
+              </a:defRPr>
+            </a:pPr>
+            <a:r>
+              <a:t>  QUNUM</a:t>
+            </a:r>
+          </a:p>
+        </p:txBody>
+      </p:sp>
+      <p:sp>
+        <p:nvSpPr>
+          <p:cNvPr id="35" name="Oval 34"/>
+          <p:cNvSpPr/>
+          <p:nvPr/>
+        </p:nvSpPr>
+        <p:spPr>
+          <a:xfrm>
+            <a:off x="5669280" y="6364224"/>
+            <a:ext cx="137160" cy="137160"/>
+          </a:xfrm>
+          <a:prstGeom prst="ellipse">
+            <a:avLst/>
+          </a:prstGeom>
+          <a:solidFill>
+            <a:srgbClr val="888888"/>
+          </a:solidFill>
+          <a:ln>
+            <a:noFill/>
+          </a:ln>
+        </p:spPr>
+        <p:style>
+          <a:lnRef idx="1">
+            <a:schemeClr val="accent1"/>
+          </a:lnRef>
+          <a:fillRef idx="3">
+            <a:schemeClr val="accent1"/>
+          </a:fillRef>
+          <a:effectRef idx="2">
+            <a:schemeClr val="accent1"/>
+          </a:effectRef>
+          <a:fontRef idx="minor">
+            <a:schemeClr val="lt1"/>
+          </a:fontRef>
+        </p:style>
+        <p:txBody>
+          <a:bodyPr rtlCol="0" anchor="ctr"/>
+          <a:lstStyle/>
+          <a:p>
+            <a:pPr algn="ctr"/>
+          </a:p>
+        </p:txBody>
+      </p:sp>
+      <p:sp>
+        <p:nvSpPr>
+          <p:cNvPr id="36" name="Rounded Rectangle 35"/>
+          <p:cNvSpPr/>
+          <p:nvPr/>
+        </p:nvSpPr>
+        <p:spPr>
+          <a:xfrm>
+            <a:off x="6400800" y="1463040"/>
+            <a:ext cx="5303520" cy="1097280"/>
+          </a:xfrm>
+          <a:prstGeom prst="roundRect">
+            <a:avLst/>
+          </a:prstGeom>
+          <a:solidFill>
+            <a:srgbClr val="333333"/>
+          </a:solidFill>
+          <a:ln>
+            <a:solidFill>
+              <a:srgbClr val="555555"/>
+            </a:solidFill>
+          </a:ln>
+        </p:spPr>
+        <p:style>
+          <a:lnRef idx="1">
+            <a:schemeClr val="accent1"/>
+          </a:lnRef>
+          <a:fillRef idx="3">
+            <a:schemeClr val="accent1"/>
+          </a:fillRef>
+          <a:effectRef idx="2">
+            <a:schemeClr val="accent1"/>
+          </a:effectRef>
+          <a:fontRef idx="minor">
+            <a:schemeClr val="lt1"/>
+          </a:fontRef>
+        </p:style>
+        <p:txBody>
+          <a:bodyPr rtlCol="0" anchor="ctr"/>
+          <a:lstStyle/>
+          <a:p>
+            <a:pPr algn="ctr"/>
+          </a:p>
+        </p:txBody>
+      </p:sp>
+      <p:sp>
+        <p:nvSpPr>
+          <p:cNvPr id="37" name="Oval 36"/>
+          <p:cNvSpPr/>
+          <p:nvPr/>
+        </p:nvSpPr>
+        <p:spPr>
+          <a:xfrm>
+            <a:off x="6675120" y="1783080"/>
+            <a:ext cx="457200" cy="457200"/>
+          </a:xfrm>
+          <a:prstGeom prst="ellipse">
+            <a:avLst/>
+          </a:prstGeom>
+          <a:noFill/>
+          <a:ln w="25400">
+            <a:solidFill>
+              <a:srgbClr val="FF8C00"/>
+            </a:solidFill>
+          </a:ln>
+        </p:spPr>
+        <p:style>
+          <a:lnRef idx="1">
+            <a:schemeClr val="accent1"/>
+          </a:lnRef>
+          <a:fillRef idx="3">
+            <a:schemeClr val="accent1"/>
+          </a:fillRef>
+          <a:effectRef idx="2">
+            <a:schemeClr val="accent1"/>
+          </a:effectRef>
+          <a:fontRef idx="minor">
+            <a:schemeClr val="lt1"/>
+          </a:fontRef>
+        </p:style>
+        <p:txBody>
+          <a:bodyPr rtlCol="0" anchor="ctr"/>
+          <a:lstStyle/>
+          <a:p>
+            <a:pPr algn="ctr"/>
+          </a:p>
+        </p:txBody>
+      </p:sp>
+      <p:sp>
+        <p:nvSpPr>
+          <p:cNvPr id="38" name="TextBox 37"/>
           <p:cNvSpPr txBox="1"/>
           <p:nvPr/>
         </p:nvSpPr>
         <p:spPr>
           <a:xfrm>
-            <a:off x="6035040" y="5349240"/>
-            <a:ext cx="731520" cy="731520"/>
+            <a:off x="7315200" y="1600200"/>
+            <a:ext cx="4206240" cy="365760"/>
           </a:xfrm>
           <a:prstGeom prst="rect">
             <a:avLst/>
@@ -6267,29 +5967,152 @@
           </a:bodyPr>
           <a:lstStyle/>
           <a:p>
-            <a:pPr algn="ctr">
-              <a:defRPr sz="2800">
-                <a:solidFill>
-                  <a:srgbClr val="F38B00"/>
+            <a:pPr>
+              <a:defRPr sz="1600" b="1">
+                <a:solidFill>
+                  <a:srgbClr val="FFFFFF"/>
                 </a:solidFill>
               </a:defRPr>
             </a:pPr>
             <a:r>
-              <a:t>⏱️</a:t>
-            </a:r>
-          </a:p>
-        </p:txBody>
-      </p:sp>
-      <p:sp>
-        <p:nvSpPr>
-          <p:cNvPr id="50" name="TextBox 49"/>
+              <a:t>概念误导</a:t>
+            </a:r>
+          </a:p>
+        </p:txBody>
+      </p:sp>
+      <p:sp>
+        <p:nvSpPr>
+          <p:cNvPr id="39" name="TextBox 38"/>
           <p:cNvSpPr txBox="1"/>
           <p:nvPr/>
         </p:nvSpPr>
         <p:spPr>
           <a:xfrm>
-            <a:off x="6858000" y="5303520"/>
-            <a:ext cx="4663440" cy="274320"/>
+            <a:off x="7315200" y="1920240"/>
+            <a:ext cx="4206240" cy="548640"/>
+          </a:xfrm>
+          <a:prstGeom prst="rect">
+            <a:avLst/>
+          </a:prstGeom>
+          <a:noFill/>
+        </p:spPr>
+        <p:txBody>
+          <a:bodyPr wrap="square">
+            <a:spAutoFit/>
+          </a:bodyPr>
+          <a:lstStyle/>
+          <a:p>
+            <a:pPr>
+              <a:defRPr sz="1200">
+                <a:solidFill>
+                  <a:srgbClr val="CCCCCC"/>
+                </a:solidFill>
+              </a:defRPr>
+            </a:pPr>
+            <a:r>
+              <a:t>Copilot 完全混淆“配额”与“货源”业务模型，代码完全不可用。</a:t>
+            </a:r>
+          </a:p>
+        </p:txBody>
+      </p:sp>
+      <p:sp>
+        <p:nvSpPr>
+          <p:cNvPr id="40" name="Rounded Rectangle 39"/>
+          <p:cNvSpPr/>
+          <p:nvPr/>
+        </p:nvSpPr>
+        <p:spPr>
+          <a:xfrm>
+            <a:off x="6400800" y="2743200"/>
+            <a:ext cx="5303520" cy="1097280"/>
+          </a:xfrm>
+          <a:prstGeom prst="roundRect">
+            <a:avLst/>
+          </a:prstGeom>
+          <a:solidFill>
+            <a:srgbClr val="333333"/>
+          </a:solidFill>
+          <a:ln>
+            <a:solidFill>
+              <a:srgbClr val="555555"/>
+            </a:solidFill>
+          </a:ln>
+        </p:spPr>
+        <p:style>
+          <a:lnRef idx="1">
+            <a:schemeClr val="accent1"/>
+          </a:lnRef>
+          <a:fillRef idx="3">
+            <a:schemeClr val="accent1"/>
+          </a:fillRef>
+          <a:effectRef idx="2">
+            <a:schemeClr val="accent1"/>
+          </a:effectRef>
+          <a:fontRef idx="minor">
+            <a:schemeClr val="lt1"/>
+          </a:fontRef>
+        </p:style>
+        <p:txBody>
+          <a:bodyPr rtlCol="0" anchor="ctr"/>
+          <a:lstStyle/>
+          <a:p>
+            <a:pPr algn="ctr"/>
+          </a:p>
+        </p:txBody>
+      </p:sp>
+      <p:sp>
+        <p:nvSpPr>
+          <p:cNvPr id="41" name="Oval 40"/>
+          <p:cNvSpPr/>
+          <p:nvPr/>
+        </p:nvSpPr>
+        <p:spPr>
+          <a:xfrm>
+            <a:off x="6675120" y="3063240"/>
+            <a:ext cx="457200" cy="457200"/>
+          </a:xfrm>
+          <a:prstGeom prst="ellipse">
+            <a:avLst/>
+          </a:prstGeom>
+          <a:noFill/>
+          <a:ln w="25400">
+            <a:solidFill>
+              <a:srgbClr val="FF8C00"/>
+            </a:solidFill>
+          </a:ln>
+        </p:spPr>
+        <p:style>
+          <a:lnRef idx="1">
+            <a:schemeClr val="accent1"/>
+          </a:lnRef>
+          <a:fillRef idx="3">
+            <a:schemeClr val="accent1"/>
+          </a:fillRef>
+          <a:effectRef idx="2">
+            <a:schemeClr val="accent1"/>
+          </a:effectRef>
+          <a:fontRef idx="minor">
+            <a:schemeClr val="lt1"/>
+          </a:fontRef>
+        </p:style>
+        <p:txBody>
+          <a:bodyPr rtlCol="0" anchor="ctr"/>
+          <a:lstStyle/>
+          <a:p>
+            <a:pPr algn="ctr"/>
+          </a:p>
+        </p:txBody>
+      </p:sp>
+      <p:sp>
+        <p:nvSpPr>
+          <p:cNvPr id="42" name="TextBox 41"/>
+          <p:cNvSpPr txBox="1"/>
+          <p:nvPr/>
+        </p:nvSpPr>
+        <p:spPr>
+          <a:xfrm>
+            <a:off x="7315200" y="2880360"/>
+            <a:ext cx="4206240" cy="365760"/>
           </a:xfrm>
           <a:prstGeom prst="rect">
             <a:avLst/>
@@ -6303,28 +6126,28 @@
           <a:lstStyle/>
           <a:p>
             <a:pPr>
-              <a:defRPr sz="1400" b="1">
+              <a:defRPr sz="1600" b="1">
                 <a:solidFill>
                   <a:srgbClr val="FFFFFF"/>
                 </a:solidFill>
               </a:defRPr>
             </a:pPr>
             <a:r>
-              <a:t>效率停滞</a:t>
-            </a:r>
-          </a:p>
-        </p:txBody>
-      </p:sp>
-      <p:sp>
-        <p:nvSpPr>
-          <p:cNvPr id="51" name="TextBox 50"/>
+              <a:t>严重幻觉</a:t>
+            </a:r>
+          </a:p>
+        </p:txBody>
+      </p:sp>
+      <p:sp>
+        <p:nvSpPr>
+          <p:cNvPr id="43" name="TextBox 42"/>
           <p:cNvSpPr txBox="1"/>
           <p:nvPr/>
         </p:nvSpPr>
         <p:spPr>
           <a:xfrm>
-            <a:off x="6858000" y="5577840"/>
-            <a:ext cx="4572000" cy="548640"/>
+            <a:off x="7315200" y="3200400"/>
+            <a:ext cx="4206240" cy="548640"/>
           </a:xfrm>
           <a:prstGeom prst="rect">
             <a:avLst/>
@@ -6337,29 +6160,163 @@
           </a:bodyPr>
           <a:lstStyle/>
           <a:p>
-            <a:pPr>
-              <a:defRPr sz="1100">
-                <a:solidFill>
-                  <a:srgbClr val="FFFFFF"/>
-                </a:solidFill>
-              </a:defRPr>
-            </a:pPr>
-            <a:r>
-              <a:t>修正幻觉字段与重写逻辑的成本已抵消 AI 生成的便利。</a:t>
-            </a:r>
-          </a:p>
-        </p:txBody>
-      </p:sp>
-      <p:sp>
-        <p:nvSpPr>
-          <p:cNvPr id="52" name="TextBox 51"/>
+            <a:r>
+              <a:rPr sz="1200">
+                <a:solidFill>
+                  <a:srgbClr val="CCCCCC"/>
+                </a:solidFill>
+              </a:rPr>
+              <a:t>Claude 虚构 </a:t>
+            </a:r>
+            <a:r>
+              <a:rPr sz="1200">
+                <a:solidFill>
+                  <a:srgbClr val="FF8C00"/>
+                </a:solidFill>
+              </a:rPr>
+              <a:t>9</a:t>
+            </a:r>
+            <a:r>
+              <a:rPr sz="1200">
+                <a:solidFill>
+                  <a:srgbClr val="CCCCCC"/>
+                </a:solidFill>
+              </a:rPr>
+              <a:t> 处核心字段（占比 </a:t>
+            </a:r>
+            <a:r>
+              <a:rPr sz="1200">
+                <a:solidFill>
+                  <a:srgbClr val="FF8C00"/>
+                </a:solidFill>
+              </a:rPr>
+              <a:t>50%</a:t>
+            </a:r>
+            <a:r>
+              <a:rPr sz="1200">
+                <a:solidFill>
+                  <a:srgbClr val="CCCCCC"/>
+                </a:solidFill>
+              </a:rPr>
+              <a:t>），引发 </a:t>
+            </a:r>
+            <a:r>
+              <a:rPr sz="1200">
+                <a:solidFill>
+                  <a:srgbClr val="FF8C00"/>
+                </a:solidFill>
+              </a:rPr>
+              <a:t>21</a:t>
+            </a:r>
+            <a:r>
+              <a:rPr sz="1200">
+                <a:solidFill>
+                  <a:srgbClr val="CCCCCC"/>
+                </a:solidFill>
+              </a:rPr>
+              <a:t> 个连锁语法错误。</a:t>
+            </a:r>
+          </a:p>
+        </p:txBody>
+      </p:sp>
+      <p:sp>
+        <p:nvSpPr>
+          <p:cNvPr id="44" name="Rounded Rectangle 43"/>
+          <p:cNvSpPr/>
+          <p:nvPr/>
+        </p:nvSpPr>
+        <p:spPr>
+          <a:xfrm>
+            <a:off x="6400800" y="4023360"/>
+            <a:ext cx="5303520" cy="1097280"/>
+          </a:xfrm>
+          <a:prstGeom prst="roundRect">
+            <a:avLst/>
+          </a:prstGeom>
+          <a:solidFill>
+            <a:srgbClr val="333333"/>
+          </a:solidFill>
+          <a:ln>
+            <a:solidFill>
+              <a:srgbClr val="555555"/>
+            </a:solidFill>
+          </a:ln>
+        </p:spPr>
+        <p:style>
+          <a:lnRef idx="1">
+            <a:schemeClr val="accent1"/>
+          </a:lnRef>
+          <a:fillRef idx="3">
+            <a:schemeClr val="accent1"/>
+          </a:fillRef>
+          <a:effectRef idx="2">
+            <a:schemeClr val="accent1"/>
+          </a:effectRef>
+          <a:fontRef idx="minor">
+            <a:schemeClr val="lt1"/>
+          </a:fontRef>
+        </p:style>
+        <p:txBody>
+          <a:bodyPr rtlCol="0" anchor="ctr"/>
+          <a:lstStyle/>
+          <a:p>
+            <a:pPr algn="ctr"/>
+          </a:p>
+        </p:txBody>
+      </p:sp>
+      <p:sp>
+        <p:nvSpPr>
+          <p:cNvPr id="45" name="Oval 44"/>
+          <p:cNvSpPr/>
+          <p:nvPr/>
+        </p:nvSpPr>
+        <p:spPr>
+          <a:xfrm>
+            <a:off x="6675120" y="4343400"/>
+            <a:ext cx="457200" cy="457200"/>
+          </a:xfrm>
+          <a:prstGeom prst="ellipse">
+            <a:avLst/>
+          </a:prstGeom>
+          <a:noFill/>
+          <a:ln w="25400">
+            <a:solidFill>
+              <a:srgbClr val="FF8C00"/>
+            </a:solidFill>
+          </a:ln>
+        </p:spPr>
+        <p:style>
+          <a:lnRef idx="1">
+            <a:schemeClr val="accent1"/>
+          </a:lnRef>
+          <a:fillRef idx="3">
+            <a:schemeClr val="accent1"/>
+          </a:fillRef>
+          <a:effectRef idx="2">
+            <a:schemeClr val="accent1"/>
+          </a:effectRef>
+          <a:fontRef idx="minor">
+            <a:schemeClr val="lt1"/>
+          </a:fontRef>
+        </p:style>
+        <p:txBody>
+          <a:bodyPr rtlCol="0" anchor="ctr"/>
+          <a:lstStyle/>
+          <a:p>
+            <a:pPr algn="ctr"/>
+          </a:p>
+        </p:txBody>
+      </p:sp>
+      <p:sp>
+        <p:nvSpPr>
+          <p:cNvPr id="46" name="TextBox 45"/>
           <p:cNvSpPr txBox="1"/>
           <p:nvPr/>
         </p:nvSpPr>
         <p:spPr>
           <a:xfrm>
-            <a:off x="11430000" y="6400800"/>
-            <a:ext cx="548640" cy="365760"/>
+            <a:off x="7315200" y="4160520"/>
+            <a:ext cx="4206240" cy="365760"/>
           </a:xfrm>
           <a:prstGeom prst="rect">
             <a:avLst/>
@@ -6372,15 +6329,208 @@
           </a:bodyPr>
           <a:lstStyle/>
           <a:p>
-            <a:pPr algn="r">
+            <a:pPr>
+              <a:defRPr sz="1600" b="1">
+                <a:solidFill>
+                  <a:srgbClr val="FFFFFF"/>
+                </a:solidFill>
+              </a:defRPr>
+            </a:pPr>
+            <a:r>
+              <a:t>接口违规</a:t>
+            </a:r>
+          </a:p>
+        </p:txBody>
+      </p:sp>
+      <p:sp>
+        <p:nvSpPr>
+          <p:cNvPr id="47" name="TextBox 46"/>
+          <p:cNvSpPr txBox="1"/>
+          <p:nvPr/>
+        </p:nvSpPr>
+        <p:spPr>
+          <a:xfrm>
+            <a:off x="7315200" y="4480560"/>
+            <a:ext cx="4206240" cy="548640"/>
+          </a:xfrm>
+          <a:prstGeom prst="rect">
+            <a:avLst/>
+          </a:prstGeom>
+          <a:noFill/>
+        </p:spPr>
+        <p:txBody>
+          <a:bodyPr wrap="square">
+            <a:spAutoFit/>
+          </a:bodyPr>
+          <a:lstStyle/>
+          <a:p>
+            <a:pPr>
               <a:defRPr sz="1200">
                 <a:solidFill>
-                  <a:srgbClr val="AAAAAA"/>
+                  <a:srgbClr val="CCCCCC"/>
                 </a:solidFill>
               </a:defRPr>
             </a:pPr>
             <a:r>
-              <a:t>2/4</a:t>
+              <a:t>AI 无法识别 SAP FM 接口必须使用 DDIC 类型的强制规则。</a:t>
+            </a:r>
+          </a:p>
+        </p:txBody>
+      </p:sp>
+      <p:sp>
+        <p:nvSpPr>
+          <p:cNvPr id="48" name="Rounded Rectangle 47"/>
+          <p:cNvSpPr/>
+          <p:nvPr/>
+        </p:nvSpPr>
+        <p:spPr>
+          <a:xfrm>
+            <a:off x="6400800" y="5303520"/>
+            <a:ext cx="5303520" cy="1097280"/>
+          </a:xfrm>
+          <a:prstGeom prst="roundRect">
+            <a:avLst/>
+          </a:prstGeom>
+          <a:solidFill>
+            <a:srgbClr val="333333"/>
+          </a:solidFill>
+          <a:ln>
+            <a:solidFill>
+              <a:srgbClr val="555555"/>
+            </a:solidFill>
+          </a:ln>
+        </p:spPr>
+        <p:style>
+          <a:lnRef idx="1">
+            <a:schemeClr val="accent1"/>
+          </a:lnRef>
+          <a:fillRef idx="3">
+            <a:schemeClr val="accent1"/>
+          </a:fillRef>
+          <a:effectRef idx="2">
+            <a:schemeClr val="accent1"/>
+          </a:effectRef>
+          <a:fontRef idx="minor">
+            <a:schemeClr val="lt1"/>
+          </a:fontRef>
+        </p:style>
+        <p:txBody>
+          <a:bodyPr rtlCol="0" anchor="ctr"/>
+          <a:lstStyle/>
+          <a:p>
+            <a:pPr algn="ctr"/>
+          </a:p>
+        </p:txBody>
+      </p:sp>
+      <p:sp>
+        <p:nvSpPr>
+          <p:cNvPr id="49" name="Oval 48"/>
+          <p:cNvSpPr/>
+          <p:nvPr/>
+        </p:nvSpPr>
+        <p:spPr>
+          <a:xfrm>
+            <a:off x="6675120" y="5623560"/>
+            <a:ext cx="457200" cy="457200"/>
+          </a:xfrm>
+          <a:prstGeom prst="ellipse">
+            <a:avLst/>
+          </a:prstGeom>
+          <a:noFill/>
+          <a:ln w="25400">
+            <a:solidFill>
+              <a:srgbClr val="FF8C00"/>
+            </a:solidFill>
+          </a:ln>
+        </p:spPr>
+        <p:style>
+          <a:lnRef idx="1">
+            <a:schemeClr val="accent1"/>
+          </a:lnRef>
+          <a:fillRef idx="3">
+            <a:schemeClr val="accent1"/>
+          </a:fillRef>
+          <a:effectRef idx="2">
+            <a:schemeClr val="accent1"/>
+          </a:effectRef>
+          <a:fontRef idx="minor">
+            <a:schemeClr val="lt1"/>
+          </a:fontRef>
+        </p:style>
+        <p:txBody>
+          <a:bodyPr rtlCol="0" anchor="ctr"/>
+          <a:lstStyle/>
+          <a:p>
+            <a:pPr algn="ctr"/>
+          </a:p>
+        </p:txBody>
+      </p:sp>
+      <p:sp>
+        <p:nvSpPr>
+          <p:cNvPr id="50" name="TextBox 49"/>
+          <p:cNvSpPr txBox="1"/>
+          <p:nvPr/>
+        </p:nvSpPr>
+        <p:spPr>
+          <a:xfrm>
+            <a:off x="7315200" y="5440680"/>
+            <a:ext cx="4206240" cy="365760"/>
+          </a:xfrm>
+          <a:prstGeom prst="rect">
+            <a:avLst/>
+          </a:prstGeom>
+          <a:noFill/>
+        </p:spPr>
+        <p:txBody>
+          <a:bodyPr wrap="none">
+            <a:spAutoFit/>
+          </a:bodyPr>
+          <a:lstStyle/>
+          <a:p>
+            <a:pPr>
+              <a:defRPr sz="1600" b="1">
+                <a:solidFill>
+                  <a:srgbClr val="FFFFFF"/>
+                </a:solidFill>
+              </a:defRPr>
+            </a:pPr>
+            <a:r>
+              <a:t>效率停滞</a:t>
+            </a:r>
+          </a:p>
+        </p:txBody>
+      </p:sp>
+      <p:sp>
+        <p:nvSpPr>
+          <p:cNvPr id="51" name="TextBox 50"/>
+          <p:cNvSpPr txBox="1"/>
+          <p:nvPr/>
+        </p:nvSpPr>
+        <p:spPr>
+          <a:xfrm>
+            <a:off x="7315200" y="5760720"/>
+            <a:ext cx="4206240" cy="548640"/>
+          </a:xfrm>
+          <a:prstGeom prst="rect">
+            <a:avLst/>
+          </a:prstGeom>
+          <a:noFill/>
+        </p:spPr>
+        <p:txBody>
+          <a:bodyPr wrap="square">
+            <a:spAutoFit/>
+          </a:bodyPr>
+          <a:lstStyle/>
+          <a:p>
+            <a:pPr>
+              <a:defRPr sz="1200">
+                <a:solidFill>
+                  <a:srgbClr val="CCCCCC"/>
+                </a:solidFill>
+              </a:defRPr>
+            </a:pPr>
+            <a:r>
+              <a:t>修正幻觉字段与重写逻辑的成本已抵消 AI 生成的便利。</a:t>
             </a:r>
           </a:p>
         </p:txBody>
@@ -6396,6 +6546,14 @@
 <file path=ppt/slides/slide3.xml><?xml version="1.0" encoding="utf-8"?>
 <p:sld xmlns:a="http://schemas.openxmlformats.org/drawingml/2006/main" xmlns:p="http://schemas.openxmlformats.org/presentationml/2006/main" xmlns:r="http://schemas.openxmlformats.org/officeDocument/2006/relationships">
   <p:cSld>
+    <p:bg>
+      <p:bgPr>
+        <a:solidFill>
+          <a:srgbClr val="12151A"/>
+        </a:solidFill>
+        <a:effectLst/>
+      </p:bgPr>
+    </p:bg>
     <p:spTree>
       <p:nvGrpSpPr>
         <p:cNvPr id="1" name=""/>
@@ -6405,23 +6563,113 @@
       <p:grpSpPr/>
       <p:sp>
         <p:nvSpPr>
-          <p:cNvPr id="2" name="Rectangle 1"/>
+          <p:cNvPr id="2" name="TextBox 1"/>
+          <p:cNvSpPr txBox="1"/>
+          <p:nvPr/>
+        </p:nvSpPr>
+        <p:spPr>
+          <a:xfrm>
+            <a:off x="457200" y="365760"/>
+            <a:ext cx="9144000" cy="731520"/>
+          </a:xfrm>
+          <a:prstGeom prst="rect">
+            <a:avLst/>
+          </a:prstGeom>
+          <a:noFill/>
+        </p:spPr>
+        <p:txBody>
+          <a:bodyPr wrap="none">
+            <a:spAutoFit/>
+          </a:bodyPr>
+          <a:lstStyle/>
+          <a:p>
+            <a:r>
+              <a:rPr sz="3200" b="1">
+                <a:solidFill>
+                  <a:srgbClr val="FFFFFF"/>
+                </a:solidFill>
+                <a:latin typeface="Microsoft YaHei"/>
+              </a:rPr>
+              <a:t>高复杂度：效率反降 </a:t>
+            </a:r>
+            <a:r>
+              <a:rPr sz="3600" b="1">
+                <a:solidFill>
+                  <a:srgbClr val="E53935"/>
+                </a:solidFill>
+                <a:latin typeface="Microsoft YaHei"/>
+              </a:rPr>
+              <a:t>60%</a:t>
+            </a:r>
+            <a:r>
+              <a:rPr sz="3200" b="1">
+                <a:solidFill>
+                  <a:srgbClr val="FFFFFF"/>
+                </a:solidFill>
+                <a:latin typeface="Microsoft YaHei"/>
+              </a:rPr>
+              <a:t> 的修复陷阱</a:t>
+            </a:r>
+          </a:p>
+        </p:txBody>
+      </p:sp>
+      <p:sp>
+        <p:nvSpPr>
+          <p:cNvPr id="3" name="TextBox 2"/>
+          <p:cNvSpPr txBox="1"/>
+          <p:nvPr/>
+        </p:nvSpPr>
+        <p:spPr>
+          <a:xfrm>
+            <a:off x="457200" y="1005840"/>
+            <a:ext cx="9144000" cy="457200"/>
+          </a:xfrm>
+          <a:prstGeom prst="rect">
+            <a:avLst/>
+          </a:prstGeom>
+          <a:noFill/>
+        </p:spPr>
+        <p:txBody>
+          <a:bodyPr wrap="none">
+            <a:spAutoFit/>
+          </a:bodyPr>
+          <a:lstStyle/>
+          <a:p>
+            <a:pPr>
+              <a:defRPr sz="1800">
+                <a:solidFill>
+                  <a:srgbClr val="AAAAAA"/>
+                </a:solidFill>
+                <a:latin typeface="Microsoft YaHei"/>
+              </a:defRPr>
+            </a:pPr>
+            <a:r>
+              <a:t>案例C — 跨工厂 STO 报表（18+ 关联表）</a:t>
+            </a:r>
+          </a:p>
+        </p:txBody>
+      </p:sp>
+      <p:sp>
+        <p:nvSpPr>
+          <p:cNvPr id="4" name="Rectangle 3"/>
           <p:cNvSpPr/>
           <p:nvPr/>
         </p:nvSpPr>
         <p:spPr>
           <a:xfrm>
-            <a:off x="0" y="0"/>
-            <a:ext cx="12191695" cy="6858000"/>
+            <a:off x="1371600" y="1828800"/>
+            <a:ext cx="2743200" cy="1828800"/>
           </a:xfrm>
           <a:prstGeom prst="rect">
             <a:avLst/>
           </a:prstGeom>
           <a:solidFill>
-            <a:srgbClr val="14161A"/>
+            <a:srgbClr val="1A1D22"/>
           </a:solidFill>
           <a:ln>
-            <a:noFill/>
+            <a:solidFill>
+              <a:srgbClr val="333840"/>
+            </a:solidFill>
           </a:ln>
         </p:spPr>
         <p:style>
@@ -6448,14 +6696,142 @@
       </p:sp>
       <p:sp>
         <p:nvSpPr>
-          <p:cNvPr id="3" name="TextBox 2"/>
+          <p:cNvPr id="5" name="Rounded Rectangle 4"/>
+          <p:cNvSpPr/>
+          <p:nvPr/>
+        </p:nvSpPr>
+        <p:spPr>
+          <a:xfrm rot="1200000">
+            <a:off x="914400" y="2560320"/>
+            <a:ext cx="1371600" cy="457200"/>
+          </a:xfrm>
+          <a:prstGeom prst="roundRect">
+            <a:avLst/>
+          </a:prstGeom>
+          <a:noFill/>
+          <a:ln w="38100">
+            <a:solidFill>
+              <a:srgbClr val="888888"/>
+            </a:solidFill>
+          </a:ln>
+        </p:spPr>
+        <p:style>
+          <a:lnRef idx="1">
+            <a:schemeClr val="accent1"/>
+          </a:lnRef>
+          <a:fillRef idx="3">
+            <a:schemeClr val="accent1"/>
+          </a:fillRef>
+          <a:effectRef idx="2">
+            <a:schemeClr val="accent1"/>
+          </a:effectRef>
+          <a:fontRef idx="minor">
+            <a:schemeClr val="lt1"/>
+          </a:fontRef>
+        </p:style>
+        <p:txBody>
+          <a:bodyPr rtlCol="0" anchor="ctr"/>
+          <a:lstStyle/>
+          <a:p>
+            <a:pPr algn="ctr"/>
+          </a:p>
+        </p:txBody>
+      </p:sp>
+      <p:sp>
+        <p:nvSpPr>
+          <p:cNvPr id="6" name="Rounded Rectangle 5"/>
+          <p:cNvSpPr/>
+          <p:nvPr/>
+        </p:nvSpPr>
+        <p:spPr>
+          <a:xfrm rot="20400000">
+            <a:off x="3200400" y="2560320"/>
+            <a:ext cx="1371600" cy="457200"/>
+          </a:xfrm>
+          <a:prstGeom prst="roundRect">
+            <a:avLst/>
+          </a:prstGeom>
+          <a:noFill/>
+          <a:ln w="38100">
+            <a:solidFill>
+              <a:srgbClr val="888888"/>
+            </a:solidFill>
+          </a:ln>
+        </p:spPr>
+        <p:style>
+          <a:lnRef idx="1">
+            <a:schemeClr val="accent1"/>
+          </a:lnRef>
+          <a:fillRef idx="3">
+            <a:schemeClr val="accent1"/>
+          </a:fillRef>
+          <a:effectRef idx="2">
+            <a:schemeClr val="accent1"/>
+          </a:effectRef>
+          <a:fontRef idx="minor">
+            <a:schemeClr val="lt1"/>
+          </a:fontRef>
+        </p:style>
+        <p:txBody>
+          <a:bodyPr rtlCol="0" anchor="ctr"/>
+          <a:lstStyle/>
+          <a:p>
+            <a:pPr algn="ctr"/>
+          </a:p>
+        </p:txBody>
+      </p:sp>
+      <p:sp>
+        <p:nvSpPr>
+          <p:cNvPr id="7" name="Rectangle 6"/>
+          <p:cNvSpPr/>
+          <p:nvPr/>
+        </p:nvSpPr>
+        <p:spPr>
+          <a:xfrm>
+            <a:off x="2377440" y="2286000"/>
+            <a:ext cx="731520" cy="914400"/>
+          </a:xfrm>
+          <a:prstGeom prst="rect">
+            <a:avLst/>
+          </a:prstGeom>
+          <a:ln w="50800">
+            <a:solidFill>
+              <a:srgbClr val="E53935"/>
+            </a:solidFill>
+          </a:ln>
+        </p:spPr>
+        <p:style>
+          <a:lnRef idx="1">
+            <a:schemeClr val="accent1"/>
+          </a:lnRef>
+          <a:fillRef idx="3">
+            <a:schemeClr val="accent1"/>
+          </a:fillRef>
+          <a:effectRef idx="2">
+            <a:schemeClr val="accent1"/>
+          </a:effectRef>
+          <a:fontRef idx="minor">
+            <a:schemeClr val="lt1"/>
+          </a:fontRef>
+        </p:style>
+        <p:txBody>
+          <a:bodyPr rtlCol="0" anchor="ctr"/>
+          <a:lstStyle/>
+          <a:p>
+            <a:pPr algn="ctr"/>
+          </a:p>
+        </p:txBody>
+      </p:sp>
+      <p:sp>
+        <p:nvSpPr>
+          <p:cNvPr id="8" name="TextBox 7"/>
           <p:cNvSpPr txBox="1"/>
           <p:nvPr/>
         </p:nvSpPr>
         <p:spPr>
           <a:xfrm>
-            <a:off x="457200" y="365760"/>
-            <a:ext cx="9144000" cy="731520"/>
+            <a:off x="4114800" y="1828800"/>
+            <a:ext cx="2286000" cy="1371600"/>
           </a:xfrm>
           <a:prstGeom prst="rect">
             <a:avLst/>
@@ -6468,96 +6844,8 @@
           </a:bodyPr>
           <a:lstStyle/>
           <a:p>
-            <a:r>
-              <a:rPr sz="3200" b="1">
-                <a:solidFill>
-                  <a:srgbClr val="FFFFFF"/>
-                </a:solidFill>
-                <a:latin typeface="Microsoft YaHei"/>
-              </a:rPr>
-              <a:t>高复杂度：效率反降 </a:t>
-            </a:r>
-            <a:r>
-              <a:rPr sz="3200" b="1">
-                <a:solidFill>
-                  <a:srgbClr val="E53935"/>
-                </a:solidFill>
-                <a:latin typeface="Microsoft YaHei"/>
-              </a:rPr>
-              <a:t>60%</a:t>
-            </a:r>
-            <a:r>
-              <a:rPr sz="3200" b="1">
-                <a:solidFill>
-                  <a:srgbClr val="FFFFFF"/>
-                </a:solidFill>
-                <a:latin typeface="Microsoft YaHei"/>
-              </a:rPr>
-              <a:t> 的修复陷阱</a:t>
-            </a:r>
-          </a:p>
-        </p:txBody>
-      </p:sp>
-      <p:sp>
-        <p:nvSpPr>
-          <p:cNvPr id="4" name="TextBox 3"/>
-          <p:cNvSpPr txBox="1"/>
-          <p:nvPr/>
-        </p:nvSpPr>
-        <p:spPr>
-          <a:xfrm>
-            <a:off x="457200" y="1005840"/>
-            <a:ext cx="9144000" cy="457200"/>
-          </a:xfrm>
-          <a:prstGeom prst="rect">
-            <a:avLst/>
-          </a:prstGeom>
-          <a:noFill/>
-        </p:spPr>
-        <p:txBody>
-          <a:bodyPr wrap="none">
-            <a:spAutoFit/>
-          </a:bodyPr>
-          <a:lstStyle/>
-          <a:p>
-            <a:pPr>
-              <a:defRPr sz="1800">
-                <a:solidFill>
-                  <a:srgbClr val="AAAAAA"/>
-                </a:solidFill>
-                <a:latin typeface="Microsoft YaHei"/>
-              </a:defRPr>
-            </a:pPr>
-            <a:r>
-              <a:t>案例C — 跨工厂 STO 报表（18+ 关联表）</a:t>
-            </a:r>
-          </a:p>
-        </p:txBody>
-      </p:sp>
-      <p:sp>
-        <p:nvSpPr>
-          <p:cNvPr id="5" name="TextBox 4"/>
-          <p:cNvSpPr txBox="1"/>
-          <p:nvPr/>
-        </p:nvSpPr>
-        <p:spPr>
-          <a:xfrm>
-            <a:off x="4114800" y="2011680"/>
-            <a:ext cx="2286000" cy="1371600"/>
-          </a:xfrm>
-          <a:prstGeom prst="rect">
-            <a:avLst/>
-          </a:prstGeom>
-          <a:noFill/>
-        </p:spPr>
-        <p:txBody>
-          <a:bodyPr wrap="none">
-            <a:spAutoFit/>
-          </a:bodyPr>
-          <a:lstStyle/>
-          <a:p>
             <a:pPr algn="ctr">
-              <a:defRPr sz="4800" b="1">
+              <a:defRPr sz="5400" b="1">
                 <a:solidFill>
                   <a:srgbClr val="E53935"/>
                 </a:solidFill>
@@ -6583,13 +6871,13 @@
       </p:sp>
       <p:sp>
         <p:nvSpPr>
-          <p:cNvPr id="6" name="Down Arrow 5"/>
+          <p:cNvPr id="9" name="Down Arrow 8"/>
           <p:cNvSpPr/>
           <p:nvPr/>
         </p:nvSpPr>
         <p:spPr>
           <a:xfrm rot="18900000">
-            <a:off x="5303520" y="3108960"/>
+            <a:off x="5303520" y="2926080"/>
             <a:ext cx="731520" cy="914400"/>
           </a:xfrm>
           <a:prstGeom prst="downArrow">
@@ -6626,24 +6914,24 @@
       </p:sp>
       <p:sp>
         <p:nvSpPr>
-          <p:cNvPr id="7" name="Rounded Rectangle 6"/>
+          <p:cNvPr id="10" name="Rounded Rectangle 9"/>
           <p:cNvSpPr/>
           <p:nvPr/>
         </p:nvSpPr>
         <p:spPr>
           <a:xfrm>
-            <a:off x="6858000" y="1645920"/>
-            <a:ext cx="4846320" cy="2011680"/>
+            <a:off x="6583680" y="1645920"/>
+            <a:ext cx="5120640" cy="2011680"/>
           </a:xfrm>
           <a:prstGeom prst="roundRect">
             <a:avLst/>
           </a:prstGeom>
           <a:solidFill>
-            <a:srgbClr val="2A2D35"/>
+            <a:srgbClr val="22262C"/>
           </a:solidFill>
           <a:ln>
             <a:solidFill>
-              <a:srgbClr val="555555"/>
+              <a:srgbClr val="3A4048"/>
             </a:solidFill>
           </a:ln>
         </p:spPr>
@@ -6671,14 +6959,14 @@
       </p:sp>
       <p:sp>
         <p:nvSpPr>
-          <p:cNvPr id="8" name="TextBox 7"/>
+          <p:cNvPr id="11" name="TextBox 10"/>
           <p:cNvSpPr txBox="1"/>
           <p:nvPr/>
         </p:nvSpPr>
         <p:spPr>
           <a:xfrm>
-            <a:off x="7040880" y="1828800"/>
-            <a:ext cx="1828800" cy="365760"/>
+            <a:off x="6766560" y="1828800"/>
+            <a:ext cx="1828800" cy="274320"/>
           </a:xfrm>
           <a:prstGeom prst="rect">
             <a:avLst/>
@@ -6692,7 +6980,7 @@
           <a:lstStyle/>
           <a:p>
             <a:pPr>
-              <a:defRPr sz="1400">
+              <a:defRPr sz="1200">
                 <a:solidFill>
                   <a:srgbClr val="FFFFFF"/>
                 </a:solidFill>
@@ -6706,23 +6994,25 @@
       </p:sp>
       <p:sp>
         <p:nvSpPr>
-          <p:cNvPr id="9" name="Rounded Rectangle 8"/>
+          <p:cNvPr id="12" name="Rounded Rectangle 11"/>
           <p:cNvSpPr/>
           <p:nvPr/>
         </p:nvSpPr>
         <p:spPr>
           <a:xfrm>
-            <a:off x="7132320" y="2194560"/>
-            <a:ext cx="4297680" cy="365760"/>
+            <a:off x="6858000" y="2194560"/>
+            <a:ext cx="4572000" cy="365760"/>
           </a:xfrm>
           <a:prstGeom prst="roundRect">
             <a:avLst/>
           </a:prstGeom>
           <a:solidFill>
-            <a:srgbClr val="9E1B22"/>
+            <a:srgbClr val="661111"/>
           </a:solidFill>
           <a:ln>
-            <a:noFill/>
+            <a:solidFill>
+              <a:srgbClr val="E53935"/>
+            </a:solidFill>
           </a:ln>
         </p:spPr>
         <p:style>
@@ -6743,99 +7033,38 @@
           <a:bodyPr rtlCol="0" anchor="ctr"/>
           <a:lstStyle/>
           <a:p>
-            <a:pPr algn="ctr"/>
-          </a:p>
-        </p:txBody>
-      </p:sp>
-      <p:sp>
-        <p:nvSpPr>
-          <p:cNvPr id="10" name="TextBox 9"/>
-          <p:cNvSpPr txBox="1"/>
-          <p:nvPr/>
-        </p:nvSpPr>
-        <p:spPr>
-          <a:xfrm>
-            <a:off x="8686800" y="2194560"/>
-            <a:ext cx="2560320" cy="365760"/>
-          </a:xfrm>
-          <a:prstGeom prst="rect">
+            <a:pPr algn="r">
+              <a:defRPr sz="1200">
+                <a:solidFill>
+                  <a:srgbClr val="FFFFFF"/>
+                </a:solidFill>
+              </a:defRPr>
+            </a:pPr>
+            <a:r>
+              <a:t>8 人天 (远超手写)</a:t>
+            </a:r>
+          </a:p>
+        </p:txBody>
+      </p:sp>
+      <p:sp>
+        <p:nvSpPr>
+          <p:cNvPr id="13" name="Oval 12"/>
+          <p:cNvSpPr/>
+          <p:nvPr/>
+        </p:nvSpPr>
+        <p:spPr>
+          <a:xfrm>
+            <a:off x="6949440" y="2286000"/>
+            <a:ext cx="182880" cy="182880"/>
+          </a:xfrm>
+          <a:prstGeom prst="ellipse">
             <a:avLst/>
           </a:prstGeom>
           <a:noFill/>
-        </p:spPr>
-        <p:txBody>
-          <a:bodyPr wrap="none">
-            <a:spAutoFit/>
-          </a:bodyPr>
-          <a:lstStyle/>
-          <a:p>
-            <a:pPr algn="r">
-              <a:defRPr sz="1200" b="1">
-                <a:solidFill>
-                  <a:srgbClr val="FFFFFF"/>
-                </a:solidFill>
-              </a:defRPr>
-            </a:pPr>
-            <a:r>
-              <a:t>8 人天 (远超手写)</a:t>
-            </a:r>
-          </a:p>
-        </p:txBody>
-      </p:sp>
-      <p:sp>
-        <p:nvSpPr>
-          <p:cNvPr id="11" name="TextBox 10"/>
-          <p:cNvSpPr txBox="1"/>
-          <p:nvPr/>
-        </p:nvSpPr>
-        <p:spPr>
-          <a:xfrm>
-            <a:off x="7040880" y="2651760"/>
-            <a:ext cx="1828800" cy="365760"/>
-          </a:xfrm>
-          <a:prstGeom prst="rect">
-            <a:avLst/>
-          </a:prstGeom>
-          <a:noFill/>
-        </p:spPr>
-        <p:txBody>
-          <a:bodyPr wrap="none">
-            <a:spAutoFit/>
-          </a:bodyPr>
-          <a:lstStyle/>
-          <a:p>
-            <a:pPr>
-              <a:defRPr sz="1400">
-                <a:solidFill>
-                  <a:srgbClr val="FFFFFF"/>
-                </a:solidFill>
-              </a:defRPr>
-            </a:pPr>
-            <a:r>
-              <a:t>手写开发</a:t>
-            </a:r>
-          </a:p>
-        </p:txBody>
-      </p:sp>
-      <p:sp>
-        <p:nvSpPr>
-          <p:cNvPr id="12" name="Rounded Rectangle 11"/>
-          <p:cNvSpPr/>
-          <p:nvPr/>
-        </p:nvSpPr>
-        <p:spPr>
-          <a:xfrm>
-            <a:off x="7132320" y="3017520"/>
-            <a:ext cx="2743200" cy="365760"/>
-          </a:xfrm>
-          <a:prstGeom prst="roundRect">
-            <a:avLst/>
-          </a:prstGeom>
-          <a:solidFill>
-            <a:srgbClr val="4A6278"/>
-          </a:solidFill>
-          <a:ln>
-            <a:noFill/>
+          <a:ln w="19050">
+            <a:solidFill>
+              <a:srgbClr val="FFFFFF"/>
+            </a:solidFill>
           </a:ln>
         </p:spPr>
         <p:style>
@@ -6862,59 +7091,21 @@
       </p:sp>
       <p:sp>
         <p:nvSpPr>
-          <p:cNvPr id="13" name="TextBox 12"/>
-          <p:cNvSpPr txBox="1"/>
-          <p:nvPr/>
-        </p:nvSpPr>
-        <p:spPr>
-          <a:xfrm>
-            <a:off x="8229600" y="3017520"/>
-            <a:ext cx="1463040" cy="365760"/>
-          </a:xfrm>
-          <a:prstGeom prst="rect">
-            <a:avLst/>
-          </a:prstGeom>
-          <a:noFill/>
-        </p:spPr>
-        <p:txBody>
-          <a:bodyPr wrap="none">
-            <a:spAutoFit/>
-          </a:bodyPr>
-          <a:lstStyle/>
-          <a:p>
-            <a:pPr algn="r">
-              <a:defRPr sz="1200" b="1">
-                <a:solidFill>
-                  <a:srgbClr val="FFFFFF"/>
-                </a:solidFill>
-              </a:defRPr>
-            </a:pPr>
-            <a:r>
-              <a:t>5 人天</a:t>
-            </a:r>
-          </a:p>
-        </p:txBody>
-      </p:sp>
-      <p:sp>
-        <p:nvSpPr>
-          <p:cNvPr id="14" name="Rounded Rectangle 13"/>
+          <p:cNvPr id="14" name="Rectangle 13"/>
           <p:cNvSpPr/>
           <p:nvPr/>
         </p:nvSpPr>
         <p:spPr>
           <a:xfrm>
-            <a:off x="457200" y="3931920"/>
-            <a:ext cx="5943600" cy="2560320"/>
-          </a:xfrm>
-          <a:prstGeom prst="roundRect">
-            <a:avLst/>
-          </a:prstGeom>
-          <a:solidFill>
-            <a:srgbClr val="1A1C22"/>
-          </a:solidFill>
+            <a:off x="7040880" y="2331720"/>
+            <a:ext cx="12700" cy="45720"/>
+          </a:xfrm>
+          <a:prstGeom prst="rect">
+            <a:avLst/>
+          </a:prstGeom>
           <a:ln>
             <a:solidFill>
-              <a:srgbClr val="555555"/>
+              <a:srgbClr val="FFFFFF"/>
             </a:solidFill>
           </a:ln>
         </p:spPr>
@@ -6940,136 +7131,58 @@
           </a:p>
         </p:txBody>
       </p:sp>
-      <p:cxnSp>
-        <p:nvCxnSpPr>
-          <p:cNvPr id="15" name="Connector 14"/>
-          <p:cNvCxnSpPr/>
-          <p:nvPr/>
-        </p:nvCxnSpPr>
-        <p:spPr>
-          <a:xfrm>
-            <a:off x="914400" y="4206240"/>
-            <a:ext cx="0" cy="1828800"/>
-          </a:xfrm>
-          <a:prstGeom prst="line">
+      <p:sp>
+        <p:nvSpPr>
+          <p:cNvPr id="15" name="Rectangle 14"/>
+          <p:cNvSpPr/>
+          <p:nvPr/>
+        </p:nvSpPr>
+        <p:spPr>
+          <a:xfrm>
+            <a:off x="7040880" y="2377440"/>
+            <a:ext cx="45720" cy="12700"/>
+          </a:xfrm>
+          <a:prstGeom prst="rect">
             <a:avLst/>
           </a:prstGeom>
           <a:ln>
             <a:solidFill>
-              <a:srgbClr val="888888"/>
+              <a:srgbClr val="FFFFFF"/>
             </a:solidFill>
           </a:ln>
         </p:spPr>
         <p:style>
-          <a:lnRef idx="2">
+          <a:lnRef idx="1">
             <a:schemeClr val="accent1"/>
           </a:lnRef>
-          <a:fillRef idx="0">
+          <a:fillRef idx="3">
             <a:schemeClr val="accent1"/>
           </a:fillRef>
-          <a:effectRef idx="1">
+          <a:effectRef idx="2">
             <a:schemeClr val="accent1"/>
           </a:effectRef>
           <a:fontRef idx="minor">
-            <a:schemeClr val="tx1"/>
+            <a:schemeClr val="lt1"/>
           </a:fontRef>
         </p:style>
-      </p:cxnSp>
-      <p:cxnSp>
-        <p:nvCxnSpPr>
-          <p:cNvPr id="16" name="Connector 15"/>
-          <p:cNvCxnSpPr/>
-          <p:nvPr/>
-        </p:nvCxnSpPr>
-        <p:spPr>
-          <a:xfrm>
-            <a:off x="914400" y="6035040"/>
-            <a:ext cx="2743200" cy="0"/>
-          </a:xfrm>
-          <a:prstGeom prst="line">
-            <a:avLst/>
-          </a:prstGeom>
-          <a:ln>
-            <a:solidFill>
-              <a:srgbClr val="888888"/>
-            </a:solidFill>
-          </a:ln>
-        </p:spPr>
-        <p:style>
-          <a:lnRef idx="2">
-            <a:schemeClr val="accent1"/>
-          </a:lnRef>
-          <a:fillRef idx="0">
-            <a:schemeClr val="accent1"/>
-          </a:fillRef>
-          <a:effectRef idx="1">
-            <a:schemeClr val="accent1"/>
-          </a:effectRef>
-          <a:fontRef idx="minor">
-            <a:schemeClr val="tx1"/>
-          </a:fontRef>
-        </p:style>
-      </p:cxnSp>
-      <p:sp>
-        <p:nvSpPr>
-          <p:cNvPr id="17" name="TextBox 16"/>
+        <p:txBody>
+          <a:bodyPr rtlCol="0" anchor="ctr"/>
+          <a:lstStyle/>
+          <a:p>
+            <a:pPr algn="ctr"/>
+          </a:p>
+        </p:txBody>
+      </p:sp>
+      <p:sp>
+        <p:nvSpPr>
+          <p:cNvPr id="16" name="TextBox 15"/>
           <p:cNvSpPr txBox="1"/>
           <p:nvPr/>
         </p:nvSpPr>
         <p:spPr>
           <a:xfrm>
-            <a:off x="457200" y="4389120"/>
-            <a:ext cx="365760" cy="1371600"/>
-          </a:xfrm>
-          <a:prstGeom prst="rect">
-            <a:avLst/>
-          </a:prstGeom>
-          <a:noFill/>
-        </p:spPr>
-        <p:txBody>
-          <a:bodyPr wrap="square">
-            <a:spAutoFit/>
-          </a:bodyPr>
-          <a:lstStyle/>
-          <a:p>
-            <a:pPr algn="ctr">
-              <a:defRPr sz="1000">
-                <a:solidFill>
-                  <a:srgbClr val="AAAAAA"/>
-                </a:solidFill>
-              </a:defRPr>
-            </a:pPr>
-            <a:r>
-              <a:t>错</a:t>
-            </a:r>
-          </a:p>
-          <a:p>
-            <a:r>
-              <a:t>误</a:t>
-            </a:r>
-          </a:p>
-          <a:p>
-            <a:r>
-              <a:t>数</a:t>
-            </a:r>
-          </a:p>
-          <a:p>
-            <a:r>
-              <a:t>量</a:t>
-            </a:r>
-          </a:p>
-        </p:txBody>
-      </p:sp>
-      <p:sp>
-        <p:nvSpPr>
-          <p:cNvPr id="18" name="TextBox 17"/>
-          <p:cNvSpPr txBox="1"/>
-          <p:nvPr/>
-        </p:nvSpPr>
-        <p:spPr>
-          <a:xfrm>
-            <a:off x="2926080" y="6126480"/>
-            <a:ext cx="914400" cy="365760"/>
+            <a:off x="6766560" y="2743200"/>
+            <a:ext cx="1828800" cy="274320"/>
           </a:xfrm>
           <a:prstGeom prst="rect">
             <a:avLst/>
@@ -7083,30 +7196,425 @@
           <a:lstStyle/>
           <a:p>
             <a:pPr>
+              <a:defRPr sz="1200">
+                <a:solidFill>
+                  <a:srgbClr val="FFFFFF"/>
+                </a:solidFill>
+              </a:defRPr>
+            </a:pPr>
+            <a:r>
+              <a:t>手写开发</a:t>
+            </a:r>
+          </a:p>
+        </p:txBody>
+      </p:sp>
+      <p:sp>
+        <p:nvSpPr>
+          <p:cNvPr id="17" name="Rounded Rectangle 16"/>
+          <p:cNvSpPr/>
+          <p:nvPr/>
+        </p:nvSpPr>
+        <p:spPr>
+          <a:xfrm>
+            <a:off x="6858000" y="3108960"/>
+            <a:ext cx="2834640" cy="365760"/>
+          </a:xfrm>
+          <a:prstGeom prst="roundRect">
+            <a:avLst/>
+          </a:prstGeom>
+          <a:solidFill>
+            <a:srgbClr val="3A5060"/>
+          </a:solidFill>
+          <a:ln>
+            <a:noFill/>
+          </a:ln>
+        </p:spPr>
+        <p:style>
+          <a:lnRef idx="1">
+            <a:schemeClr val="accent1"/>
+          </a:lnRef>
+          <a:fillRef idx="3">
+            <a:schemeClr val="accent1"/>
+          </a:fillRef>
+          <a:effectRef idx="2">
+            <a:schemeClr val="accent1"/>
+          </a:effectRef>
+          <a:fontRef idx="minor">
+            <a:schemeClr val="lt1"/>
+          </a:fontRef>
+        </p:style>
+        <p:txBody>
+          <a:bodyPr rtlCol="0" anchor="ctr"/>
+          <a:lstStyle/>
+          <a:p>
+            <a:pPr algn="r">
+              <a:defRPr sz="1200">
+                <a:solidFill>
+                  <a:srgbClr val="FFFFFF"/>
+                </a:solidFill>
+              </a:defRPr>
+            </a:pPr>
+            <a:r>
+              <a:t>5 人天</a:t>
+            </a:r>
+          </a:p>
+        </p:txBody>
+      </p:sp>
+      <p:sp>
+        <p:nvSpPr>
+          <p:cNvPr id="18" name="Rectangle 17"/>
+          <p:cNvSpPr/>
+          <p:nvPr/>
+        </p:nvSpPr>
+        <p:spPr>
+          <a:xfrm>
+            <a:off x="6949440" y="3200400"/>
+            <a:ext cx="137160" cy="182880"/>
+          </a:xfrm>
+          <a:prstGeom prst="rect">
+            <a:avLst/>
+          </a:prstGeom>
+          <a:solidFill>
+            <a:srgbClr val="FFFFFF"/>
+          </a:solidFill>
+          <a:ln>
+            <a:noFill/>
+          </a:ln>
+        </p:spPr>
+        <p:style>
+          <a:lnRef idx="1">
+            <a:schemeClr val="accent1"/>
+          </a:lnRef>
+          <a:fillRef idx="3">
+            <a:schemeClr val="accent1"/>
+          </a:fillRef>
+          <a:effectRef idx="2">
+            <a:schemeClr val="accent1"/>
+          </a:effectRef>
+          <a:fontRef idx="minor">
+            <a:schemeClr val="lt1"/>
+          </a:fontRef>
+        </p:style>
+        <p:txBody>
+          <a:bodyPr rtlCol="0" anchor="ctr"/>
+          <a:lstStyle/>
+          <a:p>
+            <a:pPr algn="ctr"/>
+          </a:p>
+        </p:txBody>
+      </p:sp>
+      <p:sp>
+        <p:nvSpPr>
+          <p:cNvPr id="19" name="Rounded Rectangle 18"/>
+          <p:cNvSpPr/>
+          <p:nvPr/>
+        </p:nvSpPr>
+        <p:spPr>
+          <a:xfrm>
+            <a:off x="457200" y="3931920"/>
+            <a:ext cx="5943600" cy="2560320"/>
+          </a:xfrm>
+          <a:prstGeom prst="roundRect">
+            <a:avLst/>
+          </a:prstGeom>
+          <a:solidFill>
+            <a:srgbClr val="1A1E24"/>
+          </a:solidFill>
+          <a:ln>
+            <a:solidFill>
+              <a:srgbClr val="333840"/>
+            </a:solidFill>
+          </a:ln>
+        </p:spPr>
+        <p:style>
+          <a:lnRef idx="1">
+            <a:schemeClr val="accent1"/>
+          </a:lnRef>
+          <a:fillRef idx="3">
+            <a:schemeClr val="accent1"/>
+          </a:fillRef>
+          <a:effectRef idx="2">
+            <a:schemeClr val="accent1"/>
+          </a:effectRef>
+          <a:fontRef idx="minor">
+            <a:schemeClr val="lt1"/>
+          </a:fontRef>
+        </p:style>
+        <p:txBody>
+          <a:bodyPr rtlCol="0" anchor="ctr"/>
+          <a:lstStyle/>
+          <a:p>
+            <a:pPr algn="ctr"/>
+          </a:p>
+        </p:txBody>
+      </p:sp>
+      <p:sp>
+        <p:nvSpPr>
+          <p:cNvPr id="20" name="Rectangle 19"/>
+          <p:cNvSpPr/>
+          <p:nvPr/>
+        </p:nvSpPr>
+        <p:spPr>
+          <a:xfrm>
+            <a:off x="914400" y="4206240"/>
+            <a:ext cx="12700" cy="1828800"/>
+          </a:xfrm>
+          <a:prstGeom prst="rect">
+            <a:avLst/>
+          </a:prstGeom>
+          <a:ln>
+            <a:solidFill>
+              <a:srgbClr val="666666"/>
+            </a:solidFill>
+          </a:ln>
+        </p:spPr>
+        <p:style>
+          <a:lnRef idx="1">
+            <a:schemeClr val="accent1"/>
+          </a:lnRef>
+          <a:fillRef idx="3">
+            <a:schemeClr val="accent1"/>
+          </a:fillRef>
+          <a:effectRef idx="2">
+            <a:schemeClr val="accent1"/>
+          </a:effectRef>
+          <a:fontRef idx="minor">
+            <a:schemeClr val="lt1"/>
+          </a:fontRef>
+        </p:style>
+        <p:txBody>
+          <a:bodyPr rtlCol="0" anchor="ctr"/>
+          <a:lstStyle/>
+          <a:p>
+            <a:pPr algn="ctr"/>
+          </a:p>
+        </p:txBody>
+      </p:sp>
+      <p:sp>
+        <p:nvSpPr>
+          <p:cNvPr id="21" name="Rectangle 20"/>
+          <p:cNvSpPr/>
+          <p:nvPr/>
+        </p:nvSpPr>
+        <p:spPr>
+          <a:xfrm>
+            <a:off x="914400" y="6035040"/>
+            <a:ext cx="2743200" cy="12700"/>
+          </a:xfrm>
+          <a:prstGeom prst="rect">
+            <a:avLst/>
+          </a:prstGeom>
+          <a:ln>
+            <a:solidFill>
+              <a:srgbClr val="666666"/>
+            </a:solidFill>
+          </a:ln>
+        </p:spPr>
+        <p:style>
+          <a:lnRef idx="1">
+            <a:schemeClr val="accent1"/>
+          </a:lnRef>
+          <a:fillRef idx="3">
+            <a:schemeClr val="accent1"/>
+          </a:fillRef>
+          <a:effectRef idx="2">
+            <a:schemeClr val="accent1"/>
+          </a:effectRef>
+          <a:fontRef idx="minor">
+            <a:schemeClr val="lt1"/>
+          </a:fontRef>
+        </p:style>
+        <p:txBody>
+          <a:bodyPr rtlCol="0" anchor="ctr"/>
+          <a:lstStyle/>
+          <a:p>
+            <a:pPr algn="ctr"/>
+          </a:p>
+        </p:txBody>
+      </p:sp>
+      <p:sp>
+        <p:nvSpPr>
+          <p:cNvPr id="22" name="Isosceles Triangle 21"/>
+          <p:cNvSpPr/>
+          <p:nvPr/>
+        </p:nvSpPr>
+        <p:spPr>
+          <a:xfrm>
+            <a:off x="868680" y="4114800"/>
+            <a:ext cx="91440" cy="137160"/>
+          </a:xfrm>
+          <a:prstGeom prst="triangle">
+            <a:avLst/>
+          </a:prstGeom>
+          <a:solidFill>
+            <a:srgbClr val="666666"/>
+          </a:solidFill>
+          <a:ln>
+            <a:noFill/>
+          </a:ln>
+        </p:spPr>
+        <p:style>
+          <a:lnRef idx="1">
+            <a:schemeClr val="accent1"/>
+          </a:lnRef>
+          <a:fillRef idx="3">
+            <a:schemeClr val="accent1"/>
+          </a:fillRef>
+          <a:effectRef idx="2">
+            <a:schemeClr val="accent1"/>
+          </a:effectRef>
+          <a:fontRef idx="minor">
+            <a:schemeClr val="lt1"/>
+          </a:fontRef>
+        </p:style>
+        <p:txBody>
+          <a:bodyPr rtlCol="0" anchor="ctr"/>
+          <a:lstStyle/>
+          <a:p>
+            <a:pPr algn="ctr"/>
+          </a:p>
+        </p:txBody>
+      </p:sp>
+      <p:sp>
+        <p:nvSpPr>
+          <p:cNvPr id="23" name="Isosceles Triangle 22"/>
+          <p:cNvSpPr/>
+          <p:nvPr/>
+        </p:nvSpPr>
+        <p:spPr>
+          <a:xfrm rot="5400000">
+            <a:off x="3657600" y="5989320"/>
+            <a:ext cx="137160" cy="91440"/>
+          </a:xfrm>
+          <a:prstGeom prst="triangle">
+            <a:avLst/>
+          </a:prstGeom>
+          <a:solidFill>
+            <a:srgbClr val="666666"/>
+          </a:solidFill>
+          <a:ln>
+            <a:noFill/>
+          </a:ln>
+        </p:spPr>
+        <p:style>
+          <a:lnRef idx="1">
+            <a:schemeClr val="accent1"/>
+          </a:lnRef>
+          <a:fillRef idx="3">
+            <a:schemeClr val="accent1"/>
+          </a:fillRef>
+          <a:effectRef idx="2">
+            <a:schemeClr val="accent1"/>
+          </a:effectRef>
+          <a:fontRef idx="minor">
+            <a:schemeClr val="lt1"/>
+          </a:fontRef>
+        </p:style>
+        <p:txBody>
+          <a:bodyPr rtlCol="0" anchor="ctr"/>
+          <a:lstStyle/>
+          <a:p>
+            <a:pPr algn="ctr"/>
+          </a:p>
+        </p:txBody>
+      </p:sp>
+      <p:sp>
+        <p:nvSpPr>
+          <p:cNvPr id="24" name="TextBox 23"/>
+          <p:cNvSpPr txBox="1"/>
+          <p:nvPr/>
+        </p:nvSpPr>
+        <p:spPr>
+          <a:xfrm>
+            <a:off x="457200" y="4389120"/>
+            <a:ext cx="457200" cy="1371600"/>
+          </a:xfrm>
+          <a:prstGeom prst="rect">
+            <a:avLst/>
+          </a:prstGeom>
+          <a:noFill/>
+        </p:spPr>
+        <p:txBody>
+          <a:bodyPr wrap="none">
+            <a:spAutoFit/>
+          </a:bodyPr>
+          <a:lstStyle/>
+          <a:p>
+            <a:pPr>
               <a:defRPr sz="1000">
                 <a:solidFill>
-                  <a:srgbClr val="AAAAAA"/>
+                  <a:srgbClr val="888888"/>
                 </a:solidFill>
               </a:defRPr>
             </a:pPr>
             <a:r>
+              <a:t>错</a:t>
+            </a:r>
+          </a:p>
+          <a:p>
+            <a:r>
+              <a:t>误</a:t>
+            </a:r>
+          </a:p>
+          <a:p>
+            <a:r>
+              <a:t>数</a:t>
+            </a:r>
+          </a:p>
+          <a:p>
+            <a:r>
+              <a:t>量</a:t>
+            </a:r>
+          </a:p>
+        </p:txBody>
+      </p:sp>
+      <p:sp>
+        <p:nvSpPr>
+          <p:cNvPr id="25" name="TextBox 24"/>
+          <p:cNvSpPr txBox="1"/>
+          <p:nvPr/>
+        </p:nvSpPr>
+        <p:spPr>
+          <a:xfrm>
+            <a:off x="2743200" y="6126480"/>
+            <a:ext cx="914400" cy="365760"/>
+          </a:xfrm>
+          <a:prstGeom prst="rect">
+            <a:avLst/>
+          </a:prstGeom>
+          <a:noFill/>
+        </p:spPr>
+        <p:txBody>
+          <a:bodyPr wrap="none">
+            <a:spAutoFit/>
+          </a:bodyPr>
+          <a:lstStyle/>
+          <a:p>
+            <a:pPr>
+              <a:defRPr sz="1000">
+                <a:solidFill>
+                  <a:srgbClr val="888888"/>
+                </a:solidFill>
+              </a:defRPr>
+            </a:pPr>
+            <a:r>
               <a:t>修复迭代</a:t>
             </a:r>
           </a:p>
         </p:txBody>
       </p:sp>
-      <p:cxnSp>
-        <p:nvCxnSpPr>
-          <p:cNvPr id="19" name="Connector 18"/>
-          <p:cNvCxnSpPr/>
-          <p:nvPr/>
-        </p:nvCxnSpPr>
+      <p:sp>
+        <p:nvSpPr>
+          <p:cNvPr id="26" name="Rectangle 25"/>
+          <p:cNvSpPr/>
+          <p:nvPr/>
+        </p:nvSpPr>
         <p:spPr>
           <a:xfrm>
             <a:off x="1280160" y="5577840"/>
             <a:ext cx="822960" cy="182880"/>
           </a:xfrm>
-          <a:prstGeom prst="line">
+          <a:prstGeom prst="rect">
             <a:avLst/>
           </a:prstGeom>
           <a:ln w="25400">
@@ -7116,32 +7624,39 @@
           </a:ln>
         </p:spPr>
         <p:style>
-          <a:lnRef idx="2">
+          <a:lnRef idx="1">
             <a:schemeClr val="accent1"/>
           </a:lnRef>
-          <a:fillRef idx="0">
+          <a:fillRef idx="3">
             <a:schemeClr val="accent1"/>
           </a:fillRef>
-          <a:effectRef idx="1">
+          <a:effectRef idx="2">
             <a:schemeClr val="accent1"/>
           </a:effectRef>
           <a:fontRef idx="minor">
-            <a:schemeClr val="tx1"/>
+            <a:schemeClr val="lt1"/>
           </a:fontRef>
         </p:style>
-      </p:cxnSp>
-      <p:cxnSp>
-        <p:nvCxnSpPr>
-          <p:cNvPr id="20" name="Connector 19"/>
-          <p:cNvCxnSpPr/>
-          <p:nvPr/>
-        </p:nvCxnSpPr>
-        <p:spPr>
-          <a:xfrm flipV="1">
+        <p:txBody>
+          <a:bodyPr rtlCol="0" anchor="ctr"/>
+          <a:lstStyle/>
+          <a:p>
+            <a:pPr algn="ctr"/>
+          </a:p>
+        </p:txBody>
+      </p:sp>
+      <p:sp>
+        <p:nvSpPr>
+          <p:cNvPr id="27" name="Rectangle 26"/>
+          <p:cNvSpPr/>
+          <p:nvPr/>
+        </p:nvSpPr>
+        <p:spPr>
+          <a:xfrm>
             <a:off x="2103120" y="4572000"/>
             <a:ext cx="1097280" cy="1188720"/>
           </a:xfrm>
-          <a:prstGeom prst="line">
+          <a:prstGeom prst="rect">
             <a:avLst/>
           </a:prstGeom>
           <a:ln w="25400">
@@ -7151,44 +7666,6 @@
           </a:ln>
         </p:spPr>
         <p:style>
-          <a:lnRef idx="2">
-            <a:schemeClr val="accent1"/>
-          </a:lnRef>
-          <a:fillRef idx="0">
-            <a:schemeClr val="accent1"/>
-          </a:fillRef>
-          <a:effectRef idx="1">
-            <a:schemeClr val="accent1"/>
-          </a:effectRef>
-          <a:fontRef idx="minor">
-            <a:schemeClr val="tx1"/>
-          </a:fontRef>
-        </p:style>
-      </p:cxnSp>
-      <p:sp>
-        <p:nvSpPr>
-          <p:cNvPr id="21" name="Oval 20"/>
-          <p:cNvSpPr/>
-          <p:nvPr/>
-        </p:nvSpPr>
-        <p:spPr>
-          <a:xfrm>
-            <a:off x="1234440" y="5532120"/>
-            <a:ext cx="91440" cy="91440"/>
-          </a:xfrm>
-          <a:prstGeom prst="ellipse">
-            <a:avLst/>
-          </a:prstGeom>
-          <a:solidFill>
-            <a:srgbClr val="FFFFFF"/>
-          </a:solidFill>
-          <a:ln w="19050">
-            <a:solidFill>
-              <a:srgbClr val="E53935"/>
-            </a:solidFill>
-          </a:ln>
-        </p:spPr>
-        <p:style>
           <a:lnRef idx="1">
             <a:schemeClr val="accent1"/>
           </a:lnRef>
@@ -7212,246 +7689,16 @@
       </p:sp>
       <p:sp>
         <p:nvSpPr>
-          <p:cNvPr id="22" name="Oval 21"/>
+          <p:cNvPr id="28" name="Oval 27"/>
           <p:cNvSpPr/>
           <p:nvPr/>
         </p:nvSpPr>
         <p:spPr>
           <a:xfrm>
-            <a:off x="2057400" y="5715000"/>
+            <a:off x="1234439" y="5532120"/>
             <a:ext cx="91440" cy="91440"/>
           </a:xfrm>
           <a:prstGeom prst="ellipse">
-            <a:avLst/>
-          </a:prstGeom>
-          <a:solidFill>
-            <a:srgbClr val="FFFFFF"/>
-          </a:solidFill>
-          <a:ln w="19050">
-            <a:solidFill>
-              <a:srgbClr val="E53935"/>
-            </a:solidFill>
-          </a:ln>
-        </p:spPr>
-        <p:style>
-          <a:lnRef idx="1">
-            <a:schemeClr val="accent1"/>
-          </a:lnRef>
-          <a:fillRef idx="3">
-            <a:schemeClr val="accent1"/>
-          </a:fillRef>
-          <a:effectRef idx="2">
-            <a:schemeClr val="accent1"/>
-          </a:effectRef>
-          <a:fontRef idx="minor">
-            <a:schemeClr val="lt1"/>
-          </a:fontRef>
-        </p:style>
-        <p:txBody>
-          <a:bodyPr rtlCol="0" anchor="ctr"/>
-          <a:lstStyle/>
-          <a:p>
-            <a:pPr algn="ctr"/>
-          </a:p>
-        </p:txBody>
-      </p:sp>
-      <p:sp>
-        <p:nvSpPr>
-          <p:cNvPr id="23" name="Oval 22"/>
-          <p:cNvSpPr/>
-          <p:nvPr/>
-        </p:nvSpPr>
-        <p:spPr>
-          <a:xfrm>
-            <a:off x="3154680" y="4526280"/>
-            <a:ext cx="91440" cy="91440"/>
-          </a:xfrm>
-          <a:prstGeom prst="ellipse">
-            <a:avLst/>
-          </a:prstGeom>
-          <a:solidFill>
-            <a:srgbClr val="FFFFFF"/>
-          </a:solidFill>
-          <a:ln w="19050">
-            <a:solidFill>
-              <a:srgbClr val="E53935"/>
-            </a:solidFill>
-          </a:ln>
-        </p:spPr>
-        <p:style>
-          <a:lnRef idx="1">
-            <a:schemeClr val="accent1"/>
-          </a:lnRef>
-          <a:fillRef idx="3">
-            <a:schemeClr val="accent1"/>
-          </a:fillRef>
-          <a:effectRef idx="2">
-            <a:schemeClr val="accent1"/>
-          </a:effectRef>
-          <a:fontRef idx="minor">
-            <a:schemeClr val="lt1"/>
-          </a:fontRef>
-        </p:style>
-        <p:txBody>
-          <a:bodyPr rtlCol="0" anchor="ctr"/>
-          <a:lstStyle/>
-          <a:p>
-            <a:pPr algn="ctr"/>
-          </a:p>
-        </p:txBody>
-      </p:sp>
-      <p:sp>
-        <p:nvSpPr>
-          <p:cNvPr id="24" name="TextBox 23"/>
-          <p:cNvSpPr txBox="1"/>
-          <p:nvPr/>
-        </p:nvSpPr>
-        <p:spPr>
-          <a:xfrm>
-            <a:off x="1097280" y="5303520"/>
-            <a:ext cx="365760" cy="274320"/>
-          </a:xfrm>
-          <a:prstGeom prst="rect">
-            <a:avLst/>
-          </a:prstGeom>
-          <a:noFill/>
-        </p:spPr>
-        <p:txBody>
-          <a:bodyPr wrap="none">
-            <a:spAutoFit/>
-          </a:bodyPr>
-          <a:lstStyle/>
-          <a:p>
-            <a:pPr>
-              <a:defRPr>
-                <a:solidFill>
-                  <a:srgbClr val="FFFFFF"/>
-                </a:solidFill>
-              </a:defRPr>
-            </a:pPr>
-            <a:r>
-              <a:t>3</a:t>
-            </a:r>
-          </a:p>
-        </p:txBody>
-      </p:sp>
-      <p:sp>
-        <p:nvSpPr>
-          <p:cNvPr id="25" name="TextBox 24"/>
-          <p:cNvSpPr txBox="1"/>
-          <p:nvPr/>
-        </p:nvSpPr>
-        <p:spPr>
-          <a:xfrm>
-            <a:off x="1920240" y="5486400"/>
-            <a:ext cx="365760" cy="274320"/>
-          </a:xfrm>
-          <a:prstGeom prst="rect">
-            <a:avLst/>
-          </a:prstGeom>
-          <a:noFill/>
-        </p:spPr>
-        <p:txBody>
-          <a:bodyPr wrap="none">
-            <a:spAutoFit/>
-          </a:bodyPr>
-          <a:lstStyle/>
-          <a:p>
-            <a:pPr>
-              <a:defRPr>
-                <a:solidFill>
-                  <a:srgbClr val="FFFFFF"/>
-                </a:solidFill>
-              </a:defRPr>
-            </a:pPr>
-            <a:r>
-              <a:t>2</a:t>
-            </a:r>
-          </a:p>
-        </p:txBody>
-      </p:sp>
-      <p:sp>
-        <p:nvSpPr>
-          <p:cNvPr id="26" name="TextBox 25"/>
-          <p:cNvSpPr txBox="1"/>
-          <p:nvPr/>
-        </p:nvSpPr>
-        <p:spPr>
-          <a:xfrm>
-            <a:off x="3108960" y="4297680"/>
-            <a:ext cx="365760" cy="274320"/>
-          </a:xfrm>
-          <a:prstGeom prst="rect">
-            <a:avLst/>
-          </a:prstGeom>
-          <a:noFill/>
-        </p:spPr>
-        <p:txBody>
-          <a:bodyPr wrap="none">
-            <a:spAutoFit/>
-          </a:bodyPr>
-          <a:lstStyle/>
-          <a:p>
-            <a:pPr>
-              <a:defRPr>
-                <a:solidFill>
-                  <a:srgbClr val="FFFFFF"/>
-                </a:solidFill>
-              </a:defRPr>
-            </a:pPr>
-            <a:r>
-              <a:t>9</a:t>
-            </a:r>
-          </a:p>
-        </p:txBody>
-      </p:sp>
-      <p:sp>
-        <p:nvSpPr>
-          <p:cNvPr id="27" name="TextBox 26"/>
-          <p:cNvSpPr txBox="1"/>
-          <p:nvPr/>
-        </p:nvSpPr>
-        <p:spPr>
-          <a:xfrm rot="19500000">
-            <a:off x="2194560" y="4937760"/>
-            <a:ext cx="914400" cy="274320"/>
-          </a:xfrm>
-          <a:prstGeom prst="rect">
-            <a:avLst/>
-          </a:prstGeom>
-          <a:noFill/>
-        </p:spPr>
-        <p:txBody>
-          <a:bodyPr wrap="none">
-            <a:spAutoFit/>
-          </a:bodyPr>
-          <a:lstStyle/>
-          <a:p>
-            <a:pPr>
-              <a:defRPr sz="1000">
-                <a:solidFill>
-                  <a:srgbClr val="FFFFFF"/>
-                </a:solidFill>
-              </a:defRPr>
-            </a:pPr>
-            <a:r>
-              <a:t>3→2→9</a:t>
-            </a:r>
-          </a:p>
-        </p:txBody>
-      </p:sp>
-      <p:sp>
-        <p:nvSpPr>
-          <p:cNvPr id="28" name="Isosceles Triangle 27"/>
-          <p:cNvSpPr/>
-          <p:nvPr/>
-        </p:nvSpPr>
-        <p:spPr>
-          <a:xfrm>
-            <a:off x="3840480" y="4389120"/>
-            <a:ext cx="274320" cy="274320"/>
-          </a:xfrm>
-          <a:prstGeom prst="triangle">
             <a:avLst/>
           </a:prstGeom>
           <a:solidFill>
@@ -7491,7 +7738,7 @@
         </p:nvSpPr>
         <p:spPr>
           <a:xfrm>
-            <a:off x="3794760" y="4389120"/>
+            <a:off x="1097280" y="5257800"/>
             <a:ext cx="365760" cy="274320"/>
           </a:xfrm>
           <a:prstGeom prst="rect">
@@ -7506,115 +7753,34 @@
           <a:lstStyle/>
           <a:p>
             <a:pPr algn="ctr">
-              <a:defRPr b="1">
+              <a:defRPr sz="1200">
                 <a:solidFill>
                   <a:srgbClr val="FFFFFF"/>
                 </a:solidFill>
               </a:defRPr>
             </a:pPr>
             <a:r>
-              <a:t>!</a:t>
-            </a:r>
-          </a:p>
-        </p:txBody>
-      </p:sp>
-      <p:sp>
-        <p:nvSpPr>
-          <p:cNvPr id="30" name="TextBox 29"/>
-          <p:cNvSpPr txBox="1"/>
-          <p:nvPr/>
-        </p:nvSpPr>
-        <p:spPr>
-          <a:xfrm>
-            <a:off x="4206240" y="4343400"/>
-            <a:ext cx="1828800" cy="365760"/>
-          </a:xfrm>
-          <a:prstGeom prst="rect">
-            <a:avLst/>
-          </a:prstGeom>
-          <a:noFill/>
-        </p:spPr>
-        <p:txBody>
-          <a:bodyPr wrap="none">
-            <a:spAutoFit/>
-          </a:bodyPr>
-          <a:lstStyle/>
-          <a:p>
-            <a:pPr>
-              <a:defRPr sz="1600" b="1">
-                <a:solidFill>
-                  <a:srgbClr val="FFFFFF"/>
-                </a:solidFill>
-              </a:defRPr>
-            </a:pPr>
-            <a:r>
-              <a:t>修复爆炸</a:t>
-            </a:r>
-          </a:p>
-        </p:txBody>
-      </p:sp>
-      <p:sp>
-        <p:nvSpPr>
-          <p:cNvPr id="31" name="TextBox 30"/>
-          <p:cNvSpPr txBox="1"/>
-          <p:nvPr/>
-        </p:nvSpPr>
-        <p:spPr>
-          <a:xfrm>
-            <a:off x="3840480" y="4846320"/>
-            <a:ext cx="2377440" cy="1371600"/>
-          </a:xfrm>
-          <a:prstGeom prst="rect">
-            <a:avLst/>
-          </a:prstGeom>
-          <a:noFill/>
-        </p:spPr>
-        <p:txBody>
-          <a:bodyPr wrap="square">
-            <a:spAutoFit/>
-          </a:bodyPr>
-          <a:lstStyle/>
-          <a:p>
-            <a:pPr>
-              <a:defRPr sz="1200">
-                <a:solidFill>
-                  <a:srgbClr val="CCCCCC"/>
-                </a:solidFill>
-              </a:defRPr>
-            </a:pPr>
-            <a:r>
-              <a:t>错误呈 </a:t>
-            </a:r>
-            <a:r>
-              <a:rPr>
-                <a:solidFill>
-                  <a:srgbClr val="E53935"/>
-                </a:solidFill>
-              </a:rPr>
-              <a:t>3→2→9</a:t>
-            </a:r>
-            <a:r>
-              <a:t> 非线性增长，前序修正引发后续逻辑大规模崩溃</a:t>
-            </a:r>
-          </a:p>
-        </p:txBody>
-      </p:sp>
-      <p:sp>
-        <p:nvSpPr>
-          <p:cNvPr id="32" name="Rounded Rectangle 31"/>
+              <a:t>3</a:t>
+            </a:r>
+          </a:p>
+        </p:txBody>
+      </p:sp>
+      <p:sp>
+        <p:nvSpPr>
+          <p:cNvPr id="30" name="Oval 29"/>
           <p:cNvSpPr/>
           <p:nvPr/>
         </p:nvSpPr>
         <p:spPr>
           <a:xfrm>
-            <a:off x="6858000" y="4114800"/>
-            <a:ext cx="731520" cy="731520"/>
-          </a:xfrm>
-          <a:prstGeom prst="roundRect">
+            <a:off x="2057400" y="5715000"/>
+            <a:ext cx="91440" cy="91440"/>
+          </a:xfrm>
+          <a:prstGeom prst="ellipse">
             <a:avLst/>
           </a:prstGeom>
           <a:solidFill>
-            <a:srgbClr val="333333"/>
+            <a:srgbClr val="E53935"/>
           </a:solidFill>
           <a:ln>
             <a:noFill/>
@@ -7644,14 +7810,14 @@
       </p:sp>
       <p:sp>
         <p:nvSpPr>
-          <p:cNvPr id="33" name="TextBox 32"/>
+          <p:cNvPr id="31" name="TextBox 30"/>
           <p:cNvSpPr txBox="1"/>
           <p:nvPr/>
         </p:nvSpPr>
         <p:spPr>
           <a:xfrm>
-            <a:off x="7772400" y="4023360"/>
-            <a:ext cx="3657600" cy="365760"/>
+            <a:off x="1920239" y="5440680"/>
+            <a:ext cx="365760" cy="274320"/>
           </a:xfrm>
           <a:prstGeom prst="rect">
             <a:avLst/>
@@ -7664,117 +7830,35 @@
           </a:bodyPr>
           <a:lstStyle/>
           <a:p>
-            <a:pPr>
-              <a:defRPr sz="1600" b="1">
+            <a:pPr algn="ctr">
+              <a:defRPr sz="1200">
                 <a:solidFill>
                   <a:srgbClr val="FFFFFF"/>
                 </a:solidFill>
               </a:defRPr>
             </a:pPr>
             <a:r>
-              <a:t>解析能力</a:t>
-            </a:r>
-          </a:p>
-        </p:txBody>
-      </p:sp>
-      <p:sp>
-        <p:nvSpPr>
-          <p:cNvPr id="34" name="TextBox 33"/>
-          <p:cNvSpPr txBox="1"/>
-          <p:nvPr/>
-        </p:nvSpPr>
-        <p:spPr>
-          <a:xfrm>
-            <a:off x="7772400" y="4389120"/>
-            <a:ext cx="4114800" cy="731520"/>
-          </a:xfrm>
-          <a:prstGeom prst="rect">
-            <a:avLst/>
-          </a:prstGeom>
-          <a:noFill/>
-        </p:spPr>
-        <p:txBody>
-          <a:bodyPr wrap="square">
-            <a:spAutoFit/>
-          </a:bodyPr>
-          <a:lstStyle/>
-          <a:p>
-            <a:pPr>
-              <a:defRPr sz="1200">
-                <a:solidFill>
-                  <a:srgbClr val="CCCCCC"/>
-                </a:solidFill>
-              </a:defRPr>
-            </a:pPr>
-            <a:r>
-              <a:t>Claude 虽支持文档解析，但在处理 </a:t>
-            </a:r>
-            <a:r>
-              <a:rPr>
-                <a:solidFill>
-                  <a:srgbClr val="E53935"/>
-                </a:solidFill>
-              </a:rPr>
-              <a:t>10+</a:t>
-            </a:r>
-            <a:r>
-              <a:t> 项虚构数据字典时表现乏力</a:t>
-            </a:r>
-          </a:p>
-        </p:txBody>
-      </p:sp>
-      <p:cxnSp>
-        <p:nvCxnSpPr>
-          <p:cNvPr id="35" name="Connector 34"/>
-          <p:cNvCxnSpPr/>
-          <p:nvPr/>
-        </p:nvCxnSpPr>
-        <p:spPr>
-          <a:xfrm>
-            <a:off x="6858000" y="5212080"/>
-            <a:ext cx="4846320" cy="0"/>
-          </a:xfrm>
-          <a:prstGeom prst="line">
-            <a:avLst/>
-          </a:prstGeom>
-          <a:ln>
-            <a:solidFill>
-              <a:srgbClr val="444444"/>
-            </a:solidFill>
-            <a:prstDash val="sysDash"/>
-          </a:ln>
-        </p:spPr>
-        <p:style>
-          <a:lnRef idx="2">
-            <a:schemeClr val="accent1"/>
-          </a:lnRef>
-          <a:fillRef idx="0">
-            <a:schemeClr val="accent1"/>
-          </a:fillRef>
-          <a:effectRef idx="1">
-            <a:schemeClr val="accent1"/>
-          </a:effectRef>
-          <a:fontRef idx="minor">
-            <a:schemeClr val="tx1"/>
-          </a:fontRef>
-        </p:style>
-      </p:cxnSp>
-      <p:sp>
-        <p:nvSpPr>
-          <p:cNvPr id="36" name="Rounded Rectangle 35"/>
+              <a:t>2</a:t>
+            </a:r>
+          </a:p>
+        </p:txBody>
+      </p:sp>
+      <p:sp>
+        <p:nvSpPr>
+          <p:cNvPr id="32" name="Oval 31"/>
           <p:cNvSpPr/>
           <p:nvPr/>
         </p:nvSpPr>
         <p:spPr>
           <a:xfrm>
-            <a:off x="6858000" y="5486400"/>
-            <a:ext cx="731520" cy="731520"/>
-          </a:xfrm>
-          <a:prstGeom prst="roundRect">
+            <a:off x="3154680" y="4526280"/>
+            <a:ext cx="91440" cy="91440"/>
+          </a:xfrm>
+          <a:prstGeom prst="ellipse">
             <a:avLst/>
           </a:prstGeom>
           <a:solidFill>
-            <a:srgbClr val="333333"/>
+            <a:srgbClr val="E53935"/>
           </a:solidFill>
           <a:ln>
             <a:noFill/>
@@ -7804,14 +7888,14 @@
       </p:sp>
       <p:sp>
         <p:nvSpPr>
-          <p:cNvPr id="37" name="TextBox 36"/>
+          <p:cNvPr id="33" name="TextBox 32"/>
           <p:cNvSpPr txBox="1"/>
           <p:nvPr/>
         </p:nvSpPr>
         <p:spPr>
           <a:xfrm>
-            <a:off x="7772400" y="5394960"/>
-            <a:ext cx="3657600" cy="365760"/>
+            <a:off x="3017520" y="4251960"/>
+            <a:ext cx="365760" cy="274320"/>
           </a:xfrm>
           <a:prstGeom prst="rect">
             <a:avLst/>
@@ -7824,6 +7908,154 @@
           </a:bodyPr>
           <a:lstStyle/>
           <a:p>
+            <a:pPr algn="ctr">
+              <a:defRPr sz="1200">
+                <a:solidFill>
+                  <a:srgbClr val="FFFFFF"/>
+                </a:solidFill>
+              </a:defRPr>
+            </a:pPr>
+            <a:r>
+              <a:t>9</a:t>
+            </a:r>
+          </a:p>
+        </p:txBody>
+      </p:sp>
+      <p:sp>
+        <p:nvSpPr>
+          <p:cNvPr id="34" name="TextBox 33"/>
+          <p:cNvSpPr txBox="1"/>
+          <p:nvPr/>
+        </p:nvSpPr>
+        <p:spPr>
+          <a:xfrm rot="18900000">
+            <a:off x="2194560" y="4937760"/>
+            <a:ext cx="914400" cy="365760"/>
+          </a:xfrm>
+          <a:prstGeom prst="rect">
+            <a:avLst/>
+          </a:prstGeom>
+          <a:noFill/>
+        </p:spPr>
+        <p:txBody>
+          <a:bodyPr wrap="none">
+            <a:spAutoFit/>
+          </a:bodyPr>
+          <a:lstStyle/>
+          <a:p>
+            <a:pPr>
+              <a:defRPr sz="1200">
+                <a:solidFill>
+                  <a:srgbClr val="E53935"/>
+                </a:solidFill>
+              </a:defRPr>
+            </a:pPr>
+            <a:r>
+              <a:t>329</a:t>
+            </a:r>
+          </a:p>
+        </p:txBody>
+      </p:sp>
+      <p:sp>
+        <p:nvSpPr>
+          <p:cNvPr id="35" name="Isosceles Triangle 34"/>
+          <p:cNvSpPr/>
+          <p:nvPr/>
+        </p:nvSpPr>
+        <p:spPr>
+          <a:xfrm>
+            <a:off x="3840480" y="4389120"/>
+            <a:ext cx="274320" cy="274320"/>
+          </a:xfrm>
+          <a:prstGeom prst="triangle">
+            <a:avLst/>
+          </a:prstGeom>
+          <a:solidFill>
+            <a:srgbClr val="E53935"/>
+          </a:solidFill>
+          <a:ln>
+            <a:noFill/>
+          </a:ln>
+        </p:spPr>
+        <p:style>
+          <a:lnRef idx="1">
+            <a:schemeClr val="accent1"/>
+          </a:lnRef>
+          <a:fillRef idx="3">
+            <a:schemeClr val="accent1"/>
+          </a:fillRef>
+          <a:effectRef idx="2">
+            <a:schemeClr val="accent1"/>
+          </a:effectRef>
+          <a:fontRef idx="minor">
+            <a:schemeClr val="lt1"/>
+          </a:fontRef>
+        </p:style>
+        <p:txBody>
+          <a:bodyPr rtlCol="0" anchor="ctr"/>
+          <a:lstStyle/>
+          <a:p>
+            <a:pPr algn="ctr"/>
+          </a:p>
+        </p:txBody>
+      </p:sp>
+      <p:sp>
+        <p:nvSpPr>
+          <p:cNvPr id="36" name="TextBox 35"/>
+          <p:cNvSpPr txBox="1"/>
+          <p:nvPr/>
+        </p:nvSpPr>
+        <p:spPr>
+          <a:xfrm>
+            <a:off x="3840480" y="4389120"/>
+            <a:ext cx="274320" cy="274320"/>
+          </a:xfrm>
+          <a:prstGeom prst="rect">
+            <a:avLst/>
+          </a:prstGeom>
+          <a:noFill/>
+        </p:spPr>
+        <p:txBody>
+          <a:bodyPr wrap="none">
+            <a:spAutoFit/>
+          </a:bodyPr>
+          <a:lstStyle/>
+          <a:p>
+            <a:pPr algn="ctr">
+              <a:defRPr sz="1400" b="1">
+                <a:solidFill>
+                  <a:srgbClr val="FFFFFF"/>
+                </a:solidFill>
+              </a:defRPr>
+            </a:pPr>
+            <a:r>
+              <a:t>!</a:t>
+            </a:r>
+          </a:p>
+        </p:txBody>
+      </p:sp>
+      <p:sp>
+        <p:nvSpPr>
+          <p:cNvPr id="37" name="TextBox 36"/>
+          <p:cNvSpPr txBox="1"/>
+          <p:nvPr/>
+        </p:nvSpPr>
+        <p:spPr>
+          <a:xfrm>
+            <a:off x="4206240" y="4343400"/>
+            <a:ext cx="1097280" cy="365760"/>
+          </a:xfrm>
+          <a:prstGeom prst="rect">
+            <a:avLst/>
+          </a:prstGeom>
+          <a:noFill/>
+        </p:spPr>
+        <p:txBody>
+          <a:bodyPr wrap="none">
+            <a:spAutoFit/>
+          </a:bodyPr>
+          <a:lstStyle/>
+          <a:p>
             <a:pPr>
               <a:defRPr sz="1600" b="1">
                 <a:solidFill>
@@ -7832,21 +8064,64 @@
               </a:defRPr>
             </a:pPr>
             <a:r>
-              <a:t>实测评价</a:t>
-            </a:r>
-          </a:p>
-        </p:txBody>
-      </p:sp>
-      <p:sp>
-        <p:nvSpPr>
-          <p:cNvPr id="38" name="TextBox 37"/>
+              <a:t>修复爆炸</a:t>
+            </a:r>
+          </a:p>
+        </p:txBody>
+      </p:sp>
+      <p:sp>
+        <p:nvSpPr>
+          <p:cNvPr id="38" name="Explosion 37"/>
+          <p:cNvSpPr/>
+          <p:nvPr/>
+        </p:nvSpPr>
+        <p:spPr>
+          <a:xfrm>
+            <a:off x="5303520" y="4343400"/>
+            <a:ext cx="274320" cy="274320"/>
+          </a:xfrm>
+          <a:prstGeom prst="irregularSeal1">
+            <a:avLst/>
+          </a:prstGeom>
+          <a:solidFill>
+            <a:srgbClr val="E53935"/>
+          </a:solidFill>
+          <a:ln>
+            <a:noFill/>
+          </a:ln>
+        </p:spPr>
+        <p:style>
+          <a:lnRef idx="1">
+            <a:schemeClr val="accent1"/>
+          </a:lnRef>
+          <a:fillRef idx="3">
+            <a:schemeClr val="accent1"/>
+          </a:fillRef>
+          <a:effectRef idx="2">
+            <a:schemeClr val="accent1"/>
+          </a:effectRef>
+          <a:fontRef idx="minor">
+            <a:schemeClr val="lt1"/>
+          </a:fontRef>
+        </p:style>
+        <p:txBody>
+          <a:bodyPr rtlCol="0" anchor="ctr"/>
+          <a:lstStyle/>
+          <a:p>
+            <a:pPr algn="ctr"/>
+          </a:p>
+        </p:txBody>
+      </p:sp>
+      <p:sp>
+        <p:nvSpPr>
+          <p:cNvPr id="39" name="TextBox 38"/>
           <p:cNvSpPr txBox="1"/>
           <p:nvPr/>
         </p:nvSpPr>
         <p:spPr>
           <a:xfrm>
-            <a:off x="7772400" y="5760720"/>
-            <a:ext cx="4114800" cy="731520"/>
+            <a:off x="3840480" y="4754880"/>
+            <a:ext cx="2377440" cy="1371600"/>
           </a:xfrm>
           <a:prstGeom prst="rect">
             <a:avLst/>
@@ -7859,6 +8134,303 @@
           </a:bodyPr>
           <a:lstStyle/>
           <a:p>
+            <a:r>
+              <a:rPr sz="1200">
+                <a:solidFill>
+                  <a:srgbClr val="CCCCCC"/>
+                </a:solidFill>
+              </a:rPr>
+              <a:t>错误呈 </a:t>
+            </a:r>
+            <a:r>
+              <a:rPr sz="1200">
+                <a:solidFill>
+                  <a:srgbClr val="E53935"/>
+                </a:solidFill>
+              </a:rPr>
+              <a:t>3→2→9</a:t>
+            </a:r>
+            <a:r>
+              <a:rPr sz="1200">
+                <a:solidFill>
+                  <a:srgbClr val="CCCCCC"/>
+                </a:solidFill>
+              </a:rPr>
+              <a:t> 非线性增长，前序修正引发后续逻辑大规模崩溃</a:t>
+            </a:r>
+          </a:p>
+        </p:txBody>
+      </p:sp>
+      <p:sp>
+        <p:nvSpPr>
+          <p:cNvPr id="40" name="Rounded Rectangle 39"/>
+          <p:cNvSpPr/>
+          <p:nvPr/>
+        </p:nvSpPr>
+        <p:spPr>
+          <a:xfrm>
+            <a:off x="6583680" y="4114800"/>
+            <a:ext cx="731520" cy="731520"/>
+          </a:xfrm>
+          <a:prstGeom prst="roundRect">
+            <a:avLst/>
+          </a:prstGeom>
+          <a:solidFill>
+            <a:srgbClr val="22262C"/>
+          </a:solidFill>
+          <a:ln>
+            <a:noFill/>
+          </a:ln>
+        </p:spPr>
+        <p:style>
+          <a:lnRef idx="1">
+            <a:schemeClr val="accent1"/>
+          </a:lnRef>
+          <a:fillRef idx="3">
+            <a:schemeClr val="accent1"/>
+          </a:fillRef>
+          <a:effectRef idx="2">
+            <a:schemeClr val="accent1"/>
+          </a:effectRef>
+          <a:fontRef idx="minor">
+            <a:schemeClr val="lt1"/>
+          </a:fontRef>
+        </p:style>
+        <p:txBody>
+          <a:bodyPr rtlCol="0" anchor="ctr"/>
+          <a:lstStyle/>
+          <a:p>
+            <a:pPr algn="ctr"/>
+          </a:p>
+        </p:txBody>
+      </p:sp>
+      <p:sp>
+        <p:nvSpPr>
+          <p:cNvPr id="41" name="TextBox 40"/>
+          <p:cNvSpPr txBox="1"/>
+          <p:nvPr/>
+        </p:nvSpPr>
+        <p:spPr>
+          <a:xfrm>
+            <a:off x="7498079" y="4023360"/>
+            <a:ext cx="3657600" cy="365760"/>
+          </a:xfrm>
+          <a:prstGeom prst="rect">
+            <a:avLst/>
+          </a:prstGeom>
+          <a:noFill/>
+        </p:spPr>
+        <p:txBody>
+          <a:bodyPr wrap="none">
+            <a:spAutoFit/>
+          </a:bodyPr>
+          <a:lstStyle/>
+          <a:p>
+            <a:pPr>
+              <a:defRPr sz="1600" b="1">
+                <a:solidFill>
+                  <a:srgbClr val="FFFFFF"/>
+                </a:solidFill>
+              </a:defRPr>
+            </a:pPr>
+            <a:r>
+              <a:t>解析能力</a:t>
+            </a:r>
+          </a:p>
+        </p:txBody>
+      </p:sp>
+      <p:sp>
+        <p:nvSpPr>
+          <p:cNvPr id="42" name="TextBox 41"/>
+          <p:cNvSpPr txBox="1"/>
+          <p:nvPr/>
+        </p:nvSpPr>
+        <p:spPr>
+          <a:xfrm>
+            <a:off x="7498079" y="4389120"/>
+            <a:ext cx="4114800" cy="731520"/>
+          </a:xfrm>
+          <a:prstGeom prst="rect">
+            <a:avLst/>
+          </a:prstGeom>
+          <a:noFill/>
+        </p:spPr>
+        <p:txBody>
+          <a:bodyPr wrap="square">
+            <a:spAutoFit/>
+          </a:bodyPr>
+          <a:lstStyle/>
+          <a:p>
+            <a:r>
+              <a:rPr sz="1200">
+                <a:solidFill>
+                  <a:srgbClr val="CCCCCC"/>
+                </a:solidFill>
+              </a:rPr>
+              <a:t>Claude 虽支持文档解析，但在处理 </a:t>
+            </a:r>
+            <a:r>
+              <a:rPr sz="1200">
+                <a:solidFill>
+                  <a:srgbClr val="E53935"/>
+                </a:solidFill>
+              </a:rPr>
+              <a:t>10+</a:t>
+            </a:r>
+            <a:r>
+              <a:rPr sz="1200">
+                <a:solidFill>
+                  <a:srgbClr val="CCCCCC"/>
+                </a:solidFill>
+              </a:rPr>
+              <a:t> 项虚构数据字典时表现乏力</a:t>
+            </a:r>
+          </a:p>
+        </p:txBody>
+      </p:sp>
+      <p:sp>
+        <p:nvSpPr>
+          <p:cNvPr id="43" name="Rectangle 42"/>
+          <p:cNvSpPr/>
+          <p:nvPr/>
+        </p:nvSpPr>
+        <p:spPr>
+          <a:xfrm>
+            <a:off x="6583680" y="5212080"/>
+            <a:ext cx="5120640" cy="12700"/>
+          </a:xfrm>
+          <a:prstGeom prst="rect">
+            <a:avLst/>
+          </a:prstGeom>
+          <a:ln>
+            <a:solidFill>
+              <a:srgbClr val="444850"/>
+            </a:solidFill>
+            <a:prstDash val="sysDash"/>
+          </a:ln>
+        </p:spPr>
+        <p:style>
+          <a:lnRef idx="1">
+            <a:schemeClr val="accent1"/>
+          </a:lnRef>
+          <a:fillRef idx="3">
+            <a:schemeClr val="accent1"/>
+          </a:fillRef>
+          <a:effectRef idx="2">
+            <a:schemeClr val="accent1"/>
+          </a:effectRef>
+          <a:fontRef idx="minor">
+            <a:schemeClr val="lt1"/>
+          </a:fontRef>
+        </p:style>
+        <p:txBody>
+          <a:bodyPr rtlCol="0" anchor="ctr"/>
+          <a:lstStyle/>
+          <a:p>
+            <a:pPr algn="ctr"/>
+          </a:p>
+        </p:txBody>
+      </p:sp>
+      <p:sp>
+        <p:nvSpPr>
+          <p:cNvPr id="44" name="Rounded Rectangle 43"/>
+          <p:cNvSpPr/>
+          <p:nvPr/>
+        </p:nvSpPr>
+        <p:spPr>
+          <a:xfrm>
+            <a:off x="6583680" y="5486400"/>
+            <a:ext cx="731520" cy="731520"/>
+          </a:xfrm>
+          <a:prstGeom prst="roundRect">
+            <a:avLst/>
+          </a:prstGeom>
+          <a:solidFill>
+            <a:srgbClr val="22262C"/>
+          </a:solidFill>
+          <a:ln>
+            <a:noFill/>
+          </a:ln>
+        </p:spPr>
+        <p:style>
+          <a:lnRef idx="1">
+            <a:schemeClr val="accent1"/>
+          </a:lnRef>
+          <a:fillRef idx="3">
+            <a:schemeClr val="accent1"/>
+          </a:fillRef>
+          <a:effectRef idx="2">
+            <a:schemeClr val="accent1"/>
+          </a:effectRef>
+          <a:fontRef idx="minor">
+            <a:schemeClr val="lt1"/>
+          </a:fontRef>
+        </p:style>
+        <p:txBody>
+          <a:bodyPr rtlCol="0" anchor="ctr"/>
+          <a:lstStyle/>
+          <a:p>
+            <a:pPr algn="ctr"/>
+          </a:p>
+        </p:txBody>
+      </p:sp>
+      <p:sp>
+        <p:nvSpPr>
+          <p:cNvPr id="45" name="TextBox 44"/>
+          <p:cNvSpPr txBox="1"/>
+          <p:nvPr/>
+        </p:nvSpPr>
+        <p:spPr>
+          <a:xfrm>
+            <a:off x="7498079" y="5394960"/>
+            <a:ext cx="3657600" cy="365760"/>
+          </a:xfrm>
+          <a:prstGeom prst="rect">
+            <a:avLst/>
+          </a:prstGeom>
+          <a:noFill/>
+        </p:spPr>
+        <p:txBody>
+          <a:bodyPr wrap="none">
+            <a:spAutoFit/>
+          </a:bodyPr>
+          <a:lstStyle/>
+          <a:p>
+            <a:pPr>
+              <a:defRPr sz="1600" b="1">
+                <a:solidFill>
+                  <a:srgbClr val="FFFFFF"/>
+                </a:solidFill>
+              </a:defRPr>
+            </a:pPr>
+            <a:r>
+              <a:t>实测评价</a:t>
+            </a:r>
+          </a:p>
+        </p:txBody>
+      </p:sp>
+      <p:sp>
+        <p:nvSpPr>
+          <p:cNvPr id="46" name="TextBox 45"/>
+          <p:cNvSpPr txBox="1"/>
+          <p:nvPr/>
+        </p:nvSpPr>
+        <p:spPr>
+          <a:xfrm>
+            <a:off x="7498079" y="5760720"/>
+            <a:ext cx="4114800" cy="731520"/>
+          </a:xfrm>
+          <a:prstGeom prst="rect">
+            <a:avLst/>
+          </a:prstGeom>
+          <a:noFill/>
+        </p:spPr>
+        <p:txBody>
+          <a:bodyPr wrap="square">
+            <a:spAutoFit/>
+          </a:bodyPr>
+          <a:lstStyle/>
+          <a:p>
             <a:pPr>
               <a:defRPr sz="1200">
                 <a:solidFill>
@@ -7874,7 +8446,7 @@
       </p:sp>
       <p:sp>
         <p:nvSpPr>
-          <p:cNvPr id="39" name="TextBox 38"/>
+          <p:cNvPr id="47" name="TextBox 46"/>
           <p:cNvSpPr txBox="1"/>
           <p:nvPr/>
         </p:nvSpPr>
@@ -7921,7 +8493,7 @@
     <p:bg>
       <p:bgPr>
         <a:solidFill>
-          <a:srgbClr val="0A1428"/>
+          <a:srgbClr val="0A162C"/>
         </a:solidFill>
         <a:effectLst/>
       </p:bgPr>
@@ -7941,8 +8513,8 @@
         </p:nvSpPr>
         <p:spPr>
           <a:xfrm>
-            <a:off x="457200" y="365760"/>
-            <a:ext cx="9144000" cy="731520"/>
+            <a:off x="274320" y="91440"/>
+            <a:ext cx="914400" cy="274320"/>
           </a:xfrm>
           <a:prstGeom prst="rect">
             <a:avLst/>
@@ -7956,15 +8528,14 @@
           <a:lstStyle/>
           <a:p>
             <a:pPr>
-              <a:defRPr sz="3200" b="1">
-                <a:solidFill>
-                  <a:srgbClr val="FFDF8C"/>
-                </a:solidFill>
-                <a:latin typeface="Microsoft YaHei"/>
+              <a:defRPr sz="1000">
+                <a:solidFill>
+                  <a:srgbClr val="DFBA78"/>
+                </a:solidFill>
               </a:defRPr>
             </a:pPr>
             <a:r>
-              <a:t>结论：复杂度决定 AI 的应用边界</a:t>
+              <a:t>第4页</a:t>
             </a:r>
           </a:p>
         </p:txBody>
@@ -7977,8 +8548,8 @@
         </p:nvSpPr>
         <p:spPr>
           <a:xfrm>
-            <a:off x="457200" y="914400"/>
-            <a:ext cx="9144000" cy="457200"/>
+            <a:off x="731520" y="457200"/>
+            <a:ext cx="9144000" cy="548640"/>
           </a:xfrm>
           <a:prstGeom prst="rect">
             <a:avLst/>
@@ -7992,11 +8563,45 @@
           <a:lstStyle/>
           <a:p>
             <a:pPr>
-              <a:defRPr sz="2000">
+              <a:defRPr sz="2800" b="1">
+                <a:solidFill>
+                  <a:srgbClr val="EED4A0"/>
+                </a:solidFill>
+              </a:defRPr>
+            </a:pPr>
+            <a:r>
+              <a:t>结论：复杂度决定 AI 的应用边界</a:t>
+            </a:r>
+          </a:p>
+        </p:txBody>
+      </p:sp>
+      <p:sp>
+        <p:nvSpPr>
+          <p:cNvPr id="4" name="TextBox 3"/>
+          <p:cNvSpPr txBox="1"/>
+          <p:nvPr/>
+        </p:nvSpPr>
+        <p:spPr>
+          <a:xfrm>
+            <a:off x="731520" y="1005840"/>
+            <a:ext cx="9144000" cy="365760"/>
+          </a:xfrm>
+          <a:prstGeom prst="rect">
+            <a:avLst/>
+          </a:prstGeom>
+          <a:noFill/>
+        </p:spPr>
+        <p:txBody>
+          <a:bodyPr wrap="none">
+            <a:spAutoFit/>
+          </a:bodyPr>
+          <a:lstStyle/>
+          <a:p>
+            <a:pPr>
+              <a:defRPr sz="1800">
                 <a:solidFill>
                   <a:srgbClr val="FFFFFF"/>
                 </a:solidFill>
-                <a:latin typeface="Microsoft YaHei"/>
               </a:defRPr>
             </a:pPr>
             <a:r>
@@ -8007,22 +8612,24 @@
       </p:sp>
       <p:sp>
         <p:nvSpPr>
-          <p:cNvPr id="4" name="Rounded Rectangle 3"/>
+          <p:cNvPr id="5" name="Rounded Rectangle 4"/>
           <p:cNvSpPr/>
           <p:nvPr/>
         </p:nvSpPr>
         <p:spPr>
           <a:xfrm>
-            <a:off x="548640" y="1554480"/>
-            <a:ext cx="5943600" cy="5029200"/>
+            <a:off x="731520" y="1645920"/>
+            <a:ext cx="5669280" cy="4754880"/>
           </a:xfrm>
           <a:prstGeom prst="roundRect">
             <a:avLst/>
           </a:prstGeom>
-          <a:noFill/>
-          <a:ln w="19050">
+          <a:solidFill>
+            <a:srgbClr val="122238"/>
+          </a:solidFill>
+          <a:ln w="12700">
             <a:solidFill>
-              <a:srgbClr val="FFDF8C"/>
+              <a:srgbClr val="3A5A7A"/>
             </a:solidFill>
           </a:ln>
         </p:spPr>
@@ -8050,24 +8657,21 @@
       </p:sp>
       <p:sp>
         <p:nvSpPr>
-          <p:cNvPr id="5" name="Rounded Rectangle 4"/>
+          <p:cNvPr id="6" name="Rectangle 5"/>
           <p:cNvSpPr/>
           <p:nvPr/>
         </p:nvSpPr>
         <p:spPr>
           <a:xfrm>
-            <a:off x="457200" y="1463040"/>
-            <a:ext cx="5943600" cy="5029200"/>
-          </a:xfrm>
-          <a:prstGeom prst="roundRect">
-            <a:avLst/>
-          </a:prstGeom>
-          <a:solidFill>
-            <a:srgbClr val="152842"/>
-          </a:solidFill>
-          <a:ln w="12700">
+            <a:off x="1188720" y="2011680"/>
+            <a:ext cx="12700" cy="3931920"/>
+          </a:xfrm>
+          <a:prstGeom prst="rect">
+            <a:avLst/>
+          </a:prstGeom>
+          <a:ln w="25400">
             <a:solidFill>
-              <a:srgbClr val="3A5575"/>
+              <a:srgbClr val="DFBA78"/>
             </a:solidFill>
           </a:ln>
         </p:spPr>
@@ -8093,168 +8697,23 @@
           </a:p>
         </p:txBody>
       </p:sp>
-      <p:cxnSp>
-        <p:nvCxnSpPr>
-          <p:cNvPr id="6" name="Connector 5"/>
-          <p:cNvCxnSpPr/>
-          <p:nvPr/>
-        </p:nvCxnSpPr>
-        <p:spPr>
-          <a:xfrm flipV="1">
-            <a:off x="914400" y="1645920"/>
-            <a:ext cx="0" cy="4572000"/>
-          </a:xfrm>
-          <a:prstGeom prst="line">
+      <p:sp>
+        <p:nvSpPr>
+          <p:cNvPr id="7" name="Rectangle 6"/>
+          <p:cNvSpPr/>
+          <p:nvPr/>
+        </p:nvSpPr>
+        <p:spPr>
+          <a:xfrm>
+            <a:off x="1188720" y="5943600"/>
+            <a:ext cx="5029200" cy="12700"/>
+          </a:xfrm>
+          <a:prstGeom prst="rect">
             <a:avLst/>
           </a:prstGeom>
           <a:ln w="25400">
             <a:solidFill>
-              <a:srgbClr val="FFDF8C"/>
-            </a:solidFill>
-          </a:ln>
-        </p:spPr>
-        <p:style>
-          <a:lnRef idx="2">
-            <a:schemeClr val="accent1"/>
-          </a:lnRef>
-          <a:fillRef idx="0">
-            <a:schemeClr val="accent1"/>
-          </a:fillRef>
-          <a:effectRef idx="1">
-            <a:schemeClr val="accent1"/>
-          </a:effectRef>
-          <a:fontRef idx="minor">
-            <a:schemeClr val="tx1"/>
-          </a:fontRef>
-        </p:style>
-      </p:cxnSp>
-      <p:cxnSp>
-        <p:nvCxnSpPr>
-          <p:cNvPr id="7" name="Connector 6"/>
-          <p:cNvCxnSpPr/>
-          <p:nvPr/>
-        </p:nvCxnSpPr>
-        <p:spPr>
-          <a:xfrm>
-            <a:off x="914400" y="6217920"/>
-            <a:ext cx="5303520" cy="0"/>
-          </a:xfrm>
-          <a:prstGeom prst="line">
-            <a:avLst/>
-          </a:prstGeom>
-          <a:ln w="25400">
-            <a:solidFill>
-              <a:srgbClr val="FFDF8C"/>
-            </a:solidFill>
-          </a:ln>
-        </p:spPr>
-        <p:style>
-          <a:lnRef idx="2">
-            <a:schemeClr val="accent1"/>
-          </a:lnRef>
-          <a:fillRef idx="0">
-            <a:schemeClr val="accent1"/>
-          </a:fillRef>
-          <a:effectRef idx="1">
-            <a:schemeClr val="accent1"/>
-          </a:effectRef>
-          <a:fontRef idx="minor">
-            <a:schemeClr val="tx1"/>
-          </a:fontRef>
-        </p:style>
-      </p:cxnSp>
-      <p:sp>
-        <p:nvSpPr>
-          <p:cNvPr id="8" name="TextBox 7"/>
-          <p:cNvSpPr txBox="1"/>
-          <p:nvPr/>
-        </p:nvSpPr>
-        <p:spPr>
-          <a:xfrm rot="16200000">
-            <a:off x="182880" y="3657600"/>
-            <a:ext cx="1371600" cy="457200"/>
-          </a:xfrm>
-          <a:prstGeom prst="rect">
-            <a:avLst/>
-          </a:prstGeom>
-          <a:noFill/>
-        </p:spPr>
-        <p:txBody>
-          <a:bodyPr wrap="none">
-            <a:spAutoFit/>
-          </a:bodyPr>
-          <a:lstStyle/>
-          <a:p>
-            <a:pPr>
-              <a:defRPr sz="1400">
-                <a:solidFill>
-                  <a:srgbClr val="FFDF8C"/>
-                </a:solidFill>
-                <a:latin typeface="Microsoft YaHei"/>
-              </a:defRPr>
-            </a:pPr>
-            <a:r>
-              <a:t>提效百分比</a:t>
-            </a:r>
-          </a:p>
-        </p:txBody>
-      </p:sp>
-      <p:sp>
-        <p:nvSpPr>
-          <p:cNvPr id="9" name="TextBox 8"/>
-          <p:cNvSpPr txBox="1"/>
-          <p:nvPr/>
-        </p:nvSpPr>
-        <p:spPr>
-          <a:xfrm>
-            <a:off x="3200400" y="6309360"/>
-            <a:ext cx="1828800" cy="457200"/>
-          </a:xfrm>
-          <a:prstGeom prst="rect">
-            <a:avLst/>
-          </a:prstGeom>
-          <a:noFill/>
-        </p:spPr>
-        <p:txBody>
-          <a:bodyPr wrap="none">
-            <a:spAutoFit/>
-          </a:bodyPr>
-          <a:lstStyle/>
-          <a:p>
-            <a:pPr>
-              <a:defRPr sz="1400">
-                <a:solidFill>
-                  <a:srgbClr val="FFDF8C"/>
-                </a:solidFill>
-                <a:latin typeface="Microsoft YaHei"/>
-              </a:defRPr>
-            </a:pPr>
-            <a:r>
-              <a:t>任务复杂度</a:t>
-            </a:r>
-          </a:p>
-        </p:txBody>
-      </p:sp>
-      <p:sp>
-        <p:nvSpPr>
-          <p:cNvPr id="10" name="Rounded Rectangle 9"/>
-          <p:cNvSpPr/>
-          <p:nvPr/>
-        </p:nvSpPr>
-        <p:spPr>
-          <a:xfrm>
-            <a:off x="1097280" y="1828800"/>
-            <a:ext cx="2377440" cy="2011680"/>
-          </a:xfrm>
-          <a:prstGeom prst="roundRect">
-            <a:avLst/>
-          </a:prstGeom>
-          <a:solidFill>
-            <a:srgbClr val="1C3350"/>
-          </a:solidFill>
-          <a:ln w="12700">
-            <a:solidFill>
-              <a:srgbClr val="3A5575"/>
+              <a:srgbClr val="DFBA78"/>
             </a:solidFill>
           </a:ln>
         </p:spPr>
@@ -8282,14 +8741,65 @@
       </p:sp>
       <p:sp>
         <p:nvSpPr>
-          <p:cNvPr id="11" name="TextBox 10"/>
+          <p:cNvPr id="8" name="TextBox 7"/>
           <p:cNvSpPr txBox="1"/>
           <p:nvPr/>
         </p:nvSpPr>
         <p:spPr>
           <a:xfrm>
-            <a:off x="1188720" y="1920240"/>
-            <a:ext cx="2194560" cy="365760"/>
+            <a:off x="731520" y="3200400"/>
+            <a:ext cx="365760" cy="1828800"/>
+          </a:xfrm>
+          <a:prstGeom prst="rect">
+            <a:avLst/>
+          </a:prstGeom>
+          <a:noFill/>
+        </p:spPr>
+        <p:txBody>
+          <a:bodyPr wrap="square">
+            <a:spAutoFit/>
+          </a:bodyPr>
+          <a:lstStyle/>
+          <a:p>
+            <a:pPr algn="ctr">
+              <a:defRPr sz="1200">
+                <a:solidFill>
+                  <a:srgbClr val="DFBA78"/>
+                </a:solidFill>
+              </a:defRPr>
+            </a:pPr>
+            <a:r>
+              <a:t>提</a:t>
+            </a:r>
+            <a:br/>
+            <a:r>
+              <a:t>效</a:t>
+            </a:r>
+            <a:br/>
+            <a:r>
+              <a:t>百</a:t>
+            </a:r>
+            <a:br/>
+            <a:r>
+              <a:t>分</a:t>
+            </a:r>
+            <a:br/>
+            <a:r>
+              <a:t>比</a:t>
+            </a:r>
+          </a:p>
+        </p:txBody>
+      </p:sp>
+      <p:sp>
+        <p:nvSpPr>
+          <p:cNvPr id="9" name="TextBox 8"/>
+          <p:cNvSpPr txBox="1"/>
+          <p:nvPr/>
+        </p:nvSpPr>
+        <p:spPr>
+          <a:xfrm>
+            <a:off x="2743200" y="6035040"/>
+            <a:ext cx="1828800" cy="365760"/>
           </a:xfrm>
           <a:prstGeom prst="rect">
             <a:avLst/>
@@ -8302,148 +8812,39 @@
           </a:bodyPr>
           <a:lstStyle/>
           <a:p>
-            <a:pPr>
-              <a:defRPr sz="1400">
-                <a:solidFill>
-                  <a:srgbClr val="FFFFFF"/>
-                </a:solidFill>
-                <a:latin typeface="Microsoft YaHei"/>
+            <a:pPr algn="ctr">
+              <a:defRPr sz="1200">
+                <a:solidFill>
+                  <a:srgbClr val="DFBA78"/>
+                </a:solidFill>
               </a:defRPr>
             </a:pPr>
             <a:r>
-              <a:t>简单场景</a:t>
-            </a:r>
-          </a:p>
-        </p:txBody>
-      </p:sp>
-      <p:sp>
-        <p:nvSpPr>
-          <p:cNvPr id="12" name="TextBox 11"/>
-          <p:cNvSpPr txBox="1"/>
-          <p:nvPr/>
-        </p:nvSpPr>
-        <p:spPr>
-          <a:xfrm>
-            <a:off x="2926080" y="1920240"/>
-            <a:ext cx="457200" cy="457200"/>
-          </a:xfrm>
-          <a:prstGeom prst="rect">
-            <a:avLst/>
-          </a:prstGeom>
-          <a:noFill/>
-        </p:spPr>
-        <p:txBody>
-          <a:bodyPr wrap="none">
-            <a:spAutoFit/>
-          </a:bodyPr>
-          <a:lstStyle/>
-          <a:p>
-            <a:pPr>
-              <a:defRPr sz="1800">
-                <a:solidFill>
-                  <a:srgbClr val="D0D0D0"/>
-                </a:solidFill>
-                <a:latin typeface="Segoe UI Symbol"/>
-              </a:defRPr>
-            </a:pPr>
-            <a:r>
-              <a:t>☑</a:t>
-            </a:r>
-          </a:p>
-        </p:txBody>
-      </p:sp>
-      <p:sp>
-        <p:nvSpPr>
-          <p:cNvPr id="13" name="TextBox 12"/>
-          <p:cNvSpPr txBox="1"/>
-          <p:nvPr/>
-        </p:nvSpPr>
-        <p:spPr>
-          <a:xfrm>
-            <a:off x="1097280" y="2377440"/>
-            <a:ext cx="2377440" cy="548640"/>
-          </a:xfrm>
-          <a:prstGeom prst="rect">
-            <a:avLst/>
-          </a:prstGeom>
-          <a:noFill/>
-        </p:spPr>
-        <p:txBody>
-          <a:bodyPr wrap="none">
-            <a:spAutoFit/>
-          </a:bodyPr>
-          <a:lstStyle/>
-          <a:p>
-            <a:pPr algn="ctr">
-              <a:defRPr sz="2600" b="1">
-                <a:solidFill>
-                  <a:srgbClr val="FFDF8C"/>
-                </a:solidFill>
-                <a:latin typeface="Microsoft YaHei"/>
-              </a:defRPr>
-            </a:pPr>
-            <a:r>
-              <a:t>50% 提效</a:t>
-            </a:r>
-          </a:p>
-        </p:txBody>
-      </p:sp>
-      <p:sp>
-        <p:nvSpPr>
-          <p:cNvPr id="14" name="TextBox 13"/>
-          <p:cNvSpPr txBox="1"/>
-          <p:nvPr/>
-        </p:nvSpPr>
-        <p:spPr>
-          <a:xfrm>
-            <a:off x="1097280" y="3017520"/>
-            <a:ext cx="2377440" cy="365760"/>
-          </a:xfrm>
-          <a:prstGeom prst="rect">
-            <a:avLst/>
-          </a:prstGeom>
-          <a:noFill/>
-        </p:spPr>
-        <p:txBody>
-          <a:bodyPr wrap="none">
-            <a:spAutoFit/>
-          </a:bodyPr>
-          <a:lstStyle/>
-          <a:p>
-            <a:pPr algn="ctr">
-              <a:defRPr sz="1300">
-                <a:solidFill>
-                  <a:srgbClr val="D0D0D0"/>
-                </a:solidFill>
-                <a:latin typeface="Microsoft YaHei"/>
-              </a:defRPr>
-            </a:pPr>
-            <a:r>
-              <a:t>辅助逻辑，高收益</a:t>
-            </a:r>
-          </a:p>
-        </p:txBody>
-      </p:sp>
-      <p:sp>
-        <p:nvSpPr>
-          <p:cNvPr id="15" name="Rounded Rectangle 14"/>
+              <a:t>任务复杂度</a:t>
+            </a:r>
+          </a:p>
+        </p:txBody>
+      </p:sp>
+      <p:sp>
+        <p:nvSpPr>
+          <p:cNvPr id="10" name="Rounded Rectangle 9"/>
           <p:cNvSpPr/>
           <p:nvPr/>
         </p:nvSpPr>
         <p:spPr>
           <a:xfrm>
-            <a:off x="1097280" y="4023360"/>
-            <a:ext cx="2377440" cy="2011680"/>
+            <a:off x="1371600" y="2011680"/>
+            <a:ext cx="2286000" cy="1828800"/>
           </a:xfrm>
           <a:prstGeom prst="roundRect">
             <a:avLst/>
           </a:prstGeom>
           <a:solidFill>
-            <a:srgbClr val="1C3350"/>
+            <a:srgbClr val="1A2F4C"/>
           </a:solidFill>
           <a:ln w="12700">
             <a:solidFill>
-              <a:srgbClr val="3A5575"/>
+              <a:srgbClr val="3A5A7A"/>
             </a:solidFill>
           </a:ln>
         </p:spPr>
@@ -8471,14 +8872,14 @@
       </p:sp>
       <p:sp>
         <p:nvSpPr>
-          <p:cNvPr id="16" name="TextBox 15"/>
+          <p:cNvPr id="11" name="TextBox 10"/>
           <p:cNvSpPr txBox="1"/>
           <p:nvPr/>
         </p:nvSpPr>
         <p:spPr>
           <a:xfrm>
-            <a:off x="1188720" y="4114800"/>
-            <a:ext cx="2194560" cy="365760"/>
+            <a:off x="1463040" y="2103120"/>
+            <a:ext cx="1371600" cy="274320"/>
           </a:xfrm>
           <a:prstGeom prst="rect">
             <a:avLst/>
@@ -8492,29 +8893,28 @@
           <a:lstStyle/>
           <a:p>
             <a:pPr>
-              <a:defRPr sz="1400">
+              <a:defRPr sz="1200">
                 <a:solidFill>
                   <a:srgbClr val="FFFFFF"/>
                 </a:solidFill>
-                <a:latin typeface="Microsoft YaHei"/>
               </a:defRPr>
             </a:pPr>
             <a:r>
-              <a:t>中等场景</a:t>
-            </a:r>
-          </a:p>
-        </p:txBody>
-      </p:sp>
-      <p:sp>
-        <p:nvSpPr>
-          <p:cNvPr id="17" name="TextBox 16"/>
+              <a:t>简单场景</a:t>
+            </a:r>
+          </a:p>
+        </p:txBody>
+      </p:sp>
+      <p:sp>
+        <p:nvSpPr>
+          <p:cNvPr id="12" name="TextBox 11"/>
           <p:cNvSpPr txBox="1"/>
           <p:nvPr/>
         </p:nvSpPr>
         <p:spPr>
           <a:xfrm>
-            <a:off x="2926080" y="4114800"/>
-            <a:ext cx="457200" cy="457200"/>
+            <a:off x="3200400" y="2103120"/>
+            <a:ext cx="365760" cy="365760"/>
           </a:xfrm>
           <a:prstGeom prst="rect">
             <a:avLst/>
@@ -8527,30 +8927,29 @@
           </a:bodyPr>
           <a:lstStyle/>
           <a:p>
-            <a:pPr>
-              <a:defRPr sz="1800">
-                <a:solidFill>
-                  <a:srgbClr val="D0D0D0"/>
-                </a:solidFill>
-                <a:latin typeface="Segoe UI Symbol"/>
+            <a:pPr algn="r">
+              <a:defRPr sz="1600">
+                <a:solidFill>
+                  <a:srgbClr val="FFFFFF"/>
+                </a:solidFill>
               </a:defRPr>
             </a:pPr>
             <a:r>
-              <a:t>⊖</a:t>
-            </a:r>
-          </a:p>
-        </p:txBody>
-      </p:sp>
-      <p:sp>
-        <p:nvSpPr>
-          <p:cNvPr id="18" name="TextBox 17"/>
+              <a:t>✔</a:t>
+            </a:r>
+          </a:p>
+        </p:txBody>
+      </p:sp>
+      <p:sp>
+        <p:nvSpPr>
+          <p:cNvPr id="13" name="TextBox 12"/>
           <p:cNvSpPr txBox="1"/>
           <p:nvPr/>
         </p:nvSpPr>
         <p:spPr>
           <a:xfrm>
-            <a:off x="1097280" y="4572000"/>
-            <a:ext cx="2377440" cy="548640"/>
+            <a:off x="1371600" y="2651760"/>
+            <a:ext cx="2286000" cy="457200"/>
           </a:xfrm>
           <a:prstGeom prst="rect">
             <a:avLst/>
@@ -8564,29 +8963,28 @@
           <a:lstStyle/>
           <a:p>
             <a:pPr algn="ctr">
-              <a:defRPr sz="2600" b="1">
-                <a:solidFill>
-                  <a:srgbClr val="FFDF8C"/>
-                </a:solidFill>
-                <a:latin typeface="Microsoft YaHei"/>
+              <a:defRPr sz="2200" b="1">
+                <a:solidFill>
+                  <a:srgbClr val="DFBA78"/>
+                </a:solidFill>
               </a:defRPr>
             </a:pPr>
             <a:r>
-              <a:t>无提升</a:t>
-            </a:r>
-          </a:p>
-        </p:txBody>
-      </p:sp>
-      <p:sp>
-        <p:nvSpPr>
-          <p:cNvPr id="19" name="TextBox 18"/>
+              <a:t>50% 提效</a:t>
+            </a:r>
+          </a:p>
+        </p:txBody>
+      </p:sp>
+      <p:sp>
+        <p:nvSpPr>
+          <p:cNvPr id="14" name="TextBox 13"/>
           <p:cNvSpPr txBox="1"/>
           <p:nvPr/>
         </p:nvSpPr>
         <p:spPr>
           <a:xfrm>
-            <a:off x="1097280" y="5212080"/>
-            <a:ext cx="2377440" cy="365760"/>
+            <a:off x="1371600" y="3200400"/>
+            <a:ext cx="2286000" cy="274320"/>
           </a:xfrm>
           <a:prstGeom prst="rect">
             <a:avLst/>
@@ -8600,39 +8998,38 @@
           <a:lstStyle/>
           <a:p>
             <a:pPr algn="ctr">
-              <a:defRPr sz="1300">
-                <a:solidFill>
-                  <a:srgbClr val="D0D0D0"/>
-                </a:solidFill>
-                <a:latin typeface="Microsoft YaHei"/>
+              <a:defRPr sz="1100">
+                <a:solidFill>
+                  <a:srgbClr val="CCCCCC"/>
+                </a:solidFill>
               </a:defRPr>
             </a:pPr>
             <a:r>
-              <a:t>效率持平</a:t>
-            </a:r>
-          </a:p>
-        </p:txBody>
-      </p:sp>
-      <p:sp>
-        <p:nvSpPr>
-          <p:cNvPr id="20" name="Rounded Rectangle 19"/>
+              <a:t>辅助逻辑，高收益</a:t>
+            </a:r>
+          </a:p>
+        </p:txBody>
+      </p:sp>
+      <p:sp>
+        <p:nvSpPr>
+          <p:cNvPr id="15" name="Rounded Rectangle 14"/>
           <p:cNvSpPr/>
           <p:nvPr/>
         </p:nvSpPr>
         <p:spPr>
           <a:xfrm>
-            <a:off x="3657600" y="1828800"/>
-            <a:ext cx="2377440" cy="2011680"/>
+            <a:off x="3749039" y="2011680"/>
+            <a:ext cx="2286000" cy="1828800"/>
           </a:xfrm>
           <a:prstGeom prst="roundRect">
             <a:avLst/>
           </a:prstGeom>
           <a:solidFill>
-            <a:srgbClr val="253A45"/>
+            <a:srgbClr val="1A2F4C"/>
           </a:solidFill>
           <a:ln w="19050">
             <a:solidFill>
-              <a:srgbClr val="FFDF8C"/>
+              <a:srgbClr val="DFBA78"/>
             </a:solidFill>
           </a:ln>
         </p:spPr>
@@ -8660,14 +9057,14 @@
       </p:sp>
       <p:sp>
         <p:nvSpPr>
-          <p:cNvPr id="21" name="TextBox 20"/>
+          <p:cNvPr id="16" name="TextBox 15"/>
           <p:cNvSpPr txBox="1"/>
           <p:nvPr/>
         </p:nvSpPr>
         <p:spPr>
           <a:xfrm>
-            <a:off x="3749040" y="1920240"/>
-            <a:ext cx="2194560" cy="365760"/>
+            <a:off x="3840479" y="2103120"/>
+            <a:ext cx="1371600" cy="274320"/>
           </a:xfrm>
           <a:prstGeom prst="rect">
             <a:avLst/>
@@ -8681,11 +9078,10 @@
           <a:lstStyle/>
           <a:p>
             <a:pPr>
-              <a:defRPr sz="1400">
+              <a:defRPr sz="1200">
                 <a:solidFill>
                   <a:srgbClr val="FFFFFF"/>
                 </a:solidFill>
-                <a:latin typeface="Microsoft YaHei"/>
               </a:defRPr>
             </a:pPr>
             <a:r>
@@ -8696,14 +9092,14 @@
       </p:sp>
       <p:sp>
         <p:nvSpPr>
-          <p:cNvPr id="22" name="TextBox 21"/>
+          <p:cNvPr id="17" name="TextBox 16"/>
           <p:cNvSpPr txBox="1"/>
           <p:nvPr/>
         </p:nvSpPr>
         <p:spPr>
           <a:xfrm>
-            <a:off x="5486400" y="1920240"/>
-            <a:ext cx="457200" cy="457200"/>
+            <a:off x="5577839" y="2103120"/>
+            <a:ext cx="365760" cy="365760"/>
           </a:xfrm>
           <a:prstGeom prst="rect">
             <a:avLst/>
@@ -8716,12 +9112,11 @@
           </a:bodyPr>
           <a:lstStyle/>
           <a:p>
-            <a:pPr>
-              <a:defRPr sz="1800">
-                <a:solidFill>
-                  <a:srgbClr val="FFDF8C"/>
-                </a:solidFill>
-                <a:latin typeface="Segoe UI Symbol"/>
+            <a:pPr algn="r">
+              <a:defRPr sz="1600">
+                <a:solidFill>
+                  <a:srgbClr val="DFBA78"/>
+                </a:solidFill>
               </a:defRPr>
             </a:pPr>
             <a:r>
@@ -8732,14 +9127,14 @@
       </p:sp>
       <p:sp>
         <p:nvSpPr>
-          <p:cNvPr id="23" name="TextBox 22"/>
+          <p:cNvPr id="18" name="TextBox 17"/>
           <p:cNvSpPr txBox="1"/>
           <p:nvPr/>
         </p:nvSpPr>
         <p:spPr>
           <a:xfrm>
-            <a:off x="3657600" y="2377440"/>
-            <a:ext cx="2377440" cy="548640"/>
+            <a:off x="3749039" y="2651760"/>
+            <a:ext cx="2286000" cy="457200"/>
           </a:xfrm>
           <a:prstGeom prst="rect">
             <a:avLst/>
@@ -8753,11 +9148,10 @@
           <a:lstStyle/>
           <a:p>
             <a:pPr algn="ctr">
-              <a:defRPr sz="2600" b="1">
-                <a:solidFill>
-                  <a:srgbClr val="FFDF8C"/>
-                </a:solidFill>
-                <a:latin typeface="Microsoft YaHei"/>
+              <a:defRPr sz="2200" b="1">
+                <a:solidFill>
+                  <a:srgbClr val="DFBA78"/>
+                </a:solidFill>
               </a:defRPr>
             </a:pPr>
             <a:r>
@@ -8768,14 +9162,14 @@
       </p:sp>
       <p:sp>
         <p:nvSpPr>
-          <p:cNvPr id="24" name="TextBox 23"/>
+          <p:cNvPr id="19" name="TextBox 18"/>
           <p:cNvSpPr txBox="1"/>
           <p:nvPr/>
         </p:nvSpPr>
         <p:spPr>
           <a:xfrm>
-            <a:off x="3657600" y="3017520"/>
-            <a:ext cx="2377440" cy="365760"/>
+            <a:off x="3749039" y="3200400"/>
+            <a:ext cx="2286000" cy="274320"/>
           </a:xfrm>
           <a:prstGeom prst="rect">
             <a:avLst/>
@@ -8789,11 +9183,10 @@
           <a:lstStyle/>
           <a:p>
             <a:pPr algn="ctr">
-              <a:defRPr sz="1300">
-                <a:solidFill>
-                  <a:srgbClr val="D0D0D0"/>
-                </a:solidFill>
-                <a:latin typeface="Microsoft YaHei"/>
+              <a:defRPr sz="1100">
+                <a:solidFill>
+                  <a:srgbClr val="CCCCCC"/>
+                </a:solidFill>
               </a:defRPr>
             </a:pPr>
             <a:r>
@@ -8804,24 +9197,24 @@
       </p:sp>
       <p:sp>
         <p:nvSpPr>
-          <p:cNvPr id="25" name="Rounded Rectangle 24"/>
+          <p:cNvPr id="20" name="Rounded Rectangle 19"/>
           <p:cNvSpPr/>
           <p:nvPr/>
         </p:nvSpPr>
         <p:spPr>
           <a:xfrm>
-            <a:off x="3657600" y="4023360"/>
-            <a:ext cx="2377440" cy="2011680"/>
+            <a:off x="1371600" y="3931920"/>
+            <a:ext cx="2286000" cy="1828800"/>
           </a:xfrm>
           <a:prstGeom prst="roundRect">
             <a:avLst/>
           </a:prstGeom>
           <a:solidFill>
-            <a:srgbClr val="1C3350"/>
+            <a:srgbClr val="1A2F4C"/>
           </a:solidFill>
           <a:ln w="12700">
             <a:solidFill>
-              <a:srgbClr val="3A5575"/>
+              <a:srgbClr val="3A5A7A"/>
             </a:solidFill>
           </a:ln>
         </p:spPr>
@@ -8849,14 +9242,14 @@
       </p:sp>
       <p:sp>
         <p:nvSpPr>
-          <p:cNvPr id="26" name="TextBox 25"/>
+          <p:cNvPr id="21" name="TextBox 20"/>
           <p:cNvSpPr txBox="1"/>
           <p:nvPr/>
         </p:nvSpPr>
         <p:spPr>
           <a:xfrm>
-            <a:off x="3749040" y="4114800"/>
-            <a:ext cx="2194560" cy="365760"/>
+            <a:off x="1463040" y="4023360"/>
+            <a:ext cx="1371600" cy="274320"/>
           </a:xfrm>
           <a:prstGeom prst="rect">
             <a:avLst/>
@@ -8870,29 +9263,28 @@
           <a:lstStyle/>
           <a:p>
             <a:pPr>
-              <a:defRPr sz="1400">
+              <a:defRPr sz="1200">
                 <a:solidFill>
                   <a:srgbClr val="FFFFFF"/>
                 </a:solidFill>
-                <a:latin typeface="Microsoft YaHei"/>
               </a:defRPr>
             </a:pPr>
             <a:r>
-              <a:t>应用禁区</a:t>
-            </a:r>
-          </a:p>
-        </p:txBody>
-      </p:sp>
-      <p:sp>
-        <p:nvSpPr>
-          <p:cNvPr id="27" name="TextBox 26"/>
+              <a:t>中等场景</a:t>
+            </a:r>
+          </a:p>
+        </p:txBody>
+      </p:sp>
+      <p:sp>
+        <p:nvSpPr>
+          <p:cNvPr id="22" name="TextBox 21"/>
           <p:cNvSpPr txBox="1"/>
           <p:nvPr/>
         </p:nvSpPr>
         <p:spPr>
           <a:xfrm>
-            <a:off x="5486400" y="4114800"/>
-            <a:ext cx="457200" cy="457200"/>
+            <a:off x="3200400" y="4023360"/>
+            <a:ext cx="365760" cy="365760"/>
           </a:xfrm>
           <a:prstGeom prst="rect">
             <a:avLst/>
@@ -8905,30 +9297,29 @@
           </a:bodyPr>
           <a:lstStyle/>
           <a:p>
-            <a:pPr>
-              <a:defRPr sz="1800">
-                <a:solidFill>
-                  <a:srgbClr val="D0D0D0"/>
-                </a:solidFill>
-                <a:latin typeface="Segoe UI Symbol"/>
+            <a:pPr algn="r">
+              <a:defRPr sz="1600">
+                <a:solidFill>
+                  <a:srgbClr val="FFFFFF"/>
+                </a:solidFill>
               </a:defRPr>
             </a:pPr>
             <a:r>
-              <a:t>⊘</a:t>
-            </a:r>
-          </a:p>
-        </p:txBody>
-      </p:sp>
-      <p:sp>
-        <p:nvSpPr>
-          <p:cNvPr id="28" name="TextBox 27"/>
+              <a:t>⊖</a:t>
+            </a:r>
+          </a:p>
+        </p:txBody>
+      </p:sp>
+      <p:sp>
+        <p:nvSpPr>
+          <p:cNvPr id="23" name="TextBox 22"/>
           <p:cNvSpPr txBox="1"/>
           <p:nvPr/>
         </p:nvSpPr>
         <p:spPr>
           <a:xfrm>
-            <a:off x="3657600" y="5212080"/>
-            <a:ext cx="2377440" cy="365760"/>
+            <a:off x="1371600" y="4572000"/>
+            <a:ext cx="2286000" cy="457200"/>
           </a:xfrm>
           <a:prstGeom prst="rect">
             <a:avLst/>
@@ -8942,29 +9333,28 @@
           <a:lstStyle/>
           <a:p>
             <a:pPr algn="ctr">
-              <a:defRPr sz="1300">
-                <a:solidFill>
-                  <a:srgbClr val="D0D0D0"/>
-                </a:solidFill>
-                <a:latin typeface="Microsoft YaHei"/>
+              <a:defRPr sz="2200" b="1">
+                <a:solidFill>
+                  <a:srgbClr val="DFBA78"/>
+                </a:solidFill>
               </a:defRPr>
             </a:pPr>
             <a:r>
-              <a:t>不可靠，需人工完全接管</a:t>
-            </a:r>
-          </a:p>
-        </p:txBody>
-      </p:sp>
-      <p:sp>
-        <p:nvSpPr>
-          <p:cNvPr id="29" name="TextBox 28"/>
+              <a:t>无提升</a:t>
+            </a:r>
+          </a:p>
+        </p:txBody>
+      </p:sp>
+      <p:sp>
+        <p:nvSpPr>
+          <p:cNvPr id="24" name="TextBox 23"/>
           <p:cNvSpPr txBox="1"/>
           <p:nvPr/>
         </p:nvSpPr>
         <p:spPr>
           <a:xfrm>
-            <a:off x="4389120" y="4389120"/>
-            <a:ext cx="1005840" cy="914400"/>
+            <a:off x="1371600" y="5120640"/>
+            <a:ext cx="2286000" cy="274320"/>
           </a:xfrm>
           <a:prstGeom prst="rect">
             <a:avLst/>
@@ -8978,144 +9368,38 @@
           <a:lstStyle/>
           <a:p>
             <a:pPr algn="ctr">
-              <a:defRPr sz="4500">
-                <a:solidFill>
-                  <a:srgbClr val="D0D0D0"/>
-                </a:solidFill>
-                <a:latin typeface="Segoe UI Emoji"/>
+              <a:defRPr sz="1100">
+                <a:solidFill>
+                  <a:srgbClr val="CCCCCC"/>
+                </a:solidFill>
               </a:defRPr>
             </a:pPr>
             <a:r>
-              <a:t>🔗</a:t>
-            </a:r>
-          </a:p>
-        </p:txBody>
-      </p:sp>
-      <p:cxnSp>
-        <p:nvCxnSpPr>
-          <p:cNvPr id="30" name="Connector 29"/>
-          <p:cNvCxnSpPr/>
-          <p:nvPr/>
-        </p:nvCxnSpPr>
-        <p:spPr>
-          <a:xfrm>
-            <a:off x="4572000" y="4480560"/>
-            <a:ext cx="640080" cy="640080"/>
-          </a:xfrm>
-          <a:prstGeom prst="line">
-            <a:avLst/>
-          </a:prstGeom>
-          <a:ln w="38100">
-            <a:solidFill>
-              <a:srgbClr val="FFDF8C"/>
-            </a:solidFill>
-          </a:ln>
-        </p:spPr>
-        <p:style>
-          <a:lnRef idx="2">
-            <a:schemeClr val="accent1"/>
-          </a:lnRef>
-          <a:fillRef idx="0">
-            <a:schemeClr val="accent1"/>
-          </a:fillRef>
-          <a:effectRef idx="1">
-            <a:schemeClr val="accent1"/>
-          </a:effectRef>
-          <a:fontRef idx="minor">
-            <a:schemeClr val="tx1"/>
-          </a:fontRef>
-        </p:style>
-      </p:cxnSp>
-      <p:cxnSp>
-        <p:nvCxnSpPr>
-          <p:cNvPr id="31" name="Connector 30"/>
-          <p:cNvCxnSpPr/>
-          <p:nvPr/>
-        </p:nvCxnSpPr>
-        <p:spPr>
-          <a:xfrm flipV="1">
-            <a:off x="1371600" y="2743200"/>
-            <a:ext cx="1920240" cy="914400"/>
-          </a:xfrm>
-          <a:prstGeom prst="curvedConnector3">
-            <a:avLst/>
-          </a:prstGeom>
-          <a:ln w="25400">
-            <a:solidFill>
-              <a:srgbClr val="FFDF8C"/>
-            </a:solidFill>
-          </a:ln>
-        </p:spPr>
-        <p:style>
-          <a:lnRef idx="2">
-            <a:schemeClr val="accent1"/>
-          </a:lnRef>
-          <a:fillRef idx="0">
-            <a:schemeClr val="accent1"/>
-          </a:fillRef>
-          <a:effectRef idx="1">
-            <a:schemeClr val="accent1"/>
-          </a:effectRef>
-          <a:fontRef idx="minor">
-            <a:schemeClr val="tx1"/>
-          </a:fontRef>
-        </p:style>
-      </p:cxnSp>
-      <p:cxnSp>
-        <p:nvCxnSpPr>
-          <p:cNvPr id="32" name="Connector 31"/>
-          <p:cNvCxnSpPr/>
-          <p:nvPr/>
-        </p:nvCxnSpPr>
-        <p:spPr>
-          <a:xfrm>
-            <a:off x="3840480" y="2286000"/>
-            <a:ext cx="2011680" cy="1371600"/>
-          </a:xfrm>
-          <a:prstGeom prst="curvedConnector3">
-            <a:avLst/>
-          </a:prstGeom>
-          <a:ln w="25400">
-            <a:solidFill>
-              <a:srgbClr val="FFDF8C"/>
-            </a:solidFill>
-          </a:ln>
-        </p:spPr>
-        <p:style>
-          <a:lnRef idx="2">
-            <a:schemeClr val="accent1"/>
-          </a:lnRef>
-          <a:fillRef idx="0">
-            <a:schemeClr val="accent1"/>
-          </a:fillRef>
-          <a:effectRef idx="1">
-            <a:schemeClr val="accent1"/>
-          </a:effectRef>
-          <a:fontRef idx="minor">
-            <a:schemeClr val="tx1"/>
-          </a:fontRef>
-        </p:style>
-      </p:cxnSp>
-      <p:sp>
-        <p:nvSpPr>
-          <p:cNvPr id="33" name="Rounded Rectangle 32"/>
+              <a:t>效率持平</a:t>
+            </a:r>
+          </a:p>
+        </p:txBody>
+      </p:sp>
+      <p:sp>
+        <p:nvSpPr>
+          <p:cNvPr id="25" name="Rounded Rectangle 24"/>
           <p:cNvSpPr/>
           <p:nvPr/>
         </p:nvSpPr>
         <p:spPr>
           <a:xfrm>
-            <a:off x="6858000" y="1463040"/>
-            <a:ext cx="4846320" cy="1645920"/>
+            <a:off x="3749039" y="3931920"/>
+            <a:ext cx="2286000" cy="1828800"/>
           </a:xfrm>
           <a:prstGeom prst="roundRect">
             <a:avLst/>
           </a:prstGeom>
           <a:solidFill>
-            <a:srgbClr val="152842"/>
+            <a:srgbClr val="1A2F4C"/>
           </a:solidFill>
           <a:ln w="12700">
             <a:solidFill>
-              <a:srgbClr val="3A5575"/>
+              <a:srgbClr val="3A5A7A"/>
             </a:solidFill>
           </a:ln>
         </p:spPr>
@@ -9143,14 +9427,14 @@
       </p:sp>
       <p:sp>
         <p:nvSpPr>
-          <p:cNvPr id="34" name="TextBox 33"/>
+          <p:cNvPr id="26" name="TextBox 25"/>
           <p:cNvSpPr txBox="1"/>
           <p:nvPr/>
         </p:nvSpPr>
         <p:spPr>
           <a:xfrm>
-            <a:off x="6858000" y="1554480"/>
-            <a:ext cx="4846320" cy="365760"/>
+            <a:off x="3840479" y="4023360"/>
+            <a:ext cx="1371600" cy="274320"/>
           </a:xfrm>
           <a:prstGeom prst="rect">
             <a:avLst/>
@@ -9163,30 +9447,29 @@
           </a:bodyPr>
           <a:lstStyle/>
           <a:p>
-            <a:pPr algn="ctr">
-              <a:defRPr sz="1600" b="1">
-                <a:solidFill>
-                  <a:srgbClr val="FFDF8C"/>
-                </a:solidFill>
-                <a:latin typeface="Microsoft YaHei"/>
+            <a:pPr>
+              <a:defRPr sz="1200">
+                <a:solidFill>
+                  <a:srgbClr val="FFFFFF"/>
+                </a:solidFill>
               </a:defRPr>
             </a:pPr>
             <a:r>
-              <a:t>四大瓶颈</a:t>
-            </a:r>
-          </a:p>
-        </p:txBody>
-      </p:sp>
-      <p:sp>
-        <p:nvSpPr>
-          <p:cNvPr id="35" name="TextBox 34"/>
+              <a:t>应用禁区</a:t>
+            </a:r>
+          </a:p>
+        </p:txBody>
+      </p:sp>
+      <p:sp>
+        <p:nvSpPr>
+          <p:cNvPr id="27" name="TextBox 26"/>
           <p:cNvSpPr txBox="1"/>
           <p:nvPr/>
         </p:nvSpPr>
         <p:spPr>
           <a:xfrm>
-            <a:off x="7132320" y="2011680"/>
-            <a:ext cx="2286000" cy="365760"/>
+            <a:off x="5577839" y="4023360"/>
+            <a:ext cx="365760" cy="365760"/>
           </a:xfrm>
           <a:prstGeom prst="rect">
             <a:avLst/>
@@ -9199,30 +9482,26 @@
           </a:bodyPr>
           <a:lstStyle/>
           <a:p>
-            <a:pPr>
-              <a:defRPr sz="1400">
+            <a:pPr algn="r">
+              <a:defRPr sz="1600">
                 <a:solidFill>
                   <a:srgbClr val="FFFFFF"/>
                 </a:solidFill>
-                <a:latin typeface="Microsoft YaHei"/>
               </a:defRPr>
             </a:pPr>
-            <a:r>
-              <a:t>☁  数据字典幻觉</a:t>
-            </a:r>
-          </a:p>
-        </p:txBody>
-      </p:sp>
-      <p:sp>
-        <p:nvSpPr>
-          <p:cNvPr id="36" name="TextBox 35"/>
+          </a:p>
+        </p:txBody>
+      </p:sp>
+      <p:sp>
+        <p:nvSpPr>
+          <p:cNvPr id="28" name="TextBox 27"/>
           <p:cNvSpPr txBox="1"/>
           <p:nvPr/>
         </p:nvSpPr>
         <p:spPr>
           <a:xfrm>
-            <a:off x="9418320" y="2011680"/>
-            <a:ext cx="2286000" cy="365760"/>
+            <a:off x="3749039" y="5120640"/>
+            <a:ext cx="2286000" cy="274320"/>
           </a:xfrm>
           <a:prstGeom prst="rect">
             <a:avLst/>
@@ -9235,112 +9514,36 @@
           </a:bodyPr>
           <a:lstStyle/>
           <a:p>
-            <a:pPr>
-              <a:defRPr sz="1400">
-                <a:solidFill>
-                  <a:srgbClr val="FFFFFF"/>
-                </a:solidFill>
-                <a:latin typeface="Microsoft YaHei"/>
+            <a:pPr algn="ctr">
+              <a:defRPr sz="1100">
+                <a:solidFill>
+                  <a:srgbClr val="CCCCCC"/>
+                </a:solidFill>
               </a:defRPr>
             </a:pPr>
             <a:r>
-              <a:t>🔗  接口规则缺失</a:t>
-            </a:r>
-          </a:p>
-        </p:txBody>
-      </p:sp>
-      <p:sp>
-        <p:nvSpPr>
-          <p:cNvPr id="37" name="TextBox 36"/>
-          <p:cNvSpPr txBox="1"/>
-          <p:nvPr/>
-        </p:nvSpPr>
-        <p:spPr>
-          <a:xfrm>
-            <a:off x="7132320" y="2468880"/>
-            <a:ext cx="2286000" cy="365760"/>
-          </a:xfrm>
-          <a:prstGeom prst="rect">
-            <a:avLst/>
-          </a:prstGeom>
-          <a:noFill/>
-        </p:spPr>
-        <p:txBody>
-          <a:bodyPr wrap="none">
-            <a:spAutoFit/>
-          </a:bodyPr>
-          <a:lstStyle/>
-          <a:p>
-            <a:pPr>
-              <a:defRPr sz="1400">
-                <a:solidFill>
-                  <a:srgbClr val="FFFFFF"/>
-                </a:solidFill>
-                <a:latin typeface="Microsoft YaHei"/>
-              </a:defRPr>
-            </a:pPr>
-            <a:r>
-              <a:t>📈  修复成本反超</a:t>
-            </a:r>
-          </a:p>
-        </p:txBody>
-      </p:sp>
-      <p:sp>
-        <p:nvSpPr>
-          <p:cNvPr id="38" name="TextBox 37"/>
-          <p:cNvSpPr txBox="1"/>
-          <p:nvPr/>
-        </p:nvSpPr>
-        <p:spPr>
-          <a:xfrm>
-            <a:off x="9418320" y="2468880"/>
-            <a:ext cx="2286000" cy="365760"/>
-          </a:xfrm>
-          <a:prstGeom prst="rect">
-            <a:avLst/>
-          </a:prstGeom>
-          <a:noFill/>
-        </p:spPr>
-        <p:txBody>
-          <a:bodyPr wrap="none">
-            <a:spAutoFit/>
-          </a:bodyPr>
-          <a:lstStyle/>
-          <a:p>
-            <a:pPr>
-              <a:defRPr sz="1400">
-                <a:solidFill>
-                  <a:srgbClr val="FFFFFF"/>
-                </a:solidFill>
-                <a:latin typeface="Microsoft YaHei"/>
-              </a:defRPr>
-            </a:pPr>
-            <a:r>
-              <a:t>💬  提示词被忽略</a:t>
-            </a:r>
-          </a:p>
-        </p:txBody>
-      </p:sp>
-      <p:sp>
-        <p:nvSpPr>
-          <p:cNvPr id="39" name="Rounded Rectangle 38"/>
+              <a:t>不可靠，需人工完全接管</a:t>
+            </a:r>
+          </a:p>
+        </p:txBody>
+      </p:sp>
+      <p:sp>
+        <p:nvSpPr>
+          <p:cNvPr id="29" name="Rectangle 28"/>
           <p:cNvSpPr/>
           <p:nvPr/>
         </p:nvSpPr>
         <p:spPr>
           <a:xfrm>
-            <a:off x="6858000" y="3291840"/>
-            <a:ext cx="4846320" cy="1645920"/>
-          </a:xfrm>
-          <a:prstGeom prst="roundRect">
-            <a:avLst/>
-          </a:prstGeom>
-          <a:solidFill>
-            <a:srgbClr val="152842"/>
-          </a:solidFill>
-          <a:ln w="12700">
+            <a:off x="1463040" y="2834640"/>
+            <a:ext cx="2011680" cy="822960"/>
+          </a:xfrm>
+          <a:prstGeom prst="rect">
+            <a:avLst/>
+          </a:prstGeom>
+          <a:ln w="19050">
             <a:solidFill>
-              <a:srgbClr val="3A5575"/>
+              <a:srgbClr val="DFBA78"/>
             </a:solidFill>
           </a:ln>
         </p:spPr>
@@ -9368,274 +9571,21 @@
       </p:sp>
       <p:sp>
         <p:nvSpPr>
-          <p:cNvPr id="40" name="TextBox 39"/>
-          <p:cNvSpPr txBox="1"/>
-          <p:nvPr/>
-        </p:nvSpPr>
-        <p:spPr>
-          <a:xfrm>
-            <a:off x="6858000" y="3383280"/>
-            <a:ext cx="4846320" cy="365760"/>
-          </a:xfrm>
-          <a:prstGeom prst="rect">
-            <a:avLst/>
-          </a:prstGeom>
-          <a:noFill/>
-        </p:spPr>
-        <p:txBody>
-          <a:bodyPr wrap="none">
-            <a:spAutoFit/>
-          </a:bodyPr>
-          <a:lstStyle/>
-          <a:p>
-            <a:pPr algn="ctr">
-              <a:defRPr sz="1600" b="1">
-                <a:solidFill>
-                  <a:srgbClr val="FFDF8C"/>
-                </a:solidFill>
-                <a:latin typeface="Microsoft YaHei"/>
-              </a:defRPr>
-            </a:pPr>
-            <a:r>
-              <a:t>工具选型</a:t>
-            </a:r>
-          </a:p>
-        </p:txBody>
-      </p:sp>
-      <p:sp>
-        <p:nvSpPr>
-          <p:cNvPr id="41" name="TextBox 40"/>
-          <p:cNvSpPr txBox="1"/>
-          <p:nvPr/>
-        </p:nvSpPr>
-        <p:spPr>
-          <a:xfrm>
-            <a:off x="7132320" y="3749039"/>
-            <a:ext cx="2286000" cy="365760"/>
-          </a:xfrm>
-          <a:prstGeom prst="rect">
-            <a:avLst/>
-          </a:prstGeom>
-          <a:noFill/>
-        </p:spPr>
-        <p:txBody>
-          <a:bodyPr wrap="none">
-            <a:spAutoFit/>
-          </a:bodyPr>
-          <a:lstStyle/>
-          <a:p>
-            <a:pPr>
-              <a:defRPr sz="1500" b="1">
-                <a:solidFill>
-                  <a:srgbClr val="FFFFFF"/>
-                </a:solidFill>
-                <a:latin typeface="Microsoft YaHei"/>
-              </a:defRPr>
-            </a:pPr>
-            <a:r>
-              <a:t>⚡ Claude Code</a:t>
-            </a:r>
-          </a:p>
-        </p:txBody>
-      </p:sp>
-      <p:sp>
-        <p:nvSpPr>
-          <p:cNvPr id="42" name="TextBox 41"/>
-          <p:cNvSpPr txBox="1"/>
-          <p:nvPr/>
-        </p:nvSpPr>
-        <p:spPr>
-          <a:xfrm>
-            <a:off x="7132320" y="4114800"/>
-            <a:ext cx="2286000" cy="365760"/>
-          </a:xfrm>
-          <a:prstGeom prst="rect">
-            <a:avLst/>
-          </a:prstGeom>
-          <a:noFill/>
-        </p:spPr>
-        <p:txBody>
-          <a:bodyPr wrap="none">
-            <a:spAutoFit/>
-          </a:bodyPr>
-          <a:lstStyle/>
-          <a:p>
-            <a:pPr>
-              <a:defRPr sz="1400">
-                <a:solidFill>
-                  <a:srgbClr val="FFFFFF"/>
-                </a:solidFill>
-                <a:latin typeface="Microsoft YaHei"/>
-              </a:defRPr>
-            </a:pPr>
-            <a:r>
-              <a:t>☑  业务理解优秀</a:t>
-            </a:r>
-          </a:p>
-        </p:txBody>
-      </p:sp>
-      <p:sp>
-        <p:nvSpPr>
-          <p:cNvPr id="43" name="TextBox 42"/>
-          <p:cNvSpPr txBox="1"/>
-          <p:nvPr/>
-        </p:nvSpPr>
-        <p:spPr>
-          <a:xfrm>
-            <a:off x="7132320" y="4480560"/>
-            <a:ext cx="2286000" cy="365760"/>
-          </a:xfrm>
-          <a:prstGeom prst="rect">
-            <a:avLst/>
-          </a:prstGeom>
-          <a:noFill/>
-        </p:spPr>
-        <p:txBody>
-          <a:bodyPr wrap="none">
-            <a:spAutoFit/>
-          </a:bodyPr>
-          <a:lstStyle/>
-          <a:p>
-            <a:pPr>
-              <a:defRPr sz="1400">
-                <a:solidFill>
-                  <a:srgbClr val="FFFFFF"/>
-                </a:solidFill>
-                <a:latin typeface="Microsoft YaHei"/>
-              </a:defRPr>
-            </a:pPr>
-            <a:r>
-              <a:t>☑  多文件解析强</a:t>
-            </a:r>
-          </a:p>
-        </p:txBody>
-      </p:sp>
-      <p:sp>
-        <p:nvSpPr>
-          <p:cNvPr id="44" name="TextBox 43"/>
-          <p:cNvSpPr txBox="1"/>
-          <p:nvPr/>
-        </p:nvSpPr>
-        <p:spPr>
-          <a:xfrm>
-            <a:off x="9418320" y="3749039"/>
-            <a:ext cx="2286000" cy="365760"/>
-          </a:xfrm>
-          <a:prstGeom prst="rect">
-            <a:avLst/>
-          </a:prstGeom>
-          <a:noFill/>
-        </p:spPr>
-        <p:txBody>
-          <a:bodyPr wrap="none">
-            <a:spAutoFit/>
-          </a:bodyPr>
-          <a:lstStyle/>
-          <a:p>
-            <a:pPr>
-              <a:defRPr sz="1500" b="1">
-                <a:solidFill>
-                  <a:srgbClr val="FFFFFF"/>
-                </a:solidFill>
-                <a:latin typeface="Microsoft YaHei"/>
-              </a:defRPr>
-            </a:pPr>
-            <a:r>
-              <a:t>🤖 Copilot</a:t>
-            </a:r>
-          </a:p>
-        </p:txBody>
-      </p:sp>
-      <p:sp>
-        <p:nvSpPr>
-          <p:cNvPr id="45" name="TextBox 44"/>
-          <p:cNvSpPr txBox="1"/>
-          <p:nvPr/>
-        </p:nvSpPr>
-        <p:spPr>
-          <a:xfrm>
-            <a:off x="9418320" y="4114800"/>
-            <a:ext cx="2286000" cy="365760"/>
-          </a:xfrm>
-          <a:prstGeom prst="rect">
-            <a:avLst/>
-          </a:prstGeom>
-          <a:noFill/>
-        </p:spPr>
-        <p:txBody>
-          <a:bodyPr wrap="none">
-            <a:spAutoFit/>
-          </a:bodyPr>
-          <a:lstStyle/>
-          <a:p>
-            <a:pPr>
-              <a:defRPr sz="1400">
-                <a:solidFill>
-                  <a:srgbClr val="FFFFFF"/>
-                </a:solidFill>
-                <a:latin typeface="Microsoft YaHei"/>
-              </a:defRPr>
-            </a:pPr>
-            <a:r>
-              <a:t>☒  业务理解受限</a:t>
-            </a:r>
-          </a:p>
-        </p:txBody>
-      </p:sp>
-      <p:sp>
-        <p:nvSpPr>
-          <p:cNvPr id="46" name="TextBox 45"/>
-          <p:cNvSpPr txBox="1"/>
-          <p:nvPr/>
-        </p:nvSpPr>
-        <p:spPr>
-          <a:xfrm>
-            <a:off x="9418320" y="4480560"/>
-            <a:ext cx="2286000" cy="365760"/>
-          </a:xfrm>
-          <a:prstGeom prst="rect">
-            <a:avLst/>
-          </a:prstGeom>
-          <a:noFill/>
-        </p:spPr>
-        <p:txBody>
-          <a:bodyPr wrap="none">
-            <a:spAutoFit/>
-          </a:bodyPr>
-          <a:lstStyle/>
-          <a:p>
-            <a:pPr>
-              <a:defRPr sz="1400">
-                <a:solidFill>
-                  <a:srgbClr val="FFFFFF"/>
-                </a:solidFill>
-                <a:latin typeface="Microsoft YaHei"/>
-              </a:defRPr>
-            </a:pPr>
-            <a:r>
-              <a:t>☒  多文件解析弱</a:t>
-            </a:r>
-          </a:p>
-        </p:txBody>
-      </p:sp>
-      <p:sp>
-        <p:nvSpPr>
-          <p:cNvPr id="47" name="Rounded Rectangle 46"/>
+          <p:cNvPr id="30" name="Rectangle 29"/>
           <p:cNvSpPr/>
           <p:nvPr/>
         </p:nvSpPr>
         <p:spPr>
           <a:xfrm>
-            <a:off x="6949440" y="5212080"/>
-            <a:ext cx="4846320" cy="1280160"/>
-          </a:xfrm>
-          <a:prstGeom prst="roundRect">
-            <a:avLst/>
-          </a:prstGeom>
-          <a:noFill/>
+            <a:off x="3840480" y="2286000"/>
+            <a:ext cx="2011680" cy="1371600"/>
+          </a:xfrm>
+          <a:prstGeom prst="rect">
+            <a:avLst/>
+          </a:prstGeom>
           <a:ln w="19050">
             <a:solidFill>
-              <a:srgbClr val="FFDF8C"/>
+              <a:srgbClr val="DFBA78"/>
             </a:solidFill>
           </a:ln>
         </p:spPr>
@@ -9663,24 +9613,56 @@
       </p:sp>
       <p:sp>
         <p:nvSpPr>
-          <p:cNvPr id="48" name="Rounded Rectangle 47"/>
+          <p:cNvPr id="31" name="TextBox 30"/>
+          <p:cNvSpPr txBox="1"/>
+          <p:nvPr/>
+        </p:nvSpPr>
+        <p:spPr>
+          <a:xfrm>
+            <a:off x="3749039" y="4389120"/>
+            <a:ext cx="2286000" cy="731520"/>
+          </a:xfrm>
+          <a:prstGeom prst="rect">
+            <a:avLst/>
+          </a:prstGeom>
+          <a:noFill/>
+        </p:spPr>
+        <p:txBody>
+          <a:bodyPr wrap="none">
+            <a:spAutoFit/>
+          </a:bodyPr>
+          <a:lstStyle/>
+          <a:p>
+            <a:pPr algn="ctr">
+              <a:defRPr sz="4000">
+                <a:solidFill>
+                  <a:srgbClr val="DFBA78"/>
+                </a:solidFill>
+              </a:defRPr>
+            </a:pPr>
+            <a:r>
+              <a:t>🔗</a:t>
+            </a:r>
+          </a:p>
+        </p:txBody>
+      </p:sp>
+      <p:sp>
+        <p:nvSpPr>
+          <p:cNvPr id="32" name="Rectangle 31"/>
           <p:cNvSpPr/>
           <p:nvPr/>
         </p:nvSpPr>
         <p:spPr>
           <a:xfrm>
-            <a:off x="6858000" y="5120640"/>
-            <a:ext cx="4846320" cy="1280160"/>
-          </a:xfrm>
-          <a:prstGeom prst="roundRect">
-            <a:avLst/>
-          </a:prstGeom>
-          <a:solidFill>
-            <a:srgbClr val="1C2A35"/>
-          </a:solidFill>
-          <a:ln w="12700">
+            <a:off x="4663440" y="4572000"/>
+            <a:ext cx="457200" cy="457200"/>
+          </a:xfrm>
+          <a:prstGeom prst="rect">
+            <a:avLst/>
+          </a:prstGeom>
+          <a:ln w="38100">
             <a:solidFill>
-              <a:srgbClr val="3A5575"/>
+              <a:srgbClr val="DFBA78"/>
             </a:solidFill>
           </a:ln>
         </p:spPr>
@@ -9708,14 +9690,660 @@
       </p:sp>
       <p:sp>
         <p:nvSpPr>
-          <p:cNvPr id="49" name="TextBox 48"/>
+          <p:cNvPr id="33" name="Rounded Rectangle 32"/>
+          <p:cNvSpPr/>
+          <p:nvPr/>
+        </p:nvSpPr>
+        <p:spPr>
+          <a:xfrm>
+            <a:off x="6766560" y="1645920"/>
+            <a:ext cx="5029200" cy="3474720"/>
+          </a:xfrm>
+          <a:prstGeom prst="roundRect">
+            <a:avLst/>
+          </a:prstGeom>
+          <a:solidFill>
+            <a:srgbClr val="122238"/>
+          </a:solidFill>
+          <a:ln w="12700">
+            <a:solidFill>
+              <a:srgbClr val="3A5A7A"/>
+            </a:solidFill>
+          </a:ln>
+        </p:spPr>
+        <p:style>
+          <a:lnRef idx="1">
+            <a:schemeClr val="accent1"/>
+          </a:lnRef>
+          <a:fillRef idx="3">
+            <a:schemeClr val="accent1"/>
+          </a:fillRef>
+          <a:effectRef idx="2">
+            <a:schemeClr val="accent1"/>
+          </a:effectRef>
+          <a:fontRef idx="minor">
+            <a:schemeClr val="lt1"/>
+          </a:fontRef>
+        </p:style>
+        <p:txBody>
+          <a:bodyPr rtlCol="0" anchor="ctr"/>
+          <a:lstStyle/>
+          <a:p>
+            <a:pPr algn="ctr"/>
+          </a:p>
+        </p:txBody>
+      </p:sp>
+      <p:sp>
+        <p:nvSpPr>
+          <p:cNvPr id="34" name="TextBox 33"/>
           <p:cNvSpPr txBox="1"/>
           <p:nvPr/>
         </p:nvSpPr>
         <p:spPr>
           <a:xfrm>
-            <a:off x="7040880" y="5303520"/>
-            <a:ext cx="4480560" cy="1005840"/>
+            <a:off x="6766560" y="1737360"/>
+            <a:ext cx="5029200" cy="365760"/>
+          </a:xfrm>
+          <a:prstGeom prst="rect">
+            <a:avLst/>
+          </a:prstGeom>
+          <a:noFill/>
+        </p:spPr>
+        <p:txBody>
+          <a:bodyPr wrap="none">
+            <a:spAutoFit/>
+          </a:bodyPr>
+          <a:lstStyle/>
+          <a:p>
+            <a:pPr algn="ctr">
+              <a:defRPr sz="1400" b="1">
+                <a:solidFill>
+                  <a:srgbClr val="DFBA78"/>
+                </a:solidFill>
+              </a:defRPr>
+            </a:pPr>
+            <a:r>
+              <a:t>四大瓶颈</a:t>
+            </a:r>
+          </a:p>
+        </p:txBody>
+      </p:sp>
+      <p:sp>
+        <p:nvSpPr>
+          <p:cNvPr id="35" name="TextBox 34"/>
+          <p:cNvSpPr txBox="1"/>
+          <p:nvPr/>
+        </p:nvSpPr>
+        <p:spPr>
+          <a:xfrm>
+            <a:off x="7132320" y="2194560"/>
+            <a:ext cx="365760" cy="274320"/>
+          </a:xfrm>
+          <a:prstGeom prst="rect">
+            <a:avLst/>
+          </a:prstGeom>
+          <a:noFill/>
+        </p:spPr>
+        <p:txBody>
+          <a:bodyPr wrap="none">
+            <a:spAutoFit/>
+          </a:bodyPr>
+          <a:lstStyle/>
+          <a:p>
+            <a:pPr>
+              <a:defRPr sz="1400">
+                <a:solidFill>
+                  <a:srgbClr val="FFFFFF"/>
+                </a:solidFill>
+              </a:defRPr>
+            </a:pPr>
+            <a:r>
+              <a:t>☁</a:t>
+            </a:r>
+          </a:p>
+        </p:txBody>
+      </p:sp>
+      <p:sp>
+        <p:nvSpPr>
+          <p:cNvPr id="36" name="TextBox 35"/>
+          <p:cNvSpPr txBox="1"/>
+          <p:nvPr/>
+        </p:nvSpPr>
+        <p:spPr>
+          <a:xfrm>
+            <a:off x="7406640" y="2194560"/>
+            <a:ext cx="1645920" cy="274320"/>
+          </a:xfrm>
+          <a:prstGeom prst="rect">
+            <a:avLst/>
+          </a:prstGeom>
+          <a:noFill/>
+        </p:spPr>
+        <p:txBody>
+          <a:bodyPr wrap="none">
+            <a:spAutoFit/>
+          </a:bodyPr>
+          <a:lstStyle/>
+          <a:p>
+            <a:pPr>
+              <a:defRPr sz="1200">
+                <a:solidFill>
+                  <a:srgbClr val="FFFFFF"/>
+                </a:solidFill>
+              </a:defRPr>
+            </a:pPr>
+            <a:r>
+              <a:t>数据字典幻觉</a:t>
+            </a:r>
+          </a:p>
+        </p:txBody>
+      </p:sp>
+      <p:sp>
+        <p:nvSpPr>
+          <p:cNvPr id="37" name="TextBox 36"/>
+          <p:cNvSpPr txBox="1"/>
+          <p:nvPr/>
+        </p:nvSpPr>
+        <p:spPr>
+          <a:xfrm>
+            <a:off x="9418320" y="2194560"/>
+            <a:ext cx="365760" cy="274320"/>
+          </a:xfrm>
+          <a:prstGeom prst="rect">
+            <a:avLst/>
+          </a:prstGeom>
+          <a:noFill/>
+        </p:spPr>
+        <p:txBody>
+          <a:bodyPr wrap="none">
+            <a:spAutoFit/>
+          </a:bodyPr>
+          <a:lstStyle/>
+          <a:p>
+            <a:pPr>
+              <a:defRPr sz="1400">
+                <a:solidFill>
+                  <a:srgbClr val="FFFFFF"/>
+                </a:solidFill>
+              </a:defRPr>
+            </a:pPr>
+            <a:r>
+              <a:t>🔌</a:t>
+            </a:r>
+          </a:p>
+        </p:txBody>
+      </p:sp>
+      <p:sp>
+        <p:nvSpPr>
+          <p:cNvPr id="38" name="TextBox 37"/>
+          <p:cNvSpPr txBox="1"/>
+          <p:nvPr/>
+        </p:nvSpPr>
+        <p:spPr>
+          <a:xfrm>
+            <a:off x="9692640" y="2194560"/>
+            <a:ext cx="1645920" cy="274320"/>
+          </a:xfrm>
+          <a:prstGeom prst="rect">
+            <a:avLst/>
+          </a:prstGeom>
+          <a:noFill/>
+        </p:spPr>
+        <p:txBody>
+          <a:bodyPr wrap="none">
+            <a:spAutoFit/>
+          </a:bodyPr>
+          <a:lstStyle/>
+          <a:p>
+            <a:pPr>
+              <a:defRPr sz="1200">
+                <a:solidFill>
+                  <a:srgbClr val="FFFFFF"/>
+                </a:solidFill>
+              </a:defRPr>
+            </a:pPr>
+            <a:r>
+              <a:t>接口规则缺失</a:t>
+            </a:r>
+          </a:p>
+        </p:txBody>
+      </p:sp>
+      <p:sp>
+        <p:nvSpPr>
+          <p:cNvPr id="39" name="TextBox 38"/>
+          <p:cNvSpPr txBox="1"/>
+          <p:nvPr/>
+        </p:nvSpPr>
+        <p:spPr>
+          <a:xfrm>
+            <a:off x="7132320" y="2651760"/>
+            <a:ext cx="365760" cy="274320"/>
+          </a:xfrm>
+          <a:prstGeom prst="rect">
+            <a:avLst/>
+          </a:prstGeom>
+          <a:noFill/>
+        </p:spPr>
+        <p:txBody>
+          <a:bodyPr wrap="none">
+            <a:spAutoFit/>
+          </a:bodyPr>
+          <a:lstStyle/>
+          <a:p>
+            <a:pPr>
+              <a:defRPr sz="1400">
+                <a:solidFill>
+                  <a:srgbClr val="FFFFFF"/>
+                </a:solidFill>
+              </a:defRPr>
+            </a:pPr>
+            <a:r>
+              <a:t>📈</a:t>
+            </a:r>
+          </a:p>
+        </p:txBody>
+      </p:sp>
+      <p:sp>
+        <p:nvSpPr>
+          <p:cNvPr id="40" name="TextBox 39"/>
+          <p:cNvSpPr txBox="1"/>
+          <p:nvPr/>
+        </p:nvSpPr>
+        <p:spPr>
+          <a:xfrm>
+            <a:off x="7406640" y="2651760"/>
+            <a:ext cx="1645920" cy="274320"/>
+          </a:xfrm>
+          <a:prstGeom prst="rect">
+            <a:avLst/>
+          </a:prstGeom>
+          <a:noFill/>
+        </p:spPr>
+        <p:txBody>
+          <a:bodyPr wrap="none">
+            <a:spAutoFit/>
+          </a:bodyPr>
+          <a:lstStyle/>
+          <a:p>
+            <a:pPr>
+              <a:defRPr sz="1200">
+                <a:solidFill>
+                  <a:srgbClr val="FFFFFF"/>
+                </a:solidFill>
+              </a:defRPr>
+            </a:pPr>
+            <a:r>
+              <a:t>修复成本反超</a:t>
+            </a:r>
+          </a:p>
+        </p:txBody>
+      </p:sp>
+      <p:sp>
+        <p:nvSpPr>
+          <p:cNvPr id="41" name="TextBox 40"/>
+          <p:cNvSpPr txBox="1"/>
+          <p:nvPr/>
+        </p:nvSpPr>
+        <p:spPr>
+          <a:xfrm>
+            <a:off x="9418320" y="2651760"/>
+            <a:ext cx="365760" cy="274320"/>
+          </a:xfrm>
+          <a:prstGeom prst="rect">
+            <a:avLst/>
+          </a:prstGeom>
+          <a:noFill/>
+        </p:spPr>
+        <p:txBody>
+          <a:bodyPr wrap="none">
+            <a:spAutoFit/>
+          </a:bodyPr>
+          <a:lstStyle/>
+          <a:p>
+            <a:pPr>
+              <a:defRPr sz="1400">
+                <a:solidFill>
+                  <a:srgbClr val="FFFFFF"/>
+                </a:solidFill>
+              </a:defRPr>
+            </a:pPr>
+            <a:r>
+              <a:t>💬</a:t>
+            </a:r>
+          </a:p>
+        </p:txBody>
+      </p:sp>
+      <p:sp>
+        <p:nvSpPr>
+          <p:cNvPr id="42" name="TextBox 41"/>
+          <p:cNvSpPr txBox="1"/>
+          <p:nvPr/>
+        </p:nvSpPr>
+        <p:spPr>
+          <a:xfrm>
+            <a:off x="9692640" y="2651760"/>
+            <a:ext cx="1645920" cy="274320"/>
+          </a:xfrm>
+          <a:prstGeom prst="rect">
+            <a:avLst/>
+          </a:prstGeom>
+          <a:noFill/>
+        </p:spPr>
+        <p:txBody>
+          <a:bodyPr wrap="none">
+            <a:spAutoFit/>
+          </a:bodyPr>
+          <a:lstStyle/>
+          <a:p>
+            <a:pPr>
+              <a:defRPr sz="1200">
+                <a:solidFill>
+                  <a:srgbClr val="FFFFFF"/>
+                </a:solidFill>
+              </a:defRPr>
+            </a:pPr>
+            <a:r>
+              <a:t>提示词被忽略</a:t>
+            </a:r>
+          </a:p>
+        </p:txBody>
+      </p:sp>
+      <p:sp>
+        <p:nvSpPr>
+          <p:cNvPr id="43" name="Rectangle 42"/>
+          <p:cNvSpPr/>
+          <p:nvPr/>
+        </p:nvSpPr>
+        <p:spPr>
+          <a:xfrm>
+            <a:off x="7132320" y="3108960"/>
+            <a:ext cx="4297680" cy="12700"/>
+          </a:xfrm>
+          <a:prstGeom prst="rect">
+            <a:avLst/>
+          </a:prstGeom>
+          <a:ln>
+            <a:solidFill>
+              <a:srgbClr val="3A5A7A"/>
+            </a:solidFill>
+          </a:ln>
+        </p:spPr>
+        <p:style>
+          <a:lnRef idx="1">
+            <a:schemeClr val="accent1"/>
+          </a:lnRef>
+          <a:fillRef idx="3">
+            <a:schemeClr val="accent1"/>
+          </a:fillRef>
+          <a:effectRef idx="2">
+            <a:schemeClr val="accent1"/>
+          </a:effectRef>
+          <a:fontRef idx="minor">
+            <a:schemeClr val="lt1"/>
+          </a:fontRef>
+        </p:style>
+        <p:txBody>
+          <a:bodyPr rtlCol="0" anchor="ctr"/>
+          <a:lstStyle/>
+          <a:p>
+            <a:pPr algn="ctr"/>
+          </a:p>
+        </p:txBody>
+      </p:sp>
+      <p:sp>
+        <p:nvSpPr>
+          <p:cNvPr id="44" name="TextBox 43"/>
+          <p:cNvSpPr txBox="1"/>
+          <p:nvPr/>
+        </p:nvSpPr>
+        <p:spPr>
+          <a:xfrm>
+            <a:off x="6766560" y="3291840"/>
+            <a:ext cx="5029200" cy="365760"/>
+          </a:xfrm>
+          <a:prstGeom prst="rect">
+            <a:avLst/>
+          </a:prstGeom>
+          <a:noFill/>
+        </p:spPr>
+        <p:txBody>
+          <a:bodyPr wrap="none">
+            <a:spAutoFit/>
+          </a:bodyPr>
+          <a:lstStyle/>
+          <a:p>
+            <a:pPr algn="ctr">
+              <a:defRPr sz="1400" b="1">
+                <a:solidFill>
+                  <a:srgbClr val="DFBA78"/>
+                </a:solidFill>
+              </a:defRPr>
+            </a:pPr>
+            <a:r>
+              <a:t>工具选型</a:t>
+            </a:r>
+          </a:p>
+        </p:txBody>
+      </p:sp>
+      <p:sp>
+        <p:nvSpPr>
+          <p:cNvPr id="45" name="TextBox 44"/>
+          <p:cNvSpPr txBox="1"/>
+          <p:nvPr/>
+        </p:nvSpPr>
+        <p:spPr>
+          <a:xfrm>
+            <a:off x="7132320" y="3749039"/>
+            <a:ext cx="2286000" cy="274320"/>
+          </a:xfrm>
+          <a:prstGeom prst="rect">
+            <a:avLst/>
+          </a:prstGeom>
+          <a:noFill/>
+        </p:spPr>
+        <p:txBody>
+          <a:bodyPr wrap="none">
+            <a:spAutoFit/>
+          </a:bodyPr>
+          <a:lstStyle/>
+          <a:p>
+            <a:pPr>
+              <a:defRPr sz="1400">
+                <a:solidFill>
+                  <a:srgbClr val="FFFFFF"/>
+                </a:solidFill>
+              </a:defRPr>
+            </a:pPr>
+            <a:r>
+              <a:t>⚡ Claude Code</a:t>
+            </a:r>
+          </a:p>
+        </p:txBody>
+      </p:sp>
+      <p:sp>
+        <p:nvSpPr>
+          <p:cNvPr id="46" name="TextBox 45"/>
+          <p:cNvSpPr txBox="1"/>
+          <p:nvPr/>
+        </p:nvSpPr>
+        <p:spPr>
+          <a:xfrm>
+            <a:off x="7132320" y="4114800"/>
+            <a:ext cx="2286000" cy="548640"/>
+          </a:xfrm>
+          <a:prstGeom prst="rect">
+            <a:avLst/>
+          </a:prstGeom>
+          <a:noFill/>
+        </p:spPr>
+        <p:txBody>
+          <a:bodyPr wrap="none">
+            <a:spAutoFit/>
+          </a:bodyPr>
+          <a:lstStyle/>
+          <a:p>
+            <a:pPr>
+              <a:defRPr sz="1100">
+                <a:solidFill>
+                  <a:srgbClr val="CCCCCC"/>
+                </a:solidFill>
+              </a:defRPr>
+            </a:pPr>
+            <a:r>
+              <a:t>✔ 业务理解优秀</a:t>
+            </a:r>
+          </a:p>
+          <a:p>
+            <a:pPr>
+              <a:defRPr sz="1100">
+                <a:solidFill>
+                  <a:srgbClr val="CCCCCC"/>
+                </a:solidFill>
+              </a:defRPr>
+            </a:pPr>
+            <a:r>
+              <a:t> 多文件解析强</a:t>
+            </a:r>
+          </a:p>
+        </p:txBody>
+      </p:sp>
+      <p:sp>
+        <p:nvSpPr>
+          <p:cNvPr id="47" name="TextBox 46"/>
+          <p:cNvSpPr txBox="1"/>
+          <p:nvPr/>
+        </p:nvSpPr>
+        <p:spPr>
+          <a:xfrm>
+            <a:off x="9418320" y="3749039"/>
+            <a:ext cx="2286000" cy="274320"/>
+          </a:xfrm>
+          <a:prstGeom prst="rect">
+            <a:avLst/>
+          </a:prstGeom>
+          <a:noFill/>
+        </p:spPr>
+        <p:txBody>
+          <a:bodyPr wrap="none">
+            <a:spAutoFit/>
+          </a:bodyPr>
+          <a:lstStyle/>
+          <a:p>
+            <a:pPr>
+              <a:defRPr sz="1400">
+                <a:solidFill>
+                  <a:srgbClr val="FFFFFF"/>
+                </a:solidFill>
+              </a:defRPr>
+            </a:pPr>
+            <a:r>
+              <a:t>🤖 Copilot</a:t>
+            </a:r>
+          </a:p>
+        </p:txBody>
+      </p:sp>
+      <p:sp>
+        <p:nvSpPr>
+          <p:cNvPr id="48" name="TextBox 47"/>
+          <p:cNvSpPr txBox="1"/>
+          <p:nvPr/>
+        </p:nvSpPr>
+        <p:spPr>
+          <a:xfrm>
+            <a:off x="9418320" y="4114800"/>
+            <a:ext cx="2286000" cy="548640"/>
+          </a:xfrm>
+          <a:prstGeom prst="rect">
+            <a:avLst/>
+          </a:prstGeom>
+          <a:noFill/>
+        </p:spPr>
+        <p:txBody>
+          <a:bodyPr wrap="none">
+            <a:spAutoFit/>
+          </a:bodyPr>
+          <a:lstStyle/>
+          <a:p>
+            <a:pPr>
+              <a:defRPr sz="1100">
+                <a:solidFill>
+                  <a:srgbClr val="CCCCCC"/>
+                </a:solidFill>
+              </a:defRPr>
+            </a:pPr>
+            <a:r>
+              <a:t>✖ 业务理解受限</a:t>
+            </a:r>
+          </a:p>
+          <a:p>
+            <a:pPr>
+              <a:defRPr sz="1100">
+                <a:solidFill>
+                  <a:srgbClr val="CCCCCC"/>
+                </a:solidFill>
+              </a:defRPr>
+            </a:pPr>
+            <a:r>
+              <a:t> 多文件解析弱</a:t>
+            </a:r>
+          </a:p>
+        </p:txBody>
+      </p:sp>
+      <p:sp>
+        <p:nvSpPr>
+          <p:cNvPr id="49" name="Rounded Rectangle 48"/>
+          <p:cNvSpPr/>
+          <p:nvPr/>
+        </p:nvSpPr>
+        <p:spPr>
+          <a:xfrm>
+            <a:off x="6766560" y="5303520"/>
+            <a:ext cx="5029200" cy="1097280"/>
+          </a:xfrm>
+          <a:prstGeom prst="roundRect">
+            <a:avLst/>
+          </a:prstGeom>
+          <a:solidFill>
+            <a:srgbClr val="122238"/>
+          </a:solidFill>
+          <a:ln w="19050">
+            <a:solidFill>
+              <a:srgbClr val="DFBA78"/>
+            </a:solidFill>
+          </a:ln>
+        </p:spPr>
+        <p:style>
+          <a:lnRef idx="1">
+            <a:schemeClr val="accent1"/>
+          </a:lnRef>
+          <a:fillRef idx="3">
+            <a:schemeClr val="accent1"/>
+          </a:fillRef>
+          <a:effectRef idx="2">
+            <a:schemeClr val="accent1"/>
+          </a:effectRef>
+          <a:fontRef idx="minor">
+            <a:schemeClr val="lt1"/>
+          </a:fontRef>
+        </p:style>
+        <p:txBody>
+          <a:bodyPr rtlCol="0" anchor="ctr"/>
+          <a:lstStyle/>
+          <a:p>
+            <a:pPr algn="ctr"/>
+          </a:p>
+        </p:txBody>
+      </p:sp>
+      <p:sp>
+        <p:nvSpPr>
+          <p:cNvPr id="50" name="TextBox 49"/>
+          <p:cNvSpPr txBox="1"/>
+          <p:nvPr/>
+        </p:nvSpPr>
+        <p:spPr>
+          <a:xfrm>
+            <a:off x="6949440" y="5486400"/>
+            <a:ext cx="4663440" cy="731520"/>
           </a:xfrm>
           <a:prstGeom prst="rect">
             <a:avLst/>
@@ -9729,38 +10357,34 @@
           <a:lstStyle/>
           <a:p>
             <a:r>
-              <a:rPr sz="1500" b="1">
-                <a:solidFill>
-                  <a:srgbClr val="FFDF8C"/>
-                </a:solidFill>
-                <a:latin typeface="Microsoft YaHei"/>
+              <a:rPr sz="1400" b="1">
+                <a:solidFill>
+                  <a:srgbClr val="DFBA78"/>
+                </a:solidFill>
               </a:rPr>
               <a:t>核心建议：</a:t>
             </a:r>
             <a:r>
-              <a:rPr sz="1500">
+              <a:rPr sz="1400">
                 <a:solidFill>
                   <a:srgbClr val="FFFFFF"/>
                 </a:solidFill>
-                <a:latin typeface="Microsoft YaHei"/>
               </a:rPr>
               <a:t>当前 AI 尚未具备处理 ABAP 中高难度任务的能力，仅推荐用于</a:t>
             </a:r>
             <a:r>
-              <a:rPr sz="1500" b="1">
-                <a:solidFill>
-                  <a:srgbClr val="FFDF8C"/>
-                </a:solidFill>
-                <a:latin typeface="Microsoft YaHei"/>
+              <a:rPr sz="1400" b="1">
+                <a:solidFill>
+                  <a:srgbClr val="DFBA78"/>
+                </a:solidFill>
               </a:rPr>
               <a:t>辅助简单逻辑</a:t>
             </a:r>
             <a:r>
-              <a:rPr sz="1500">
+              <a:rPr sz="1400">
                 <a:solidFill>
                   <a:srgbClr val="FFFFFF"/>
                 </a:solidFill>
-                <a:latin typeface="Microsoft YaHei"/>
               </a:rPr>
               <a:t>。</a:t>
             </a:r>
